--- a/docs/Campus-Vision-presentation.pptx
+++ b/docs/Campus-Vision-presentation.pptx
@@ -13,9 +13,11 @@
     <p:sldId id="261" r:id="rId7"/>
     <p:sldId id="262" r:id="rId8"/>
     <p:sldId id="263" r:id="rId9"/>
+    <p:sldId id="264" r:id="rId10"/>
+    <p:sldId id="265" r:id="rId11"/>
   </p:sldIdLst>
   <p:notesMasterIdLst>
-    <p:notesMasterId r:id="rId10"/>
+    <p:notesMasterId r:id="rId12"/>
   </p:notesMasterIdLst>
   <p:sldSz cx="12192000" cy="6858000"/>
   <p:notesSz cx="6858000" cy="12192000"/>
@@ -551,6 +553,94 @@
 </p:notes>
 </file>
 
+<file path=ppt/notesSlides/notesSlide10.xml><?xml version="1.0" encoding="utf-8"?>
+<p:notes xmlns:a="http://schemas.openxmlformats.org/drawingml/2006/main" xmlns:r="http://schemas.openxmlformats.org/officeDocument/2006/relationships" xmlns:p="http://schemas.openxmlformats.org/presentationml/2006/main">
+  <p:cSld>
+    <p:spTree>
+      <p:nvGrpSpPr>
+        <p:cNvPr id="1" name=""/>
+        <p:cNvGrpSpPr/>
+        <p:nvPr/>
+      </p:nvGrpSpPr>
+      <p:grpSpPr>
+        <a:xfrm>
+          <a:off x="0" y="0"/>
+          <a:ext cx="0" cy="0"/>
+          <a:chOff x="0" y="0"/>
+          <a:chExt cx="0" cy="0"/>
+        </a:xfrm>
+      </p:grpSpPr>
+      <p:sp>
+        <p:nvSpPr>
+          <p:cNvPr id="2" name="Slide Image Placeholder 1"/>
+          <p:cNvSpPr>
+            <a:spLocks noGrp="1" noRot="1" noChangeAspect="1"/>
+          </p:cNvSpPr>
+          <p:nvPr>
+            <p:ph type="sldImg"/>
+          </p:nvPr>
+        </p:nvSpPr>
+        <p:spPr/>
+      </p:sp>
+      <p:sp>
+        <p:nvSpPr>
+          <p:cNvPr id="3" name="Notes Placeholder 2"/>
+          <p:cNvSpPr>
+            <a:spLocks noGrp="1"/>
+          </p:cNvSpPr>
+          <p:nvPr>
+            <p:ph type="body" idx="1"/>
+          </p:nvPr>
+        </p:nvSpPr>
+        <p:spPr/>
+        <p:txBody>
+          <a:bodyPr/>
+          <a:lstStyle/>
+          <a:p>
+            <a:r>
+              <a:rPr lang="en-US" dirty="0"/>
+              <a:t>Цифры взяты из живого ответа сервиса на прод-сайте для Nazarbayev University: 28 фото после проверки, 8 соцсетей, поиск 17–23 секунды.</a:t>
+            </a:r>
+            <a:endParaRPr lang="en-US" dirty="0"/>
+          </a:p>
+        </p:txBody>
+      </p:sp>
+      <p:sp>
+        <p:nvSpPr>
+          <p:cNvPr id="4" name="Slide Number Placeholder 3"/>
+          <p:cNvSpPr>
+            <a:spLocks noGrp="1"/>
+          </p:cNvSpPr>
+          <p:nvPr>
+            <p:ph type="sldNum" sz="quarter" idx="10"/>
+          </p:nvPr>
+        </p:nvSpPr>
+        <p:spPr/>
+        <p:txBody>
+          <a:bodyPr/>
+          <a:lstStyle/>
+          <a:p>
+            <a:fld id="{F7021451-1387-4CA6-816F-3879F97B5CBC}" type="slidenum">
+              <a:rPr lang="en-US"/>
+              <a:t>10</a:t>
+            </a:fld>
+            <a:endParaRPr lang="en-US"/>
+          </a:p>
+        </p:txBody>
+      </p:sp>
+    </p:spTree>
+    <p:extLst>
+      <p:ext uri="{BB962C8B-B14F-4D97-AF65-F5344CB8AC3E}">
+        <p14:creationId xmlns:p14="http://schemas.microsoft.com/office/powerpoint/2010/main" val="1024086991"/>
+      </p:ext>
+    </p:extLst>
+  </p:cSld>
+  <p:clrMapOvr>
+    <a:masterClrMapping/>
+  </p:clrMapOvr>
+</p:notes>
+</file>
+
 <file path=ppt/notesSlides/notesSlide2.xml><?xml version="1.0" encoding="utf-8"?>
 <p:notes xmlns:a="http://schemas.openxmlformats.org/drawingml/2006/main" xmlns:r="http://schemas.openxmlformats.org/officeDocument/2006/relationships" xmlns:p="http://schemas.openxmlformats.org/presentationml/2006/main">
   <p:cSld>
@@ -949,7 +1039,7 @@
           <a:p>
             <a:r>
               <a:rPr lang="en-US" dirty="0"/>
-              <a:t>Пороги из кода: скрываем confidence &lt; 0.35, желтый бейдж 0.35–0.6.</a:t>
+              <a:t>Примеры взяты из реальных запросов к сервису. Работает для университетов и колледжей любой страны.</a:t>
             </a:r>
             <a:endParaRPr lang="en-US" dirty="0"/>
           </a:p>
@@ -1037,7 +1127,7 @@
           <a:p>
             <a:r>
               <a:rPr lang="en-US" dirty="0"/>
-              <a:t>Ключи API не нужны для Commons/Openverse; нужен только GEMINI_API_KEY.</a:t>
+              <a:t>Данные факультетов взяты из реального ответа сервиса для Nazarbayev University.</a:t>
             </a:r>
             <a:endParaRPr lang="en-US" dirty="0"/>
           </a:p>
@@ -1125,7 +1215,7 @@
           <a:p>
             <a:r>
               <a:rPr lang="en-US" dirty="0"/>
-              <a:t>Цифры взяты из живого ответа сервиса на прод-сайте для Nazarbayev University: 28 фото после проверки, 8 соцсетей, поиск 17–23 секунды.</a:t>
+              <a:t>Пороги из кода: скрываем confidence &lt; 0.35, желтый бейдж 0.35–0.6.</a:t>
             </a:r>
             <a:endParaRPr lang="en-US" dirty="0"/>
           </a:p>
@@ -1149,6 +1239,94 @@
             <a:fld id="{F7021451-1387-4CA6-816F-3879F97B5CBC}" type="slidenum">
               <a:rPr lang="en-US"/>
               <a:t>8</a:t>
+            </a:fld>
+            <a:endParaRPr lang="en-US"/>
+          </a:p>
+        </p:txBody>
+      </p:sp>
+    </p:spTree>
+    <p:extLst>
+      <p:ext uri="{BB962C8B-B14F-4D97-AF65-F5344CB8AC3E}">
+        <p14:creationId xmlns:p14="http://schemas.microsoft.com/office/powerpoint/2010/main" val="1024086991"/>
+      </p:ext>
+    </p:extLst>
+  </p:cSld>
+  <p:clrMapOvr>
+    <a:masterClrMapping/>
+  </p:clrMapOvr>
+</p:notes>
+</file>
+
+<file path=ppt/notesSlides/notesSlide9.xml><?xml version="1.0" encoding="utf-8"?>
+<p:notes xmlns:a="http://schemas.openxmlformats.org/drawingml/2006/main" xmlns:r="http://schemas.openxmlformats.org/officeDocument/2006/relationships" xmlns:p="http://schemas.openxmlformats.org/presentationml/2006/main">
+  <p:cSld>
+    <p:spTree>
+      <p:nvGrpSpPr>
+        <p:cNvPr id="1" name=""/>
+        <p:cNvGrpSpPr/>
+        <p:nvPr/>
+      </p:nvGrpSpPr>
+      <p:grpSpPr>
+        <a:xfrm>
+          <a:off x="0" y="0"/>
+          <a:ext cx="0" cy="0"/>
+          <a:chOff x="0" y="0"/>
+          <a:chExt cx="0" cy="0"/>
+        </a:xfrm>
+      </p:grpSpPr>
+      <p:sp>
+        <p:nvSpPr>
+          <p:cNvPr id="2" name="Slide Image Placeholder 1"/>
+          <p:cNvSpPr>
+            <a:spLocks noGrp="1" noRot="1" noChangeAspect="1"/>
+          </p:cNvSpPr>
+          <p:nvPr>
+            <p:ph type="sldImg"/>
+          </p:nvPr>
+        </p:nvSpPr>
+        <p:spPr/>
+      </p:sp>
+      <p:sp>
+        <p:nvSpPr>
+          <p:cNvPr id="3" name="Notes Placeholder 2"/>
+          <p:cNvSpPr>
+            <a:spLocks noGrp="1"/>
+          </p:cNvSpPr>
+          <p:nvPr>
+            <p:ph type="body" idx="1"/>
+          </p:nvPr>
+        </p:nvSpPr>
+        <p:spPr/>
+        <p:txBody>
+          <a:bodyPr/>
+          <a:lstStyle/>
+          <a:p>
+            <a:r>
+              <a:rPr lang="en-US" dirty="0"/>
+              <a:t>Ключи API не нужны для Commons/Openverse; нужен только GEMINI_API_KEY.</a:t>
+            </a:r>
+            <a:endParaRPr lang="en-US" dirty="0"/>
+          </a:p>
+        </p:txBody>
+      </p:sp>
+      <p:sp>
+        <p:nvSpPr>
+          <p:cNvPr id="4" name="Slide Number Placeholder 3"/>
+          <p:cNvSpPr>
+            <a:spLocks noGrp="1"/>
+          </p:cNvSpPr>
+          <p:nvPr>
+            <p:ph type="sldNum" sz="quarter" idx="10"/>
+          </p:nvPr>
+        </p:nvSpPr>
+        <p:spPr/>
+        <p:txBody>
+          <a:bodyPr/>
+          <a:lstStyle/>
+          <a:p>
+            <a:fld id="{F7021451-1387-4CA6-816F-3879F97B5CBC}" type="slidenum">
+              <a:rPr lang="en-US"/>
+              <a:t>9</a:t>
             </a:fld>
             <a:endParaRPr lang="en-US"/>
           </a:p>
@@ -2089,6 +2267,588 @@
 </p:sld>
 </file>
 
+<file path=ppt/slides/slide10.xml><?xml version="1.0" encoding="utf-8"?>
+<p:sld xmlns:a="http://schemas.openxmlformats.org/drawingml/2006/main" xmlns:r="http://schemas.openxmlformats.org/officeDocument/2006/relationships" xmlns:p="http://schemas.openxmlformats.org/presentationml/2006/main">
+  <p:cSld name="Slide 10">
+    <p:bg>
+      <p:bgPr>
+        <a:solidFill>
+          <a:srgbClr val="1F4A3D"/>
+        </a:solidFill>
+      </p:bgPr>
+    </p:bg>
+    <p:spTree>
+      <p:nvGrpSpPr>
+        <p:cNvPr id="1" name=""/>
+        <p:cNvGrpSpPr/>
+        <p:nvPr/>
+      </p:nvGrpSpPr>
+      <p:grpSpPr>
+        <a:xfrm>
+          <a:off x="0" y="0"/>
+          <a:ext cx="0" cy="0"/>
+          <a:chOff x="0" y="0"/>
+          <a:chExt cx="0" cy="0"/>
+        </a:xfrm>
+      </p:grpSpPr>
+      <p:sp>
+        <p:nvSpPr>
+          <p:cNvPr id="2" name="Text 0"/>
+          <p:cNvSpPr txBox="1"/>
+          <p:nvPr/>
+        </p:nvSpPr>
+        <p:spPr>
+          <a:xfrm>
+            <a:off x="640080" y="502920"/>
+            <a:ext cx="5486400" cy="274320"/>
+          </a:xfrm>
+          <a:prstGeom prst="rect">
+            <a:avLst/>
+          </a:prstGeom>
+          <a:noFill/>
+          <a:ln/>
+        </p:spPr>
+        <p:txBody>
+          <a:bodyPr wrap="square" lIns="0" tIns="0" rIns="0" bIns="0" rtlCol="0" anchor="ctr"/>
+          <a:lstStyle/>
+          <a:p>
+            <a:pPr indent="0" marL="0">
+              <a:buNone/>
+            </a:pPr>
+            <a:r>
+              <a:rPr lang="en-US" sz="1200" b="1" spc="400" kern="0" dirty="0">
+                <a:solidFill>
+                  <a:srgbClr val="F0E3C8"/>
+                </a:solidFill>
+                <a:latin typeface="Calibri" pitchFamily="34" charset="0"/>
+                <a:ea typeface="Calibri" pitchFamily="34" charset="-122"/>
+                <a:cs typeface="Calibri" pitchFamily="34" charset="-120"/>
+              </a:rPr>
+              <a:t>РЕЗУЛЬТАТ</a:t>
+            </a:r>
+            <a:endParaRPr lang="en-US" sz="1200" dirty="0"/>
+          </a:p>
+        </p:txBody>
+      </p:sp>
+      <p:sp>
+        <p:nvSpPr>
+          <p:cNvPr id="3" name="Text 1"/>
+          <p:cNvSpPr txBox="1"/>
+          <p:nvPr/>
+        </p:nvSpPr>
+        <p:spPr>
+          <a:xfrm>
+            <a:off x="640080" y="868680"/>
+            <a:ext cx="8229600" cy="822960"/>
+          </a:xfrm>
+          <a:prstGeom prst="rect">
+            <a:avLst/>
+          </a:prstGeom>
+          <a:noFill/>
+          <a:ln/>
+        </p:spPr>
+        <p:txBody>
+          <a:bodyPr wrap="square" lIns="0" tIns="0" rIns="0" bIns="0" rtlCol="0" anchor="ctr"/>
+          <a:lstStyle/>
+          <a:p>
+            <a:pPr indent="0" marL="0">
+              <a:buNone/>
+            </a:pPr>
+            <a:r>
+              <a:rPr lang="en-US" sz="4000" b="1" dirty="0">
+                <a:solidFill>
+                  <a:srgbClr val="F7F2E7"/>
+                </a:solidFill>
+                <a:latin typeface="Cambria" pitchFamily="34" charset="0"/>
+                <a:ea typeface="Cambria" pitchFamily="34" charset="-122"/>
+                <a:cs typeface="Cambria" pitchFamily="34" charset="-120"/>
+              </a:rPr>
+              <a:t>Работает уже сейчас</a:t>
+            </a:r>
+            <a:endParaRPr lang="en-US" sz="4000" dirty="0"/>
+          </a:p>
+        </p:txBody>
+      </p:sp>
+      <p:sp>
+        <p:nvSpPr>
+          <p:cNvPr id="4" name="Shape 2"/>
+          <p:cNvSpPr/>
+          <p:nvPr/>
+        </p:nvSpPr>
+        <p:spPr>
+          <a:xfrm>
+            <a:off x="640080" y="2011680"/>
+            <a:ext cx="3383280" cy="1737360"/>
+          </a:xfrm>
+          <a:prstGeom prst="roundRect">
+            <a:avLst>
+              <a:gd name="adj" fmla="val 5263"/>
+            </a:avLst>
+          </a:prstGeom>
+          <a:solidFill>
+            <a:srgbClr val="163529"/>
+          </a:solidFill>
+          <a:ln w="9525">
+            <a:solidFill>
+              <a:srgbClr val="A9834A"/>
+            </a:solidFill>
+            <a:prstDash val="solid"/>
+          </a:ln>
+        </p:spPr>
+      </p:sp>
+      <p:sp>
+        <p:nvSpPr>
+          <p:cNvPr id="5" name="Text 3"/>
+          <p:cNvSpPr txBox="1"/>
+          <p:nvPr/>
+        </p:nvSpPr>
+        <p:spPr>
+          <a:xfrm>
+            <a:off x="822960" y="2148840"/>
+            <a:ext cx="3017520" cy="914400"/>
+          </a:xfrm>
+          <a:prstGeom prst="rect">
+            <a:avLst/>
+          </a:prstGeom>
+          <a:noFill/>
+          <a:ln/>
+        </p:spPr>
+        <p:txBody>
+          <a:bodyPr wrap="square" lIns="0" tIns="0" rIns="0" bIns="0" rtlCol="0" anchor="ctr"/>
+          <a:lstStyle/>
+          <a:p>
+            <a:pPr algn="ctr" indent="0" marL="0">
+              <a:buNone/>
+            </a:pPr>
+            <a:r>
+              <a:rPr lang="en-US" sz="4800" b="1" dirty="0">
+                <a:solidFill>
+                  <a:srgbClr val="F0E3C8"/>
+                </a:solidFill>
+                <a:latin typeface="Cambria" pitchFamily="34" charset="0"/>
+                <a:ea typeface="Cambria" pitchFamily="34" charset="-122"/>
+                <a:cs typeface="Cambria" pitchFamily="34" charset="-120"/>
+              </a:rPr>
+              <a:t>28</a:t>
+            </a:r>
+            <a:endParaRPr lang="en-US" sz="4800" dirty="0"/>
+          </a:p>
+        </p:txBody>
+      </p:sp>
+      <p:sp>
+        <p:nvSpPr>
+          <p:cNvPr id="6" name="Text 4"/>
+          <p:cNvSpPr txBox="1"/>
+          <p:nvPr/>
+        </p:nvSpPr>
+        <p:spPr>
+          <a:xfrm>
+            <a:off x="822960" y="3063240"/>
+            <a:ext cx="3017520" cy="457200"/>
+          </a:xfrm>
+          <a:prstGeom prst="rect">
+            <a:avLst/>
+          </a:prstGeom>
+          <a:noFill/>
+          <a:ln/>
+        </p:spPr>
+        <p:txBody>
+          <a:bodyPr wrap="square" lIns="0" tIns="0" rIns="0" bIns="0" rtlCol="0" anchor="ctr"/>
+          <a:lstStyle/>
+          <a:p>
+            <a:pPr algn="ctr" indent="0" marL="0">
+              <a:buNone/>
+            </a:pPr>
+            <a:r>
+              <a:rPr lang="en-US" sz="1500" dirty="0">
+                <a:solidFill>
+                  <a:srgbClr val="F7F2E7"/>
+                </a:solidFill>
+                <a:latin typeface="Calibri" pitchFamily="34" charset="0"/>
+                <a:ea typeface="Calibri" pitchFamily="34" charset="-122"/>
+                <a:cs typeface="Calibri" pitchFamily="34" charset="-120"/>
+              </a:rPr>
+              <a:t>проверенных фото</a:t>
+            </a:r>
+            <a:endParaRPr lang="en-US" sz="1500" dirty="0"/>
+          </a:p>
+        </p:txBody>
+      </p:sp>
+      <p:sp>
+        <p:nvSpPr>
+          <p:cNvPr id="7" name="Shape 5"/>
+          <p:cNvSpPr/>
+          <p:nvPr/>
+        </p:nvSpPr>
+        <p:spPr>
+          <a:xfrm>
+            <a:off x="4297680" y="2011680"/>
+            <a:ext cx="3383280" cy="1737360"/>
+          </a:xfrm>
+          <a:prstGeom prst="roundRect">
+            <a:avLst>
+              <a:gd name="adj" fmla="val 5263"/>
+            </a:avLst>
+          </a:prstGeom>
+          <a:solidFill>
+            <a:srgbClr val="163529"/>
+          </a:solidFill>
+          <a:ln w="9525">
+            <a:solidFill>
+              <a:srgbClr val="A9834A"/>
+            </a:solidFill>
+            <a:prstDash val="solid"/>
+          </a:ln>
+        </p:spPr>
+      </p:sp>
+      <p:sp>
+        <p:nvSpPr>
+          <p:cNvPr id="8" name="Text 6"/>
+          <p:cNvSpPr txBox="1"/>
+          <p:nvPr/>
+        </p:nvSpPr>
+        <p:spPr>
+          <a:xfrm>
+            <a:off x="4480560" y="2148840"/>
+            <a:ext cx="3017520" cy="914400"/>
+          </a:xfrm>
+          <a:prstGeom prst="rect">
+            <a:avLst/>
+          </a:prstGeom>
+          <a:noFill/>
+          <a:ln/>
+        </p:spPr>
+        <p:txBody>
+          <a:bodyPr wrap="square" lIns="0" tIns="0" rIns="0" bIns="0" rtlCol="0" anchor="ctr"/>
+          <a:lstStyle/>
+          <a:p>
+            <a:pPr algn="ctr" indent="0" marL="0">
+              <a:buNone/>
+            </a:pPr>
+            <a:r>
+              <a:rPr lang="en-US" sz="4800" b="1" dirty="0">
+                <a:solidFill>
+                  <a:srgbClr val="F0E3C8"/>
+                </a:solidFill>
+                <a:latin typeface="Cambria" pitchFamily="34" charset="0"/>
+                <a:ea typeface="Cambria" pitchFamily="34" charset="-122"/>
+                <a:cs typeface="Cambria" pitchFamily="34" charset="-120"/>
+              </a:rPr>
+              <a:t>8</a:t>
+            </a:r>
+            <a:endParaRPr lang="en-US" sz="4800" dirty="0"/>
+          </a:p>
+        </p:txBody>
+      </p:sp>
+      <p:sp>
+        <p:nvSpPr>
+          <p:cNvPr id="9" name="Text 7"/>
+          <p:cNvSpPr txBox="1"/>
+          <p:nvPr/>
+        </p:nvSpPr>
+        <p:spPr>
+          <a:xfrm>
+            <a:off x="4480560" y="3063240"/>
+            <a:ext cx="3017520" cy="457200"/>
+          </a:xfrm>
+          <a:prstGeom prst="rect">
+            <a:avLst/>
+          </a:prstGeom>
+          <a:noFill/>
+          <a:ln/>
+        </p:spPr>
+        <p:txBody>
+          <a:bodyPr wrap="square" lIns="0" tIns="0" rIns="0" bIns="0" rtlCol="0" anchor="ctr"/>
+          <a:lstStyle/>
+          <a:p>
+            <a:pPr algn="ctr" indent="0" marL="0">
+              <a:buNone/>
+            </a:pPr>
+            <a:r>
+              <a:rPr lang="en-US" sz="1500" dirty="0">
+                <a:solidFill>
+                  <a:srgbClr val="F7F2E7"/>
+                </a:solidFill>
+                <a:latin typeface="Calibri" pitchFamily="34" charset="0"/>
+                <a:ea typeface="Calibri" pitchFamily="34" charset="-122"/>
+                <a:cs typeface="Calibri" pitchFamily="34" charset="-120"/>
+              </a:rPr>
+              <a:t>соцсетей вуза</a:t>
+            </a:r>
+            <a:endParaRPr lang="en-US" sz="1500" dirty="0"/>
+          </a:p>
+        </p:txBody>
+      </p:sp>
+      <p:sp>
+        <p:nvSpPr>
+          <p:cNvPr id="10" name="Shape 8"/>
+          <p:cNvSpPr/>
+          <p:nvPr/>
+        </p:nvSpPr>
+        <p:spPr>
+          <a:xfrm>
+            <a:off x="7955280" y="2011680"/>
+            <a:ext cx="3383280" cy="1737360"/>
+          </a:xfrm>
+          <a:prstGeom prst="roundRect">
+            <a:avLst>
+              <a:gd name="adj" fmla="val 5263"/>
+            </a:avLst>
+          </a:prstGeom>
+          <a:solidFill>
+            <a:srgbClr val="163529"/>
+          </a:solidFill>
+          <a:ln w="9525">
+            <a:solidFill>
+              <a:srgbClr val="A9834A"/>
+            </a:solidFill>
+            <a:prstDash val="solid"/>
+          </a:ln>
+        </p:spPr>
+      </p:sp>
+      <p:sp>
+        <p:nvSpPr>
+          <p:cNvPr id="11" name="Text 9"/>
+          <p:cNvSpPr txBox="1"/>
+          <p:nvPr/>
+        </p:nvSpPr>
+        <p:spPr>
+          <a:xfrm>
+            <a:off x="8138160" y="2148840"/>
+            <a:ext cx="3017520" cy="914400"/>
+          </a:xfrm>
+          <a:prstGeom prst="rect">
+            <a:avLst/>
+          </a:prstGeom>
+          <a:noFill/>
+          <a:ln/>
+        </p:spPr>
+        <p:txBody>
+          <a:bodyPr wrap="square" lIns="0" tIns="0" rIns="0" bIns="0" rtlCol="0" anchor="ctr"/>
+          <a:lstStyle/>
+          <a:p>
+            <a:pPr algn="ctr" indent="0" marL="0">
+              <a:buNone/>
+            </a:pPr>
+            <a:r>
+              <a:rPr lang="en-US" sz="4800" b="1" dirty="0">
+                <a:solidFill>
+                  <a:srgbClr val="F0E3C8"/>
+                </a:solidFill>
+                <a:latin typeface="Cambria" pitchFamily="34" charset="0"/>
+                <a:ea typeface="Cambria" pitchFamily="34" charset="-122"/>
+                <a:cs typeface="Cambria" pitchFamily="34" charset="-120"/>
+              </a:rPr>
+              <a:t>~20 с</a:t>
+            </a:r>
+            <a:endParaRPr lang="en-US" sz="4800" dirty="0"/>
+          </a:p>
+        </p:txBody>
+      </p:sp>
+      <p:sp>
+        <p:nvSpPr>
+          <p:cNvPr id="12" name="Text 10"/>
+          <p:cNvSpPr txBox="1"/>
+          <p:nvPr/>
+        </p:nvSpPr>
+        <p:spPr>
+          <a:xfrm>
+            <a:off x="8138160" y="3063240"/>
+            <a:ext cx="3017520" cy="457200"/>
+          </a:xfrm>
+          <a:prstGeom prst="rect">
+            <a:avLst/>
+          </a:prstGeom>
+          <a:noFill/>
+          <a:ln/>
+        </p:spPr>
+        <p:txBody>
+          <a:bodyPr wrap="square" lIns="0" tIns="0" rIns="0" bIns="0" rtlCol="0" anchor="ctr"/>
+          <a:lstStyle/>
+          <a:p>
+            <a:pPr algn="ctr" indent="0" marL="0">
+              <a:buNone/>
+            </a:pPr>
+            <a:r>
+              <a:rPr lang="en-US" sz="1500" dirty="0">
+                <a:solidFill>
+                  <a:srgbClr val="F7F2E7"/>
+                </a:solidFill>
+                <a:latin typeface="Calibri" pitchFamily="34" charset="0"/>
+                <a:ea typeface="Calibri" pitchFamily="34" charset="-122"/>
+                <a:cs typeface="Calibri" pitchFamily="34" charset="-120"/>
+              </a:rPr>
+              <a:t>полный поиск</a:t>
+            </a:r>
+            <a:endParaRPr lang="en-US" sz="1500" dirty="0"/>
+          </a:p>
+        </p:txBody>
+      </p:sp>
+      <p:sp>
+        <p:nvSpPr>
+          <p:cNvPr id="13" name="Text 11"/>
+          <p:cNvSpPr txBox="1"/>
+          <p:nvPr/>
+        </p:nvSpPr>
+        <p:spPr>
+          <a:xfrm>
+            <a:off x="640080" y="3931920"/>
+            <a:ext cx="7315200" cy="274320"/>
+          </a:xfrm>
+          <a:prstGeom prst="rect">
+            <a:avLst/>
+          </a:prstGeom>
+          <a:noFill/>
+          <a:ln/>
+        </p:spPr>
+        <p:txBody>
+          <a:bodyPr wrap="square" lIns="0" tIns="0" rIns="0" bIns="0" rtlCol="0" anchor="ctr"/>
+          <a:lstStyle/>
+          <a:p>
+            <a:pPr indent="0" marL="0">
+              <a:buNone/>
+            </a:pPr>
+            <a:r>
+              <a:rPr lang="en-US" sz="1200" dirty="0">
+                <a:solidFill>
+                  <a:srgbClr val="F0E3C8"/>
+                </a:solidFill>
+                <a:latin typeface="Calibri" pitchFamily="34" charset="0"/>
+                <a:ea typeface="Calibri" pitchFamily="34" charset="-122"/>
+                <a:cs typeface="Calibri" pitchFamily="34" charset="-120"/>
+              </a:rPr>
+              <a:t>Пример: Nazarbayev University</a:t>
+            </a:r>
+            <a:endParaRPr lang="en-US" sz="1200" dirty="0"/>
+          </a:p>
+        </p:txBody>
+      </p:sp>
+      <p:sp>
+        <p:nvSpPr>
+          <p:cNvPr id="14" name="Text 12"/>
+          <p:cNvSpPr txBox="1"/>
+          <p:nvPr/>
+        </p:nvSpPr>
+        <p:spPr>
+          <a:xfrm>
+            <a:off x="640080" y="4480560"/>
+            <a:ext cx="10515600" cy="1737360"/>
+          </a:xfrm>
+          <a:prstGeom prst="rect">
+            <a:avLst/>
+          </a:prstGeom>
+          <a:noFill/>
+          <a:ln/>
+        </p:spPr>
+        <p:txBody>
+          <a:bodyPr wrap="square" lIns="0" tIns="0" rIns="0" bIns="0" rtlCol="0" anchor="t"/>
+          <a:lstStyle/>
+          <a:p>
+            <a:pPr indent="0" marL="0">
+              <a:buNone/>
+            </a:pPr>
+            <a:r>
+              <a:rPr lang="en-US" sz="1300" b="1" dirty="0">
+                <a:solidFill>
+                  <a:srgbClr val="F0E3C8"/>
+                </a:solidFill>
+                <a:latin typeface="Calibri" pitchFamily="34" charset="0"/>
+                <a:ea typeface="Calibri" pitchFamily="34" charset="-122"/>
+                <a:cs typeface="Calibri" pitchFamily="34" charset="-120"/>
+              </a:rPr>
+              <a:t>Демо</a:t>
+            </a:r>
+            <a:endParaRPr lang="en-US" sz="1300" dirty="0"/>
+          </a:p>
+          <a:p>
+            <a:pPr indent="0" marL="0">
+              <a:buNone/>
+            </a:pPr>
+            <a:r>
+              <a:rPr lang="en-US" sz="2200" b="1" u="sng" dirty="0">
+                <a:solidFill>
+                  <a:srgbClr val="F7F2E7"/>
+                </a:solidFill>
+                <a:latin typeface="Cambria" pitchFamily="34" charset="0"/>
+                <a:ea typeface="Cambria" pitchFamily="34" charset="-122"/>
+                <a:cs typeface="Cambria" pitchFamily="34" charset="-120"/>
+                <a:hlinkClick r:id="rId1" invalidUrl="" action="" tgtFrame="" tooltip="" history="1" highlightClick="0" endSnd="0">
+                  <a:extLst>
+                    <a:ext uri="{A12FA001-AC4F-418D-AE19-62706E023703}">
+                      <ahyp:hlinkClr xmlns:ahyp="http://schemas.microsoft.com/office/drawing/2018/hyperlinkcolor" val="tx"/>
+                    </a:ext>
+                  </a:extLst>
+                </a:hlinkClick>
+              </a:rPr>
+              <a:t>uni-visual-profile.vercel.app</a:t>
+            </a:r>
+            <a:endParaRPr lang="en-US" sz="1300" dirty="0"/>
+          </a:p>
+          <a:p>
+            <a:pPr indent="0" marL="0">
+              <a:buNone/>
+            </a:pPr>
+            <a:r>
+              <a:rPr lang="en-US" sz="800" dirty="0">
+                <a:solidFill>
+                  <a:srgbClr val="000000"/>
+                </a:solidFill>
+              </a:rPr>
+              <a:t> </a:t>
+            </a:r>
+            <a:endParaRPr lang="en-US" sz="1300" dirty="0"/>
+          </a:p>
+          <a:p>
+            <a:pPr indent="0" marL="0">
+              <a:buNone/>
+            </a:pPr>
+            <a:r>
+              <a:rPr lang="en-US" sz="1300" b="1" dirty="0">
+                <a:solidFill>
+                  <a:srgbClr val="F0E3C8"/>
+                </a:solidFill>
+                <a:latin typeface="Calibri" pitchFamily="34" charset="0"/>
+                <a:ea typeface="Calibri" pitchFamily="34" charset="-122"/>
+                <a:cs typeface="Calibri" pitchFamily="34" charset="-120"/>
+              </a:rPr>
+              <a:t>Код</a:t>
+            </a:r>
+            <a:endParaRPr lang="en-US" sz="1300" dirty="0"/>
+          </a:p>
+          <a:p>
+            <a:pPr indent="0" marL="0">
+              <a:buNone/>
+            </a:pPr>
+            <a:r>
+              <a:rPr lang="en-US" sz="2200" b="1" u="sng" dirty="0">
+                <a:solidFill>
+                  <a:srgbClr val="F7F2E7"/>
+                </a:solidFill>
+                <a:latin typeface="Cambria" pitchFamily="34" charset="0"/>
+                <a:ea typeface="Cambria" pitchFamily="34" charset="-122"/>
+                <a:cs typeface="Cambria" pitchFamily="34" charset="-120"/>
+                <a:hlinkClick r:id="rId2" invalidUrl="" action="" tgtFrame="" tooltip="" history="1" highlightClick="0" endSnd="0">
+                  <a:extLst>
+                    <a:ext uri="{A12FA001-AC4F-418D-AE19-62706E023703}">
+                      <ahyp:hlinkClr xmlns:ahyp="http://schemas.microsoft.com/office/drawing/2018/hyperlinkcolor" val="tx"/>
+                    </a:ext>
+                  </a:extLst>
+                </a:hlinkClick>
+              </a:rPr>
+              <a:t>github.com/forethercoder-lgtm/uni-visual-profile</a:t>
+            </a:r>
+            <a:endParaRPr lang="en-US" sz="1300" dirty="0"/>
+          </a:p>
+        </p:txBody>
+      </p:sp>
+    </p:spTree>
+  </p:cSld>
+  <p:clrMapOvr>
+    <a:masterClrMapping/>
+  </p:clrMapOvr>
+</p:sld>
+</file>
+
 <file path=ppt/slides/slide2.xml><?xml version="1.0" encoding="utf-8"?>
 <p:sld xmlns:a="http://schemas.openxmlformats.org/drawingml/2006/main" xmlns:r="http://schemas.openxmlformats.org/officeDocument/2006/relationships" xmlns:p="http://schemas.openxmlformats.org/presentationml/2006/main">
   <p:cSld name="Slide 2">
@@ -2776,7 +3536,7 @@
                 <a:ea typeface="Calibri" pitchFamily="34" charset="-122"/>
                 <a:cs typeface="Calibri" pitchFamily="34" charset="-120"/>
               </a:rPr>
-              <a:t>2 / 8</a:t>
+              <a:t>2 / 10</a:t>
             </a:r>
             <a:endParaRPr lang="en-US" sz="1000" dirty="0"/>
           </a:p>
@@ -3879,7 +4639,7 @@
                 <a:ea typeface="Calibri" pitchFamily="34" charset="-122"/>
                 <a:cs typeface="Calibri" pitchFamily="34" charset="-120"/>
               </a:rPr>
-              <a:t>3 / 8</a:t>
+              <a:t>3 / 10</a:t>
             </a:r>
             <a:endParaRPr lang="en-US" sz="1000" dirty="0"/>
           </a:p>
@@ -4575,7 +5335,7 @@
                 <a:ea typeface="Calibri" pitchFamily="34" charset="-122"/>
                 <a:cs typeface="Calibri" pitchFamily="34" charset="-120"/>
               </a:rPr>
-              <a:t>4 / 8</a:t>
+              <a:t>4 / 10</a:t>
             </a:r>
             <a:endParaRPr lang="en-US" sz="1000" dirty="0"/>
           </a:p>
@@ -5948,7 +6708,7 @@
                 <a:ea typeface="Calibri" pitchFamily="34" charset="-122"/>
                 <a:cs typeface="Calibri" pitchFamily="34" charset="-120"/>
               </a:rPr>
-              <a:t>5 / 8</a:t>
+              <a:t>5 / 10</a:t>
             </a:r>
             <a:endParaRPr lang="en-US" sz="1000" dirty="0"/>
           </a:p>
@@ -6058,7 +6818,7 @@
                 <a:ea typeface="Calibri" pitchFamily="34" charset="-122"/>
                 <a:cs typeface="Calibri" pitchFamily="34" charset="-120"/>
               </a:rPr>
-              <a:t>ДОСТОВЕРНОСТЬ</a:t>
+              <a:t>УМНЫЙ ВВОД</a:t>
             </a:r>
             <a:endParaRPr lang="en-US" sz="1200" dirty="0"/>
           </a:p>
@@ -6097,7 +6857,7 @@
                 <a:ea typeface="Cambria" pitchFamily="34" charset="-122"/>
                 <a:cs typeface="Cambria" pitchFamily="34" charset="-120"/>
               </a:rPr>
-              <a:t>Честная оценка вместо красивой картинки</a:t>
+              <a:t>Понимает любой вуз мира, даже с ошибкой</a:t>
             </a:r>
             <a:endParaRPr lang="en-US" sz="3800" dirty="0"/>
           </a:p>
@@ -6111,12 +6871,12 @@
         </p:nvSpPr>
         <p:spPr>
           <a:xfrm>
-            <a:off x="640080" y="1920240"/>
-            <a:ext cx="3429000" cy="3566160"/>
+            <a:off x="640080" y="1691640"/>
+            <a:ext cx="5394960" cy="1115568"/>
           </a:xfrm>
           <a:prstGeom prst="roundRect">
             <a:avLst>
-              <a:gd name="adj" fmla="val 2667"/>
+              <a:gd name="adj" fmla="val 8197"/>
             </a:avLst>
           </a:prstGeom>
           <a:solidFill>
@@ -6128,13 +6888,6 @@
             </a:solidFill>
             <a:prstDash val="solid"/>
           </a:ln>
-          <a:effectLst>
-            <a:outerShdw sx="100000" sy="100000" kx="0" ky="0" algn="bl" rotWithShape="0" blurRad="127000" dist="25400" dir="5400000">
-              <a:srgbClr val="2A2620">
-                <a:alpha val="12000"/>
-              </a:srgbClr>
-            </a:outerShdw>
-          </a:effectLst>
         </p:spPr>
       </p:sp>
       <p:sp>
@@ -6145,16 +6898,14 @@
         </p:nvSpPr>
         <p:spPr>
           <a:xfrm>
-            <a:off x="960120" y="2240280"/>
-            <a:ext cx="1371600" cy="548640"/>
-          </a:xfrm>
-          <a:prstGeom prst="roundRect">
-            <a:avLst>
-              <a:gd name="adj" fmla="val 50000"/>
-            </a:avLst>
+            <a:off x="868680" y="1984248"/>
+            <a:ext cx="530352" cy="530352"/>
+          </a:xfrm>
+          <a:prstGeom prst="ellipse">
+            <a:avLst/>
           </a:prstGeom>
           <a:solidFill>
-            <a:srgbClr val="0F7B4F"/>
+            <a:srgbClr val="1F4A3D"/>
           </a:solidFill>
           <a:ln/>
         </p:spPr>
@@ -6167,8 +6918,8 @@
         </p:nvSpPr>
         <p:spPr>
           <a:xfrm>
-            <a:off x="960120" y="2240280"/>
-            <a:ext cx="1371600" cy="548640"/>
+            <a:off x="868680" y="1984248"/>
+            <a:ext cx="530352" cy="530352"/>
           </a:xfrm>
           <a:prstGeom prst="rect">
             <a:avLst/>
@@ -6184,56 +6935,56 @@
               <a:buNone/>
             </a:pPr>
             <a:r>
-              <a:rPr lang="en-US" sz="1800" b="1" dirty="0">
-                <a:solidFill>
-                  <a:srgbClr val="FFFFFF"/>
-                </a:solidFill>
-                <a:latin typeface="Calibri" pitchFamily="34" charset="0"/>
-                <a:ea typeface="Calibri" pitchFamily="34" charset="-122"/>
-                <a:cs typeface="Calibri" pitchFamily="34" charset="-120"/>
-              </a:rPr>
-              <a:t>≥ 70%</a:t>
-            </a:r>
-            <a:endParaRPr lang="en-US" sz="1800" dirty="0"/>
-          </a:p>
-        </p:txBody>
-      </p:sp>
-      <p:sp>
-        <p:nvSpPr>
-          <p:cNvPr id="7" name="Text 5"/>
-          <p:cNvSpPr txBox="1"/>
-          <p:nvPr/>
-        </p:nvSpPr>
-        <p:spPr>
-          <a:xfrm>
-            <a:off x="960120" y="3017520"/>
-            <a:ext cx="2788920" cy="457200"/>
-          </a:xfrm>
-          <a:prstGeom prst="rect">
-            <a:avLst/>
-          </a:prstGeom>
-          <a:noFill/>
-          <a:ln/>
-        </p:spPr>
-        <p:txBody>
-          <a:bodyPr wrap="square" lIns="0" tIns="0" rIns="0" bIns="0" rtlCol="0" anchor="ctr"/>
-          <a:lstStyle/>
-          <a:p>
-            <a:pPr indent="0" marL="0">
-              <a:buNone/>
-            </a:pPr>
-            <a:r>
-              <a:rPr lang="en-US" sz="2000" b="1" dirty="0">
-                <a:solidFill>
-                  <a:srgbClr val="1F4A3D"/>
+              <a:rPr lang="en-US" sz="1600" b="1" dirty="0">
+                <a:solidFill>
+                  <a:srgbClr val="F0E3C8"/>
                 </a:solidFill>
                 <a:latin typeface="Cambria" pitchFamily="34" charset="0"/>
                 <a:ea typeface="Cambria" pitchFamily="34" charset="-122"/>
                 <a:cs typeface="Cambria" pitchFamily="34" charset="-120"/>
               </a:rPr>
-              <a:t>Подтверждено</a:t>
-            </a:r>
-            <a:endParaRPr lang="en-US" sz="2000" dirty="0"/>
+              <a:t>1</a:t>
+            </a:r>
+            <a:endParaRPr lang="en-US" sz="1600" dirty="0"/>
+          </a:p>
+        </p:txBody>
+      </p:sp>
+      <p:sp>
+        <p:nvSpPr>
+          <p:cNvPr id="7" name="Text 5"/>
+          <p:cNvSpPr txBox="1"/>
+          <p:nvPr/>
+        </p:nvSpPr>
+        <p:spPr>
+          <a:xfrm>
+            <a:off x="1600200" y="1783080"/>
+            <a:ext cx="4251960" cy="329184"/>
+          </a:xfrm>
+          <a:prstGeom prst="rect">
+            <a:avLst/>
+          </a:prstGeom>
+          <a:noFill/>
+          <a:ln/>
+        </p:spPr>
+        <p:txBody>
+          <a:bodyPr wrap="square" lIns="0" tIns="0" rIns="0" bIns="0" rtlCol="0" anchor="ctr"/>
+          <a:lstStyle/>
+          <a:p>
+            <a:pPr indent="0" marL="0">
+              <a:buNone/>
+            </a:pPr>
+            <a:r>
+              <a:rPr lang="en-US" sz="1600" b="1" dirty="0">
+                <a:solidFill>
+                  <a:srgbClr val="1F4A3D"/>
+                </a:solidFill>
+                <a:latin typeface="Cambria" pitchFamily="34" charset="0"/>
+                <a:ea typeface="Cambria" pitchFamily="34" charset="-122"/>
+                <a:cs typeface="Cambria" pitchFamily="34" charset="-120"/>
+              </a:rPr>
+              <a:t>Wikidata на разных языках</a:t>
+            </a:r>
+            <a:endParaRPr lang="en-US" sz="1600" dirty="0"/>
           </a:p>
         </p:txBody>
       </p:sp>
@@ -6245,8 +6996,8 @@
         </p:nvSpPr>
         <p:spPr>
           <a:xfrm>
-            <a:off x="960120" y="3566160"/>
-            <a:ext cx="2788920" cy="1188720"/>
+            <a:off x="1600200" y="2148840"/>
+            <a:ext cx="4251960" cy="621792"/>
           </a:xfrm>
           <a:prstGeom prst="rect">
             <a:avLst/>
@@ -6262,7 +7013,7 @@
               <a:buNone/>
             </a:pPr>
             <a:r>
-              <a:rPr lang="en-US" sz="1400" dirty="0">
+              <a:rPr lang="en-US" sz="1150" dirty="0">
                 <a:solidFill>
                   <a:srgbClr val="6D6555"/>
                 </a:solidFill>
@@ -6270,65 +7021,26 @@
                 <a:ea typeface="Calibri" pitchFamily="34" charset="-122"/>
                 <a:cs typeface="Calibri" pitchFamily="34" charset="-120"/>
               </a:rPr>
-              <a:t>Есть явные признаки: вывеска, узнаваемая архитектура, совпадение подписи.</a:t>
-            </a:r>
-            <a:endParaRPr lang="en-US" sz="1400" dirty="0"/>
-          </a:p>
-        </p:txBody>
-      </p:sp>
-      <p:sp>
-        <p:nvSpPr>
-          <p:cNvPr id="9" name="Text 7"/>
-          <p:cNvSpPr txBox="1"/>
-          <p:nvPr/>
-        </p:nvSpPr>
-        <p:spPr>
-          <a:xfrm>
-            <a:off x="960120" y="4846320"/>
-            <a:ext cx="2788920" cy="365760"/>
-          </a:xfrm>
-          <a:prstGeom prst="rect">
-            <a:avLst/>
-          </a:prstGeom>
-          <a:noFill/>
-          <a:ln/>
-        </p:spPr>
-        <p:txBody>
-          <a:bodyPr wrap="square" lIns="0" tIns="0" rIns="0" bIns="0" rtlCol="0" anchor="ctr"/>
-          <a:lstStyle/>
-          <a:p>
-            <a:pPr indent="0" marL="0">
-              <a:buNone/>
-            </a:pPr>
-            <a:r>
-              <a:rPr lang="en-US" sz="1300" b="1" dirty="0">
-                <a:solidFill>
-                  <a:srgbClr val="0F7B4F"/>
-                </a:solidFill>
-                <a:latin typeface="Calibri" pitchFamily="34" charset="0"/>
-                <a:ea typeface="Calibri" pitchFamily="34" charset="-122"/>
-                <a:cs typeface="Calibri" pitchFamily="34" charset="-120"/>
-              </a:rPr>
-              <a:t>Показано как надёжное</a:t>
-            </a:r>
-            <a:endParaRPr lang="en-US" sz="1300" dirty="0"/>
-          </a:p>
-        </p:txBody>
-      </p:sp>
-      <p:sp>
-        <p:nvSpPr>
-          <p:cNvPr id="10" name="Shape 8"/>
+              <a:t>Запрос ищется параллельно на языках по письменности: латиница, кириллица, китайский, арабский, корейский и др.</a:t>
+            </a:r>
+            <a:endParaRPr lang="en-US" sz="1150" dirty="0"/>
+          </a:p>
+        </p:txBody>
+      </p:sp>
+      <p:sp>
+        <p:nvSpPr>
+          <p:cNvPr id="9" name="Shape 7"/>
           <p:cNvSpPr/>
           <p:nvPr/>
         </p:nvSpPr>
         <p:spPr>
           <a:xfrm>
-            <a:off x="4389120" y="1920240"/>
-            <a:ext cx="3429000" cy="3566160"/>
+            <a:off x="640080" y="2990088"/>
+            <a:ext cx="5394960" cy="1115568"/>
           </a:xfrm>
           <a:prstGeom prst="roundRect">
             <a:avLst>
-              <a:gd name="adj" fmla="val 2667"/>
+              <a:gd name="adj" fmla="val 8197"/>
             </a:avLst>
           </a:prstGeom>
           <a:solidFill>
@@ -6340,47 +7052,38 @@
             </a:solidFill>
             <a:prstDash val="solid"/>
           </a:ln>
-          <a:effectLst>
-            <a:outerShdw sx="100000" sy="100000" kx="0" ky="0" algn="bl" rotWithShape="0" blurRad="127000" dist="25400" dir="5400000">
-              <a:srgbClr val="2A2620">
-                <a:alpha val="12000"/>
-              </a:srgbClr>
-            </a:outerShdw>
-          </a:effectLst>
-        </p:spPr>
-      </p:sp>
-      <p:sp>
-        <p:nvSpPr>
-          <p:cNvPr id="11" name="Shape 9"/>
+        </p:spPr>
+      </p:sp>
+      <p:sp>
+        <p:nvSpPr>
+          <p:cNvPr id="10" name="Shape 8"/>
           <p:cNvSpPr/>
           <p:nvPr/>
         </p:nvSpPr>
         <p:spPr>
           <a:xfrm>
-            <a:off x="4709160" y="2240280"/>
-            <a:ext cx="1371600" cy="548640"/>
-          </a:xfrm>
-          <a:prstGeom prst="roundRect">
-            <a:avLst>
-              <a:gd name="adj" fmla="val 50000"/>
-            </a:avLst>
+            <a:off x="868680" y="3282696"/>
+            <a:ext cx="530352" cy="530352"/>
+          </a:xfrm>
+          <a:prstGeom prst="ellipse">
+            <a:avLst/>
           </a:prstGeom>
           <a:solidFill>
-            <a:srgbClr val="B7791F"/>
+            <a:srgbClr val="1F4A3D"/>
           </a:solidFill>
           <a:ln/>
         </p:spPr>
       </p:sp>
       <p:sp>
         <p:nvSpPr>
-          <p:cNvPr id="12" name="Text 10"/>
-          <p:cNvSpPr txBox="1"/>
-          <p:nvPr/>
-        </p:nvSpPr>
-        <p:spPr>
-          <a:xfrm>
-            <a:off x="4709160" y="2240280"/>
-            <a:ext cx="1371600" cy="548640"/>
+          <p:cNvPr id="11" name="Text 9"/>
+          <p:cNvSpPr txBox="1"/>
+          <p:nvPr/>
+        </p:nvSpPr>
+        <p:spPr>
+          <a:xfrm>
+            <a:off x="868680" y="3282696"/>
+            <a:ext cx="530352" cy="530352"/>
           </a:xfrm>
           <a:prstGeom prst="rect">
             <a:avLst/>
@@ -6396,69 +7099,69 @@
               <a:buNone/>
             </a:pPr>
             <a:r>
-              <a:rPr lang="en-US" sz="1800" b="1" dirty="0">
-                <a:solidFill>
-                  <a:srgbClr val="FFFFFF"/>
-                </a:solidFill>
-                <a:latin typeface="Calibri" pitchFamily="34" charset="0"/>
-                <a:ea typeface="Calibri" pitchFamily="34" charset="-122"/>
-                <a:cs typeface="Calibri" pitchFamily="34" charset="-120"/>
-              </a:rPr>
-              <a:t>35–60%</a:t>
-            </a:r>
-            <a:endParaRPr lang="en-US" sz="1800" dirty="0"/>
-          </a:p>
-        </p:txBody>
-      </p:sp>
-      <p:sp>
-        <p:nvSpPr>
-          <p:cNvPr id="13" name="Text 11"/>
-          <p:cNvSpPr txBox="1"/>
-          <p:nvPr/>
-        </p:nvSpPr>
-        <p:spPr>
-          <a:xfrm>
-            <a:off x="4709160" y="3017520"/>
-            <a:ext cx="2788920" cy="457200"/>
-          </a:xfrm>
-          <a:prstGeom prst="rect">
-            <a:avLst/>
-          </a:prstGeom>
-          <a:noFill/>
-          <a:ln/>
-        </p:spPr>
-        <p:txBody>
-          <a:bodyPr wrap="square" lIns="0" tIns="0" rIns="0" bIns="0" rtlCol="0" anchor="ctr"/>
-          <a:lstStyle/>
-          <a:p>
-            <a:pPr indent="0" marL="0">
-              <a:buNone/>
-            </a:pPr>
-            <a:r>
-              <a:rPr lang="en-US" sz="2000" b="1" dirty="0">
-                <a:solidFill>
-                  <a:srgbClr val="1F4A3D"/>
+              <a:rPr lang="en-US" sz="1600" b="1" dirty="0">
+                <a:solidFill>
+                  <a:srgbClr val="F0E3C8"/>
                 </a:solidFill>
                 <a:latin typeface="Cambria" pitchFamily="34" charset="0"/>
                 <a:ea typeface="Cambria" pitchFamily="34" charset="-122"/>
                 <a:cs typeface="Cambria" pitchFamily="34" charset="-120"/>
               </a:rPr>
-              <a:t>Сомнительно</a:t>
-            </a:r>
-            <a:endParaRPr lang="en-US" sz="2000" dirty="0"/>
-          </a:p>
-        </p:txBody>
-      </p:sp>
-      <p:sp>
-        <p:nvSpPr>
-          <p:cNvPr id="14" name="Text 12"/>
-          <p:cNvSpPr txBox="1"/>
-          <p:nvPr/>
-        </p:nvSpPr>
-        <p:spPr>
-          <a:xfrm>
-            <a:off x="4709160" y="3566160"/>
-            <a:ext cx="2788920" cy="1188720"/>
+              <a:t>2</a:t>
+            </a:r>
+            <a:endParaRPr lang="en-US" sz="1600" dirty="0"/>
+          </a:p>
+        </p:txBody>
+      </p:sp>
+      <p:sp>
+        <p:nvSpPr>
+          <p:cNvPr id="12" name="Text 10"/>
+          <p:cNvSpPr txBox="1"/>
+          <p:nvPr/>
+        </p:nvSpPr>
+        <p:spPr>
+          <a:xfrm>
+            <a:off x="1600200" y="3081528"/>
+            <a:ext cx="4251960" cy="329184"/>
+          </a:xfrm>
+          <a:prstGeom prst="rect">
+            <a:avLst/>
+          </a:prstGeom>
+          <a:noFill/>
+          <a:ln/>
+        </p:spPr>
+        <p:txBody>
+          <a:bodyPr wrap="square" lIns="0" tIns="0" rIns="0" bIns="0" rtlCol="0" anchor="ctr"/>
+          <a:lstStyle/>
+          <a:p>
+            <a:pPr indent="0" marL="0">
+              <a:buNone/>
+            </a:pPr>
+            <a:r>
+              <a:rPr lang="en-US" sz="1600" b="1" dirty="0">
+                <a:solidFill>
+                  <a:srgbClr val="1F4A3D"/>
+                </a:solidFill>
+                <a:latin typeface="Cambria" pitchFamily="34" charset="0"/>
+                <a:ea typeface="Cambria" pitchFamily="34" charset="-122"/>
+                <a:cs typeface="Cambria" pitchFamily="34" charset="-120"/>
+              </a:rPr>
+              <a:t>ИИ исправляет название</a:t>
+            </a:r>
+            <a:endParaRPr lang="en-US" sz="1600" dirty="0"/>
+          </a:p>
+        </p:txBody>
+      </p:sp>
+      <p:sp>
+        <p:nvSpPr>
+          <p:cNvPr id="13" name="Text 11"/>
+          <p:cNvSpPr txBox="1"/>
+          <p:nvPr/>
+        </p:nvSpPr>
+        <p:spPr>
+          <a:xfrm>
+            <a:off x="1600200" y="3447288"/>
+            <a:ext cx="4251960" cy="621792"/>
           </a:xfrm>
           <a:prstGeom prst="rect">
             <a:avLst/>
@@ -6474,7 +7177,7 @@
               <a:buNone/>
             </a:pPr>
             <a:r>
-              <a:rPr lang="en-US" sz="1400" dirty="0">
+              <a:rPr lang="en-US" sz="1150" dirty="0">
                 <a:solidFill>
                   <a:srgbClr val="6D6555"/>
                 </a:solidFill>
@@ -6482,65 +7185,26 @@
                 <a:ea typeface="Calibri" pitchFamily="34" charset="-122"/>
                 <a:cs typeface="Calibri" pitchFamily="34" charset="-120"/>
               </a:rPr>
-              <a:t>Принадлежность вузу не удалось подтвердить уверенно.</a:t>
-            </a:r>
-            <a:endParaRPr lang="en-US" sz="1400" dirty="0"/>
-          </a:p>
-        </p:txBody>
-      </p:sp>
-      <p:sp>
-        <p:nvSpPr>
-          <p:cNvPr id="15" name="Text 13"/>
-          <p:cNvSpPr txBox="1"/>
-          <p:nvPr/>
-        </p:nvSpPr>
-        <p:spPr>
-          <a:xfrm>
-            <a:off x="4709160" y="4846320"/>
-            <a:ext cx="2788920" cy="365760"/>
-          </a:xfrm>
-          <a:prstGeom prst="rect">
-            <a:avLst/>
-          </a:prstGeom>
-          <a:noFill/>
-          <a:ln/>
-        </p:spPr>
-        <p:txBody>
-          <a:bodyPr wrap="square" lIns="0" tIns="0" rIns="0" bIns="0" rtlCol="0" anchor="ctr"/>
-          <a:lstStyle/>
-          <a:p>
-            <a:pPr indent="0" marL="0">
-              <a:buNone/>
-            </a:pPr>
-            <a:r>
-              <a:rPr lang="en-US" sz="1300" b="1" dirty="0">
-                <a:solidFill>
-                  <a:srgbClr val="B7791F"/>
-                </a:solidFill>
-                <a:latin typeface="Calibri" pitchFamily="34" charset="0"/>
-                <a:ea typeface="Calibri" pitchFamily="34" charset="-122"/>
-                <a:cs typeface="Calibri" pitchFamily="34" charset="-120"/>
-              </a:rPr>
-              <a:t>Показано с предупреждением</a:t>
-            </a:r>
-            <a:endParaRPr lang="en-US" sz="1300" dirty="0"/>
-          </a:p>
-        </p:txBody>
-      </p:sp>
-      <p:sp>
-        <p:nvSpPr>
-          <p:cNvPr id="16" name="Shape 14"/>
+              <a:t>Опечатка, сокращение или транслит — Gemini находит заведение, а ответ проверяется по Wikidata.</a:t>
+            </a:r>
+            <a:endParaRPr lang="en-US" sz="1150" dirty="0"/>
+          </a:p>
+        </p:txBody>
+      </p:sp>
+      <p:sp>
+        <p:nvSpPr>
+          <p:cNvPr id="14" name="Shape 12"/>
           <p:cNvSpPr/>
           <p:nvPr/>
         </p:nvSpPr>
         <p:spPr>
           <a:xfrm>
-            <a:off x="8138160" y="1920240"/>
-            <a:ext cx="3429000" cy="3566160"/>
+            <a:off x="640080" y="4288536"/>
+            <a:ext cx="5394960" cy="1115568"/>
           </a:xfrm>
           <a:prstGeom prst="roundRect">
             <a:avLst>
-              <a:gd name="adj" fmla="val 2667"/>
+              <a:gd name="adj" fmla="val 8197"/>
             </a:avLst>
           </a:prstGeom>
           <a:solidFill>
@@ -6552,47 +7216,38 @@
             </a:solidFill>
             <a:prstDash val="solid"/>
           </a:ln>
-          <a:effectLst>
-            <a:outerShdw sx="100000" sy="100000" kx="0" ky="0" algn="bl" rotWithShape="0" blurRad="127000" dist="25400" dir="5400000">
-              <a:srgbClr val="2A2620">
-                <a:alpha val="12000"/>
-              </a:srgbClr>
-            </a:outerShdw>
-          </a:effectLst>
-        </p:spPr>
-      </p:sp>
-      <p:sp>
-        <p:nvSpPr>
-          <p:cNvPr id="17" name="Shape 15"/>
+        </p:spPr>
+      </p:sp>
+      <p:sp>
+        <p:nvSpPr>
+          <p:cNvPr id="15" name="Shape 13"/>
           <p:cNvSpPr/>
           <p:nvPr/>
         </p:nvSpPr>
         <p:spPr>
           <a:xfrm>
-            <a:off x="8458200" y="2240280"/>
-            <a:ext cx="1371600" cy="548640"/>
-          </a:xfrm>
-          <a:prstGeom prst="roundRect">
-            <a:avLst>
-              <a:gd name="adj" fmla="val 50000"/>
-            </a:avLst>
+            <a:off x="868680" y="4581144"/>
+            <a:ext cx="530352" cy="530352"/>
+          </a:xfrm>
+          <a:prstGeom prst="ellipse">
+            <a:avLst/>
           </a:prstGeom>
           <a:solidFill>
-            <a:srgbClr val="78716C"/>
+            <a:srgbClr val="1F4A3D"/>
           </a:solidFill>
           <a:ln/>
         </p:spPr>
       </p:sp>
       <p:sp>
         <p:nvSpPr>
-          <p:cNvPr id="18" name="Text 16"/>
-          <p:cNvSpPr txBox="1"/>
-          <p:nvPr/>
-        </p:nvSpPr>
-        <p:spPr>
-          <a:xfrm>
-            <a:off x="8458200" y="2240280"/>
-            <a:ext cx="1371600" cy="548640"/>
+          <p:cNvPr id="16" name="Text 14"/>
+          <p:cNvSpPr txBox="1"/>
+          <p:nvPr/>
+        </p:nvSpPr>
+        <p:spPr>
+          <a:xfrm>
+            <a:off x="868680" y="4581144"/>
+            <a:ext cx="530352" cy="530352"/>
           </a:xfrm>
           <a:prstGeom prst="rect">
             <a:avLst/>
@@ -6608,69 +7263,69 @@
               <a:buNone/>
             </a:pPr>
             <a:r>
-              <a:rPr lang="en-US" sz="1800" b="1" dirty="0">
-                <a:solidFill>
-                  <a:srgbClr val="FFFFFF"/>
-                </a:solidFill>
-                <a:latin typeface="Calibri" pitchFamily="34" charset="0"/>
-                <a:ea typeface="Calibri" pitchFamily="34" charset="-122"/>
-                <a:cs typeface="Calibri" pitchFamily="34" charset="-120"/>
-              </a:rPr>
-              <a:t>&lt; 35%</a:t>
-            </a:r>
-            <a:endParaRPr lang="en-US" sz="1800" dirty="0"/>
-          </a:p>
-        </p:txBody>
-      </p:sp>
-      <p:sp>
-        <p:nvSpPr>
-          <p:cNvPr id="19" name="Text 17"/>
-          <p:cNvSpPr txBox="1"/>
-          <p:nvPr/>
-        </p:nvSpPr>
-        <p:spPr>
-          <a:xfrm>
-            <a:off x="8458200" y="3017520"/>
-            <a:ext cx="2788920" cy="457200"/>
-          </a:xfrm>
-          <a:prstGeom prst="rect">
-            <a:avLst/>
-          </a:prstGeom>
-          <a:noFill/>
-          <a:ln/>
-        </p:spPr>
-        <p:txBody>
-          <a:bodyPr wrap="square" lIns="0" tIns="0" rIns="0" bIns="0" rtlCol="0" anchor="ctr"/>
-          <a:lstStyle/>
-          <a:p>
-            <a:pPr indent="0" marL="0">
-              <a:buNone/>
-            </a:pPr>
-            <a:r>
-              <a:rPr lang="en-US" sz="2000" b="1" dirty="0">
-                <a:solidFill>
-                  <a:srgbClr val="1F4A3D"/>
+              <a:rPr lang="en-US" sz="1600" b="1" dirty="0">
+                <a:solidFill>
+                  <a:srgbClr val="F0E3C8"/>
                 </a:solidFill>
                 <a:latin typeface="Cambria" pitchFamily="34" charset="0"/>
                 <a:ea typeface="Cambria" pitchFamily="34" charset="-122"/>
                 <a:cs typeface="Cambria" pitchFamily="34" charset="-120"/>
               </a:rPr>
-              <a:t>Нерелевантно</a:t>
-            </a:r>
-            <a:endParaRPr lang="en-US" sz="2000" dirty="0"/>
-          </a:p>
-        </p:txBody>
-      </p:sp>
-      <p:sp>
-        <p:nvSpPr>
-          <p:cNvPr id="20" name="Text 18"/>
-          <p:cNvSpPr txBox="1"/>
-          <p:nvPr/>
-        </p:nvSpPr>
-        <p:spPr>
-          <a:xfrm>
-            <a:off x="8458200" y="3566160"/>
-            <a:ext cx="2788920" cy="1188720"/>
+              <a:t>3</a:t>
+            </a:r>
+            <a:endParaRPr lang="en-US" sz="1600" dirty="0"/>
+          </a:p>
+        </p:txBody>
+      </p:sp>
+      <p:sp>
+        <p:nvSpPr>
+          <p:cNvPr id="17" name="Text 15"/>
+          <p:cNvSpPr txBox="1"/>
+          <p:nvPr/>
+        </p:nvSpPr>
+        <p:spPr>
+          <a:xfrm>
+            <a:off x="1600200" y="4379976"/>
+            <a:ext cx="4251960" cy="329184"/>
+          </a:xfrm>
+          <a:prstGeom prst="rect">
+            <a:avLst/>
+          </a:prstGeom>
+          <a:noFill/>
+          <a:ln/>
+        </p:spPr>
+        <p:txBody>
+          <a:bodyPr wrap="square" lIns="0" tIns="0" rIns="0" bIns="0" rtlCol="0" anchor="ctr"/>
+          <a:lstStyle/>
+          <a:p>
+            <a:pPr indent="0" marL="0">
+              <a:buNone/>
+            </a:pPr>
+            <a:r>
+              <a:rPr lang="en-US" sz="1600" b="1" dirty="0">
+                <a:solidFill>
+                  <a:srgbClr val="1F4A3D"/>
+                </a:solidFill>
+                <a:latin typeface="Cambria" pitchFamily="34" charset="0"/>
+                <a:ea typeface="Cambria" pitchFamily="34" charset="-122"/>
+                <a:cs typeface="Cambria" pitchFamily="34" charset="-120"/>
+              </a:rPr>
+              <a:t>Не уверен — спрашивает</a:t>
+            </a:r>
+            <a:endParaRPr lang="en-US" sz="1600" dirty="0"/>
+          </a:p>
+        </p:txBody>
+      </p:sp>
+      <p:sp>
+        <p:nvSpPr>
+          <p:cNvPr id="18" name="Text 16"/>
+          <p:cNvSpPr txBox="1"/>
+          <p:nvPr/>
+        </p:nvSpPr>
+        <p:spPr>
+          <a:xfrm>
+            <a:off x="1600200" y="4745736"/>
+            <a:ext cx="4251960" cy="621792"/>
           </a:xfrm>
           <a:prstGeom prst="rect">
             <a:avLst/>
@@ -6686,15 +7341,303 @@
               <a:buNone/>
             </a:pPr>
             <a:r>
+              <a:rPr lang="en-US" sz="1150" dirty="0">
+                <a:solidFill>
+                  <a:srgbClr val="6D6555"/>
+                </a:solidFill>
+                <a:latin typeface="Calibri" pitchFamily="34" charset="0"/>
+                <a:ea typeface="Calibri" pitchFamily="34" charset="-122"/>
+                <a:cs typeface="Calibri" pitchFamily="34" charset="-120"/>
+              </a:rPr>
+              <a:t>Если вариантов несколько или заведение неизвестно, сервис задаёт вопрос и предлагает варианты.</a:t>
+            </a:r>
+            <a:endParaRPr lang="en-US" sz="1150" dirty="0"/>
+          </a:p>
+        </p:txBody>
+      </p:sp>
+      <p:sp>
+        <p:nvSpPr>
+          <p:cNvPr id="19" name="Text 17"/>
+          <p:cNvSpPr txBox="1"/>
+          <p:nvPr/>
+        </p:nvSpPr>
+        <p:spPr>
+          <a:xfrm>
+            <a:off x="6492240" y="1691640"/>
+            <a:ext cx="5029200" cy="292608"/>
+          </a:xfrm>
+          <a:prstGeom prst="rect">
+            <a:avLst/>
+          </a:prstGeom>
+          <a:noFill/>
+          <a:ln/>
+        </p:spPr>
+        <p:txBody>
+          <a:bodyPr wrap="square" lIns="0" tIns="0" rIns="0" bIns="0" rtlCol="0" anchor="ctr"/>
+          <a:lstStyle/>
+          <a:p>
+            <a:pPr indent="0" marL="0">
+              <a:buNone/>
+            </a:pPr>
+            <a:r>
+              <a:rPr lang="en-US" sz="1300" b="1" dirty="0">
+                <a:solidFill>
+                  <a:srgbClr val="A9834A"/>
+                </a:solidFill>
+                <a:latin typeface="Calibri" pitchFamily="34" charset="0"/>
+                <a:ea typeface="Calibri" pitchFamily="34" charset="-122"/>
+                <a:cs typeface="Calibri" pitchFamily="34" charset="-120"/>
+              </a:rPr>
+              <a:t>Реальные примеры из проверки</a:t>
+            </a:r>
+            <a:endParaRPr lang="en-US" sz="1300" dirty="0"/>
+          </a:p>
+        </p:txBody>
+      </p:sp>
+      <p:sp>
+        <p:nvSpPr>
+          <p:cNvPr id="20" name="Shape 18"/>
+          <p:cNvSpPr/>
+          <p:nvPr/>
+        </p:nvSpPr>
+        <p:spPr>
+          <a:xfrm>
+            <a:off x="6492240" y="2103120"/>
+            <a:ext cx="5029200" cy="512064"/>
+          </a:xfrm>
+          <a:prstGeom prst="roundRect">
+            <a:avLst>
+              <a:gd name="adj" fmla="val 17857"/>
+            </a:avLst>
+          </a:prstGeom>
+          <a:solidFill>
+            <a:srgbClr val="EFE7D5"/>
+          </a:solidFill>
+          <a:ln w="12700">
+            <a:solidFill>
+              <a:srgbClr val="E3DAC6"/>
+            </a:solidFill>
+            <a:prstDash val="solid"/>
+          </a:ln>
+        </p:spPr>
+      </p:sp>
+      <p:sp>
+        <p:nvSpPr>
+          <p:cNvPr id="21" name="Text 19"/>
+          <p:cNvSpPr txBox="1"/>
+          <p:nvPr/>
+        </p:nvSpPr>
+        <p:spPr>
+          <a:xfrm>
+            <a:off x="6675120" y="2103120"/>
+            <a:ext cx="2286000" cy="512064"/>
+          </a:xfrm>
+          <a:prstGeom prst="rect">
+            <a:avLst/>
+          </a:prstGeom>
+          <a:noFill/>
+          <a:ln/>
+        </p:spPr>
+        <p:txBody>
+          <a:bodyPr wrap="square" lIns="0" tIns="0" rIns="0" bIns="0" rtlCol="0" anchor="ctr"/>
+          <a:lstStyle/>
+          <a:p>
+            <a:pPr indent="0" marL="0">
+              <a:buNone/>
+            </a:pPr>
+            <a:r>
+              <a:rPr lang="en-US" sz="1300" b="1" dirty="0">
+                <a:solidFill>
+                  <a:srgbClr val="2A2620"/>
+                </a:solidFill>
+                <a:latin typeface="Calibri" pitchFamily="34" charset="0"/>
+                <a:ea typeface="Calibri" pitchFamily="34" charset="-122"/>
+                <a:cs typeface="Calibri" pitchFamily="34" charset="-120"/>
+              </a:rPr>
+              <a:t>nazarbaev univercity</a:t>
+            </a:r>
+            <a:endParaRPr lang="en-US" sz="1300" dirty="0"/>
+          </a:p>
+        </p:txBody>
+      </p:sp>
+      <p:sp>
+        <p:nvSpPr>
+          <p:cNvPr id="22" name="Text 20"/>
+          <p:cNvSpPr txBox="1"/>
+          <p:nvPr/>
+        </p:nvSpPr>
+        <p:spPr>
+          <a:xfrm>
+            <a:off x="8915400" y="2103120"/>
+            <a:ext cx="274320" cy="512064"/>
+          </a:xfrm>
+          <a:prstGeom prst="rect">
+            <a:avLst/>
+          </a:prstGeom>
+          <a:noFill/>
+          <a:ln/>
+        </p:spPr>
+        <p:txBody>
+          <a:bodyPr wrap="square" lIns="0" tIns="0" rIns="0" bIns="0" rtlCol="0" anchor="ctr"/>
+          <a:lstStyle/>
+          <a:p>
+            <a:pPr algn="ctr" indent="0" marL="0">
+              <a:buNone/>
+            </a:pPr>
+            <a:r>
               <a:rPr lang="en-US" sz="1400" dirty="0">
                 <a:solidFill>
+                  <a:srgbClr val="A9834A"/>
+                </a:solidFill>
+                <a:latin typeface="Calibri" pitchFamily="34" charset="0"/>
+                <a:ea typeface="Calibri" pitchFamily="34" charset="-122"/>
+                <a:cs typeface="Calibri" pitchFamily="34" charset="-120"/>
+              </a:rPr>
+              <a:t>→</a:t>
+            </a:r>
+            <a:endParaRPr lang="en-US" sz="1400" dirty="0"/>
+          </a:p>
+        </p:txBody>
+      </p:sp>
+      <p:sp>
+        <p:nvSpPr>
+          <p:cNvPr id="23" name="Text 21"/>
+          <p:cNvSpPr txBox="1"/>
+          <p:nvPr/>
+        </p:nvSpPr>
+        <p:spPr>
+          <a:xfrm>
+            <a:off x="9235440" y="2103120"/>
+            <a:ext cx="2194560" cy="512064"/>
+          </a:xfrm>
+          <a:prstGeom prst="rect">
+            <a:avLst/>
+          </a:prstGeom>
+          <a:noFill/>
+          <a:ln/>
+        </p:spPr>
+        <p:txBody>
+          <a:bodyPr wrap="square" lIns="0" tIns="0" rIns="0" bIns="0" rtlCol="0" anchor="ctr"/>
+          <a:lstStyle/>
+          <a:p>
+            <a:pPr indent="0" marL="0">
+              <a:buNone/>
+            </a:pPr>
+            <a:r>
+              <a:rPr lang="en-US" sz="1150" dirty="0">
+                <a:solidFill>
                   <a:srgbClr val="6D6555"/>
                 </a:solidFill>
                 <a:latin typeface="Calibri" pitchFamily="34" charset="0"/>
                 <a:ea typeface="Calibri" pitchFamily="34" charset="-122"/>
                 <a:cs typeface="Calibri" pitchFamily="34" charset="-120"/>
               </a:rPr>
-              <a:t>Стоковое фото или похожее здание другого места.</a:t>
+              <a:t>Nazarbayev University</a:t>
+            </a:r>
+            <a:endParaRPr lang="en-US" sz="1150" dirty="0"/>
+          </a:p>
+        </p:txBody>
+      </p:sp>
+      <p:sp>
+        <p:nvSpPr>
+          <p:cNvPr id="24" name="Shape 22"/>
+          <p:cNvSpPr/>
+          <p:nvPr/>
+        </p:nvSpPr>
+        <p:spPr>
+          <a:xfrm>
+            <a:off x="6492240" y="2706624"/>
+            <a:ext cx="5029200" cy="512064"/>
+          </a:xfrm>
+          <a:prstGeom prst="roundRect">
+            <a:avLst>
+              <a:gd name="adj" fmla="val 17857"/>
+            </a:avLst>
+          </a:prstGeom>
+          <a:solidFill>
+            <a:srgbClr val="EFE7D5"/>
+          </a:solidFill>
+          <a:ln w="12700">
+            <a:solidFill>
+              <a:srgbClr val="E3DAC6"/>
+            </a:solidFill>
+            <a:prstDash val="solid"/>
+          </a:ln>
+        </p:spPr>
+      </p:sp>
+      <p:sp>
+        <p:nvSpPr>
+          <p:cNvPr id="25" name="Text 23"/>
+          <p:cNvSpPr txBox="1"/>
+          <p:nvPr/>
+        </p:nvSpPr>
+        <p:spPr>
+          <a:xfrm>
+            <a:off x="6675120" y="2706624"/>
+            <a:ext cx="2286000" cy="512064"/>
+          </a:xfrm>
+          <a:prstGeom prst="rect">
+            <a:avLst/>
+          </a:prstGeom>
+          <a:noFill/>
+          <a:ln/>
+        </p:spPr>
+        <p:txBody>
+          <a:bodyPr wrap="square" lIns="0" tIns="0" rIns="0" bIns="0" rtlCol="0" anchor="ctr"/>
+          <a:lstStyle/>
+          <a:p>
+            <a:pPr indent="0" marL="0">
+              <a:buNone/>
+            </a:pPr>
+            <a:r>
+              <a:rPr lang="en-US" sz="1300" b="1" dirty="0">
+                <a:solidFill>
+                  <a:srgbClr val="2A2620"/>
+                </a:solidFill>
+                <a:latin typeface="Calibri" pitchFamily="34" charset="0"/>
+                <a:ea typeface="Calibri" pitchFamily="34" charset="-122"/>
+                <a:cs typeface="Calibri" pitchFamily="34" charset="-120"/>
+              </a:rPr>
+              <a:t>КазНУ</a:t>
+            </a:r>
+            <a:endParaRPr lang="en-US" sz="1300" dirty="0"/>
+          </a:p>
+        </p:txBody>
+      </p:sp>
+      <p:sp>
+        <p:nvSpPr>
+          <p:cNvPr id="26" name="Text 24"/>
+          <p:cNvSpPr txBox="1"/>
+          <p:nvPr/>
+        </p:nvSpPr>
+        <p:spPr>
+          <a:xfrm>
+            <a:off x="8915400" y="2706624"/>
+            <a:ext cx="274320" cy="512064"/>
+          </a:xfrm>
+          <a:prstGeom prst="rect">
+            <a:avLst/>
+          </a:prstGeom>
+          <a:noFill/>
+          <a:ln/>
+        </p:spPr>
+        <p:txBody>
+          <a:bodyPr wrap="square" lIns="0" tIns="0" rIns="0" bIns="0" rtlCol="0" anchor="ctr"/>
+          <a:lstStyle/>
+          <a:p>
+            <a:pPr algn="ctr" indent="0" marL="0">
+              <a:buNone/>
+            </a:pPr>
+            <a:r>
+              <a:rPr lang="en-US" sz="1400" dirty="0">
+                <a:solidFill>
+                  <a:srgbClr val="A9834A"/>
+                </a:solidFill>
+                <a:latin typeface="Calibri" pitchFamily="34" charset="0"/>
+                <a:ea typeface="Calibri" pitchFamily="34" charset="-122"/>
+                <a:cs typeface="Calibri" pitchFamily="34" charset="-120"/>
+              </a:rPr>
+              <a:t>→</a:t>
             </a:r>
             <a:endParaRPr lang="en-US" sz="1400" dirty="0"/>
           </a:p>
@@ -6702,14 +7645,80 @@
       </p:sp>
       <p:sp>
         <p:nvSpPr>
-          <p:cNvPr id="21" name="Text 19"/>
-          <p:cNvSpPr txBox="1"/>
-          <p:nvPr/>
-        </p:nvSpPr>
-        <p:spPr>
-          <a:xfrm>
-            <a:off x="8458200" y="4846320"/>
-            <a:ext cx="2788920" cy="365760"/>
+          <p:cNvPr id="27" name="Text 25"/>
+          <p:cNvSpPr txBox="1"/>
+          <p:nvPr/>
+        </p:nvSpPr>
+        <p:spPr>
+          <a:xfrm>
+            <a:off x="9235440" y="2706624"/>
+            <a:ext cx="2194560" cy="512064"/>
+          </a:xfrm>
+          <a:prstGeom prst="rect">
+            <a:avLst/>
+          </a:prstGeom>
+          <a:noFill/>
+          <a:ln/>
+        </p:spPr>
+        <p:txBody>
+          <a:bodyPr wrap="square" lIns="0" tIns="0" rIns="0" bIns="0" rtlCol="0" anchor="ctr"/>
+          <a:lstStyle/>
+          <a:p>
+            <a:pPr indent="0" marL="0">
+              <a:buNone/>
+            </a:pPr>
+            <a:r>
+              <a:rPr lang="en-US" sz="1150" dirty="0">
+                <a:solidFill>
+                  <a:srgbClr val="6D6555"/>
+                </a:solidFill>
+                <a:latin typeface="Calibri" pitchFamily="34" charset="0"/>
+                <a:ea typeface="Calibri" pitchFamily="34" charset="-122"/>
+                <a:cs typeface="Calibri" pitchFamily="34" charset="-120"/>
+              </a:rPr>
+              <a:t>Казахский национальный университет</a:t>
+            </a:r>
+            <a:endParaRPr lang="en-US" sz="1150" dirty="0"/>
+          </a:p>
+        </p:txBody>
+      </p:sp>
+      <p:sp>
+        <p:nvSpPr>
+          <p:cNvPr id="28" name="Shape 26"/>
+          <p:cNvSpPr/>
+          <p:nvPr/>
+        </p:nvSpPr>
+        <p:spPr>
+          <a:xfrm>
+            <a:off x="6492240" y="3310128"/>
+            <a:ext cx="5029200" cy="512064"/>
+          </a:xfrm>
+          <a:prstGeom prst="roundRect">
+            <a:avLst>
+              <a:gd name="adj" fmla="val 17857"/>
+            </a:avLst>
+          </a:prstGeom>
+          <a:solidFill>
+            <a:srgbClr val="EFE7D5"/>
+          </a:solidFill>
+          <a:ln w="12700">
+            <a:solidFill>
+              <a:srgbClr val="E3DAC6"/>
+            </a:solidFill>
+            <a:prstDash val="solid"/>
+          </a:ln>
+        </p:spPr>
+      </p:sp>
+      <p:sp>
+        <p:nvSpPr>
+          <p:cNvPr id="29" name="Text 27"/>
+          <p:cNvSpPr txBox="1"/>
+          <p:nvPr/>
+        </p:nvSpPr>
+        <p:spPr>
+          <a:xfrm>
+            <a:off x="6675120" y="3310128"/>
+            <a:ext cx="2286000" cy="512064"/>
           </a:xfrm>
           <a:prstGeom prst="rect">
             <a:avLst/>
@@ -6727,13 +7736,13 @@
             <a:r>
               <a:rPr lang="en-US" sz="1300" b="1" dirty="0">
                 <a:solidFill>
-                  <a:srgbClr val="78716C"/>
-                </a:solidFill>
-                <a:latin typeface="Calibri" pitchFamily="34" charset="0"/>
-                <a:ea typeface="Calibri" pitchFamily="34" charset="-122"/>
-                <a:cs typeface="Calibri" pitchFamily="34" charset="-120"/>
-              </a:rPr>
-              <a:t>Скрыто из профиля</a:t>
+                  <a:srgbClr val="2A2620"/>
+                </a:solidFill>
+                <a:latin typeface="Calibri" pitchFamily="34" charset="0"/>
+                <a:ea typeface="Calibri" pitchFamily="34" charset="-122"/>
+                <a:cs typeface="Calibri" pitchFamily="34" charset="-120"/>
+              </a:rPr>
+              <a:t>清华大学</a:t>
             </a:r>
             <a:endParaRPr lang="en-US" sz="1300" dirty="0"/>
           </a:p>
@@ -6741,30 +7750,501 @@
       </p:sp>
       <p:sp>
         <p:nvSpPr>
-          <p:cNvPr id="22" name="Text 20"/>
-          <p:cNvSpPr txBox="1"/>
-          <p:nvPr/>
-        </p:nvSpPr>
-        <p:spPr>
-          <a:xfrm>
-            <a:off x="640080" y="5760720"/>
-            <a:ext cx="10908792" cy="365760"/>
-          </a:xfrm>
-          <a:prstGeom prst="rect">
-            <a:avLst/>
-          </a:prstGeom>
-          <a:noFill/>
-          <a:ln/>
-        </p:spPr>
-        <p:txBody>
-          <a:bodyPr wrap="square" lIns="0" tIns="0" rIns="0" bIns="0" rtlCol="0" anchor="ctr"/>
-          <a:lstStyle/>
-          <a:p>
-            <a:pPr indent="0" marL="0">
-              <a:buNone/>
-            </a:pPr>
-            <a:r>
-              <a:rPr lang="en-US" sz="1400" i="1" dirty="0">
+          <p:cNvPr id="30" name="Text 28"/>
+          <p:cNvSpPr txBox="1"/>
+          <p:nvPr/>
+        </p:nvSpPr>
+        <p:spPr>
+          <a:xfrm>
+            <a:off x="8915400" y="3310128"/>
+            <a:ext cx="274320" cy="512064"/>
+          </a:xfrm>
+          <a:prstGeom prst="rect">
+            <a:avLst/>
+          </a:prstGeom>
+          <a:noFill/>
+          <a:ln/>
+        </p:spPr>
+        <p:txBody>
+          <a:bodyPr wrap="square" lIns="0" tIns="0" rIns="0" bIns="0" rtlCol="0" anchor="ctr"/>
+          <a:lstStyle/>
+          <a:p>
+            <a:pPr algn="ctr" indent="0" marL="0">
+              <a:buNone/>
+            </a:pPr>
+            <a:r>
+              <a:rPr lang="en-US" sz="1400" dirty="0">
+                <a:solidFill>
+                  <a:srgbClr val="A9834A"/>
+                </a:solidFill>
+                <a:latin typeface="Calibri" pitchFamily="34" charset="0"/>
+                <a:ea typeface="Calibri" pitchFamily="34" charset="-122"/>
+                <a:cs typeface="Calibri" pitchFamily="34" charset="-120"/>
+              </a:rPr>
+              <a:t>→</a:t>
+            </a:r>
+            <a:endParaRPr lang="en-US" sz="1400" dirty="0"/>
+          </a:p>
+        </p:txBody>
+      </p:sp>
+      <p:sp>
+        <p:nvSpPr>
+          <p:cNvPr id="31" name="Text 29"/>
+          <p:cNvSpPr txBox="1"/>
+          <p:nvPr/>
+        </p:nvSpPr>
+        <p:spPr>
+          <a:xfrm>
+            <a:off x="9235440" y="3310128"/>
+            <a:ext cx="2194560" cy="512064"/>
+          </a:xfrm>
+          <a:prstGeom prst="rect">
+            <a:avLst/>
+          </a:prstGeom>
+          <a:noFill/>
+          <a:ln/>
+        </p:spPr>
+        <p:txBody>
+          <a:bodyPr wrap="square" lIns="0" tIns="0" rIns="0" bIns="0" rtlCol="0" anchor="ctr"/>
+          <a:lstStyle/>
+          <a:p>
+            <a:pPr indent="0" marL="0">
+              <a:buNone/>
+            </a:pPr>
+            <a:r>
+              <a:rPr lang="en-US" sz="1150" dirty="0">
+                <a:solidFill>
+                  <a:srgbClr val="6D6555"/>
+                </a:solidFill>
+                <a:latin typeface="Calibri" pitchFamily="34" charset="0"/>
+                <a:ea typeface="Calibri" pitchFamily="34" charset="-122"/>
+                <a:cs typeface="Calibri" pitchFamily="34" charset="-120"/>
+              </a:rPr>
+              <a:t>Tsinghua (Пекин)</a:t>
+            </a:r>
+            <a:endParaRPr lang="en-US" sz="1150" dirty="0"/>
+          </a:p>
+        </p:txBody>
+      </p:sp>
+      <p:sp>
+        <p:nvSpPr>
+          <p:cNvPr id="32" name="Shape 30"/>
+          <p:cNvSpPr/>
+          <p:nvPr/>
+        </p:nvSpPr>
+        <p:spPr>
+          <a:xfrm>
+            <a:off x="6492240" y="3913632"/>
+            <a:ext cx="5029200" cy="512064"/>
+          </a:xfrm>
+          <a:prstGeom prst="roundRect">
+            <a:avLst>
+              <a:gd name="adj" fmla="val 17857"/>
+            </a:avLst>
+          </a:prstGeom>
+          <a:solidFill>
+            <a:srgbClr val="EFE7D5"/>
+          </a:solidFill>
+          <a:ln w="12700">
+            <a:solidFill>
+              <a:srgbClr val="E3DAC6"/>
+            </a:solidFill>
+            <a:prstDash val="solid"/>
+          </a:ln>
+        </p:spPr>
+      </p:sp>
+      <p:sp>
+        <p:nvSpPr>
+          <p:cNvPr id="33" name="Text 31"/>
+          <p:cNvSpPr txBox="1"/>
+          <p:nvPr/>
+        </p:nvSpPr>
+        <p:spPr>
+          <a:xfrm>
+            <a:off x="6675120" y="3913632"/>
+            <a:ext cx="2286000" cy="512064"/>
+          </a:xfrm>
+          <a:prstGeom prst="rect">
+            <a:avLst/>
+          </a:prstGeom>
+          <a:noFill/>
+          <a:ln/>
+        </p:spPr>
+        <p:txBody>
+          <a:bodyPr wrap="square" lIns="0" tIns="0" rIns="0" bIns="0" rtlCol="0" anchor="ctr"/>
+          <a:lstStyle/>
+          <a:p>
+            <a:pPr indent="0" marL="0">
+              <a:buNone/>
+            </a:pPr>
+            <a:r>
+              <a:rPr lang="en-US" sz="1300" b="1" dirty="0">
+                <a:solidFill>
+                  <a:srgbClr val="2A2620"/>
+                </a:solidFill>
+                <a:latin typeface="Calibri" pitchFamily="34" charset="0"/>
+                <a:ea typeface="Calibri" pitchFamily="34" charset="-122"/>
+                <a:cs typeface="Calibri" pitchFamily="34" charset="-120"/>
+              </a:rPr>
+              <a:t>Universität Heidelberg</a:t>
+            </a:r>
+            <a:endParaRPr lang="en-US" sz="1300" dirty="0"/>
+          </a:p>
+        </p:txBody>
+      </p:sp>
+      <p:sp>
+        <p:nvSpPr>
+          <p:cNvPr id="34" name="Text 32"/>
+          <p:cNvSpPr txBox="1"/>
+          <p:nvPr/>
+        </p:nvSpPr>
+        <p:spPr>
+          <a:xfrm>
+            <a:off x="8915400" y="3913632"/>
+            <a:ext cx="274320" cy="512064"/>
+          </a:xfrm>
+          <a:prstGeom prst="rect">
+            <a:avLst/>
+          </a:prstGeom>
+          <a:noFill/>
+          <a:ln/>
+        </p:spPr>
+        <p:txBody>
+          <a:bodyPr wrap="square" lIns="0" tIns="0" rIns="0" bIns="0" rtlCol="0" anchor="ctr"/>
+          <a:lstStyle/>
+          <a:p>
+            <a:pPr algn="ctr" indent="0" marL="0">
+              <a:buNone/>
+            </a:pPr>
+            <a:r>
+              <a:rPr lang="en-US" sz="1400" dirty="0">
+                <a:solidFill>
+                  <a:srgbClr val="A9834A"/>
+                </a:solidFill>
+                <a:latin typeface="Calibri" pitchFamily="34" charset="0"/>
+                <a:ea typeface="Calibri" pitchFamily="34" charset="-122"/>
+                <a:cs typeface="Calibri" pitchFamily="34" charset="-120"/>
+              </a:rPr>
+              <a:t>→</a:t>
+            </a:r>
+            <a:endParaRPr lang="en-US" sz="1400" dirty="0"/>
+          </a:p>
+        </p:txBody>
+      </p:sp>
+      <p:sp>
+        <p:nvSpPr>
+          <p:cNvPr id="35" name="Text 33"/>
+          <p:cNvSpPr txBox="1"/>
+          <p:nvPr/>
+        </p:nvSpPr>
+        <p:spPr>
+          <a:xfrm>
+            <a:off x="9235440" y="3913632"/>
+            <a:ext cx="2194560" cy="512064"/>
+          </a:xfrm>
+          <a:prstGeom prst="rect">
+            <a:avLst/>
+          </a:prstGeom>
+          <a:noFill/>
+          <a:ln/>
+        </p:spPr>
+        <p:txBody>
+          <a:bodyPr wrap="square" lIns="0" tIns="0" rIns="0" bIns="0" rtlCol="0" anchor="ctr"/>
+          <a:lstStyle/>
+          <a:p>
+            <a:pPr indent="0" marL="0">
+              <a:buNone/>
+            </a:pPr>
+            <a:r>
+              <a:rPr lang="en-US" sz="1150" dirty="0">
+                <a:solidFill>
+                  <a:srgbClr val="6D6555"/>
+                </a:solidFill>
+                <a:latin typeface="Calibri" pitchFamily="34" charset="0"/>
+                <a:ea typeface="Calibri" pitchFamily="34" charset="-122"/>
+                <a:cs typeface="Calibri" pitchFamily="34" charset="-120"/>
+              </a:rPr>
+              <a:t>Heidelberg University</a:t>
+            </a:r>
+            <a:endParaRPr lang="en-US" sz="1150" dirty="0"/>
+          </a:p>
+        </p:txBody>
+      </p:sp>
+      <p:sp>
+        <p:nvSpPr>
+          <p:cNvPr id="36" name="Shape 34"/>
+          <p:cNvSpPr/>
+          <p:nvPr/>
+        </p:nvSpPr>
+        <p:spPr>
+          <a:xfrm>
+            <a:off x="6492240" y="4517136"/>
+            <a:ext cx="5029200" cy="512064"/>
+          </a:xfrm>
+          <a:prstGeom prst="roundRect">
+            <a:avLst>
+              <a:gd name="adj" fmla="val 17857"/>
+            </a:avLst>
+          </a:prstGeom>
+          <a:solidFill>
+            <a:srgbClr val="EFE7D5"/>
+          </a:solidFill>
+          <a:ln w="12700">
+            <a:solidFill>
+              <a:srgbClr val="E3DAC6"/>
+            </a:solidFill>
+            <a:prstDash val="solid"/>
+          </a:ln>
+        </p:spPr>
+      </p:sp>
+      <p:sp>
+        <p:nvSpPr>
+          <p:cNvPr id="37" name="Text 35"/>
+          <p:cNvSpPr txBox="1"/>
+          <p:nvPr/>
+        </p:nvSpPr>
+        <p:spPr>
+          <a:xfrm>
+            <a:off x="6675120" y="4517136"/>
+            <a:ext cx="2286000" cy="512064"/>
+          </a:xfrm>
+          <a:prstGeom prst="rect">
+            <a:avLst/>
+          </a:prstGeom>
+          <a:noFill/>
+          <a:ln/>
+        </p:spPr>
+        <p:txBody>
+          <a:bodyPr wrap="square" lIns="0" tIns="0" rIns="0" bIns="0" rtlCol="0" anchor="ctr"/>
+          <a:lstStyle/>
+          <a:p>
+            <a:pPr indent="0" marL="0">
+              <a:buNone/>
+            </a:pPr>
+            <a:r>
+              <a:rPr lang="en-US" sz="1300" b="1" dirty="0">
+                <a:solidFill>
+                  <a:srgbClr val="2A2620"/>
+                </a:solidFill>
+                <a:latin typeface="Calibri" pitchFamily="34" charset="0"/>
+                <a:ea typeface="Calibri" pitchFamily="34" charset="-122"/>
+                <a:cs typeface="Calibri" pitchFamily="34" charset="-120"/>
+              </a:rPr>
+              <a:t>Eton College</a:t>
+            </a:r>
+            <a:endParaRPr lang="en-US" sz="1300" dirty="0"/>
+          </a:p>
+        </p:txBody>
+      </p:sp>
+      <p:sp>
+        <p:nvSpPr>
+          <p:cNvPr id="38" name="Text 36"/>
+          <p:cNvSpPr txBox="1"/>
+          <p:nvPr/>
+        </p:nvSpPr>
+        <p:spPr>
+          <a:xfrm>
+            <a:off x="8915400" y="4517136"/>
+            <a:ext cx="274320" cy="512064"/>
+          </a:xfrm>
+          <a:prstGeom prst="rect">
+            <a:avLst/>
+          </a:prstGeom>
+          <a:noFill/>
+          <a:ln/>
+        </p:spPr>
+        <p:txBody>
+          <a:bodyPr wrap="square" lIns="0" tIns="0" rIns="0" bIns="0" rtlCol="0" anchor="ctr"/>
+          <a:lstStyle/>
+          <a:p>
+            <a:pPr algn="ctr" indent="0" marL="0">
+              <a:buNone/>
+            </a:pPr>
+            <a:r>
+              <a:rPr lang="en-US" sz="1400" dirty="0">
+                <a:solidFill>
+                  <a:srgbClr val="A9834A"/>
+                </a:solidFill>
+                <a:latin typeface="Calibri" pitchFamily="34" charset="0"/>
+                <a:ea typeface="Calibri" pitchFamily="34" charset="-122"/>
+                <a:cs typeface="Calibri" pitchFamily="34" charset="-120"/>
+              </a:rPr>
+              <a:t>→</a:t>
+            </a:r>
+            <a:endParaRPr lang="en-US" sz="1400" dirty="0"/>
+          </a:p>
+        </p:txBody>
+      </p:sp>
+      <p:sp>
+        <p:nvSpPr>
+          <p:cNvPr id="39" name="Text 37"/>
+          <p:cNvSpPr txBox="1"/>
+          <p:nvPr/>
+        </p:nvSpPr>
+        <p:spPr>
+          <a:xfrm>
+            <a:off x="9235440" y="4517136"/>
+            <a:ext cx="2194560" cy="512064"/>
+          </a:xfrm>
+          <a:prstGeom prst="rect">
+            <a:avLst/>
+          </a:prstGeom>
+          <a:noFill/>
+          <a:ln/>
+        </p:spPr>
+        <p:txBody>
+          <a:bodyPr wrap="square" lIns="0" tIns="0" rIns="0" bIns="0" rtlCol="0" anchor="ctr"/>
+          <a:lstStyle/>
+          <a:p>
+            <a:pPr indent="0" marL="0">
+              <a:buNone/>
+            </a:pPr>
+            <a:r>
+              <a:rPr lang="en-US" sz="1150" dirty="0">
+                <a:solidFill>
+                  <a:srgbClr val="6D6555"/>
+                </a:solidFill>
+                <a:latin typeface="Calibri" pitchFamily="34" charset="0"/>
+                <a:ea typeface="Calibri" pitchFamily="34" charset="-122"/>
+                <a:cs typeface="Calibri" pitchFamily="34" charset="-120"/>
+              </a:rPr>
+              <a:t>Итон, Великобритания</a:t>
+            </a:r>
+            <a:endParaRPr lang="en-US" sz="1150" dirty="0"/>
+          </a:p>
+        </p:txBody>
+      </p:sp>
+      <p:sp>
+        <p:nvSpPr>
+          <p:cNvPr id="40" name="Shape 38"/>
+          <p:cNvSpPr/>
+          <p:nvPr/>
+        </p:nvSpPr>
+        <p:spPr>
+          <a:xfrm>
+            <a:off x="6492240" y="5120640"/>
+            <a:ext cx="5029200" cy="512064"/>
+          </a:xfrm>
+          <a:prstGeom prst="roundRect">
+            <a:avLst>
+              <a:gd name="adj" fmla="val 17857"/>
+            </a:avLst>
+          </a:prstGeom>
+          <a:solidFill>
+            <a:srgbClr val="F0E3C8"/>
+          </a:solidFill>
+          <a:ln w="12700">
+            <a:solidFill>
+              <a:srgbClr val="E3DAC6"/>
+            </a:solidFill>
+            <a:prstDash val="solid"/>
+          </a:ln>
+        </p:spPr>
+      </p:sp>
+      <p:sp>
+        <p:nvSpPr>
+          <p:cNvPr id="41" name="Text 39"/>
+          <p:cNvSpPr txBox="1"/>
+          <p:nvPr/>
+        </p:nvSpPr>
+        <p:spPr>
+          <a:xfrm>
+            <a:off x="6675120" y="5120640"/>
+            <a:ext cx="2286000" cy="512064"/>
+          </a:xfrm>
+          <a:prstGeom prst="rect">
+            <a:avLst/>
+          </a:prstGeom>
+          <a:noFill/>
+          <a:ln/>
+        </p:spPr>
+        <p:txBody>
+          <a:bodyPr wrap="square" lIns="0" tIns="0" rIns="0" bIns="0" rtlCol="0" anchor="ctr"/>
+          <a:lstStyle/>
+          <a:p>
+            <a:pPr indent="0" marL="0">
+              <a:buNone/>
+            </a:pPr>
+            <a:r>
+              <a:rPr lang="en-US" sz="1300" b="1" dirty="0">
+                <a:solidFill>
+                  <a:srgbClr val="2A2620"/>
+                </a:solidFill>
+                <a:latin typeface="Calibri" pitchFamily="34" charset="0"/>
+                <a:ea typeface="Calibri" pitchFamily="34" charset="-122"/>
+                <a:cs typeface="Calibri" pitchFamily="34" charset="-120"/>
+              </a:rPr>
+              <a:t>asdfgh college</a:t>
+            </a:r>
+            <a:endParaRPr lang="en-US" sz="1300" dirty="0"/>
+          </a:p>
+        </p:txBody>
+      </p:sp>
+      <p:sp>
+        <p:nvSpPr>
+          <p:cNvPr id="42" name="Text 40"/>
+          <p:cNvSpPr txBox="1"/>
+          <p:nvPr/>
+        </p:nvSpPr>
+        <p:spPr>
+          <a:xfrm>
+            <a:off x="8915400" y="5120640"/>
+            <a:ext cx="274320" cy="512064"/>
+          </a:xfrm>
+          <a:prstGeom prst="rect">
+            <a:avLst/>
+          </a:prstGeom>
+          <a:noFill/>
+          <a:ln/>
+        </p:spPr>
+        <p:txBody>
+          <a:bodyPr wrap="square" lIns="0" tIns="0" rIns="0" bIns="0" rtlCol="0" anchor="ctr"/>
+          <a:lstStyle/>
+          <a:p>
+            <a:pPr algn="ctr" indent="0" marL="0">
+              <a:buNone/>
+            </a:pPr>
+            <a:r>
+              <a:rPr lang="en-US" sz="1400" dirty="0">
+                <a:solidFill>
+                  <a:srgbClr val="A9834A"/>
+                </a:solidFill>
+                <a:latin typeface="Calibri" pitchFamily="34" charset="0"/>
+                <a:ea typeface="Calibri" pitchFamily="34" charset="-122"/>
+                <a:cs typeface="Calibri" pitchFamily="34" charset="-120"/>
+              </a:rPr>
+              <a:t>→</a:t>
+            </a:r>
+            <a:endParaRPr lang="en-US" sz="1400" dirty="0"/>
+          </a:p>
+        </p:txBody>
+      </p:sp>
+      <p:sp>
+        <p:nvSpPr>
+          <p:cNvPr id="43" name="Text 41"/>
+          <p:cNvSpPr txBox="1"/>
+          <p:nvPr/>
+        </p:nvSpPr>
+        <p:spPr>
+          <a:xfrm>
+            <a:off x="9235440" y="5120640"/>
+            <a:ext cx="2194560" cy="512064"/>
+          </a:xfrm>
+          <a:prstGeom prst="rect">
+            <a:avLst/>
+          </a:prstGeom>
+          <a:noFill/>
+          <a:ln/>
+        </p:spPr>
+        <p:txBody>
+          <a:bodyPr wrap="square" lIns="0" tIns="0" rIns="0" bIns="0" rtlCol="0" anchor="ctr"/>
+          <a:lstStyle/>
+          <a:p>
+            <a:pPr indent="0" marL="0">
+              <a:buNone/>
+            </a:pPr>
+            <a:r>
+              <a:rPr lang="en-US" sz="1150" dirty="0">
                 <a:solidFill>
                   <a:srgbClr val="1F4A3D"/>
                 </a:solidFill>
@@ -6772,15 +8252,54 @@
                 <a:ea typeface="Calibri" pitchFamily="34" charset="-122"/>
                 <a:cs typeface="Calibri" pitchFamily="34" charset="-120"/>
               </a:rPr>
-              <a:t>Если данных мало, сервис прямо об этом говорит, а не выдумывает описание или фото.</a:t>
-            </a:r>
-            <a:endParaRPr lang="en-US" sz="1400" dirty="0"/>
-          </a:p>
-        </p:txBody>
-      </p:sp>
-      <p:sp>
-        <p:nvSpPr>
-          <p:cNvPr id="23" name="Text 21"/>
+              <a:t>Вопрос: уточните название</a:t>
+            </a:r>
+            <a:endParaRPr lang="en-US" sz="1150" dirty="0"/>
+          </a:p>
+        </p:txBody>
+      </p:sp>
+      <p:sp>
+        <p:nvSpPr>
+          <p:cNvPr id="44" name="Text 42"/>
+          <p:cNvSpPr txBox="1"/>
+          <p:nvPr/>
+        </p:nvSpPr>
+        <p:spPr>
+          <a:xfrm>
+            <a:off x="640080" y="5806440"/>
+            <a:ext cx="10908792" cy="320040"/>
+          </a:xfrm>
+          <a:prstGeom prst="rect">
+            <a:avLst/>
+          </a:prstGeom>
+          <a:noFill/>
+          <a:ln/>
+        </p:spPr>
+        <p:txBody>
+          <a:bodyPr wrap="square" lIns="0" tIns="0" rIns="0" bIns="0" rtlCol="0" anchor="ctr"/>
+          <a:lstStyle/>
+          <a:p>
+            <a:pPr indent="0" marL="0">
+              <a:buNone/>
+            </a:pPr>
+            <a:r>
+              <a:rPr lang="en-US" sz="1300" i="1" dirty="0">
+                <a:solidFill>
+                  <a:srgbClr val="1F4A3D"/>
+                </a:solidFill>
+                <a:latin typeface="Calibri" pitchFamily="34" charset="0"/>
+                <a:ea typeface="Calibri" pitchFamily="34" charset="-122"/>
+                <a:cs typeface="Calibri" pitchFamily="34" charset="-120"/>
+              </a:rPr>
+              <a:t>Выдуманное ИИ название не пройдёт: каждый ответ перепроверяется по базе Wikidata.</a:t>
+            </a:r>
+            <a:endParaRPr lang="en-US" sz="1300" dirty="0"/>
+          </a:p>
+        </p:txBody>
+      </p:sp>
+      <p:sp>
+        <p:nvSpPr>
+          <p:cNvPr id="45" name="Text 43"/>
           <p:cNvSpPr txBox="1"/>
           <p:nvPr/>
         </p:nvSpPr>
@@ -6811,7 +8330,7 @@
                 <a:ea typeface="Calibri" pitchFamily="34" charset="-122"/>
                 <a:cs typeface="Calibri" pitchFamily="34" charset="-120"/>
               </a:rPr>
-              <a:t>6 / 8</a:t>
+              <a:t>6 / 10</a:t>
             </a:r>
             <a:endParaRPr lang="en-US" sz="1000" dirty="0"/>
           </a:p>
@@ -6819,7 +8338,7 @@
       </p:sp>
       <p:sp>
         <p:nvSpPr>
-          <p:cNvPr id="24" name="Text 22"/>
+          <p:cNvPr id="46" name="Text 44"/>
           <p:cNvSpPr txBox="1"/>
           <p:nvPr/>
         </p:nvSpPr>
@@ -6921,7 +8440,7 @@
                 <a:ea typeface="Calibri" pitchFamily="34" charset="-122"/>
                 <a:cs typeface="Calibri" pitchFamily="34" charset="-120"/>
               </a:rPr>
-              <a:t>ТЕХНОЛОГИИ</a:t>
+              <a:t>ФАКУЛЬТЕТЫ И СТУДЕНЧЕСКАЯ ЖИЗНЬ</a:t>
             </a:r>
             <a:endParaRPr lang="en-US" sz="1200" dirty="0"/>
           </a:p>
@@ -6960,7 +8479,7 @@
                 <a:ea typeface="Cambria" pitchFamily="34" charset="-122"/>
                 <a:cs typeface="Cambria" pitchFamily="34" charset="-120"/>
               </a:rPr>
-              <a:t>Открытые источники и один AI</a:t>
+              <a:t>Популярность, загруженность и активности</a:t>
             </a:r>
             <a:endParaRPr lang="en-US" sz="3800" dirty="0"/>
           </a:p>
@@ -6968,18 +8487,57 @@
       </p:sp>
       <p:sp>
         <p:nvSpPr>
-          <p:cNvPr id="4" name="Shape 2"/>
+          <p:cNvPr id="4" name="Text 2"/>
+          <p:cNvSpPr txBox="1"/>
+          <p:nvPr/>
+        </p:nvSpPr>
+        <p:spPr>
+          <a:xfrm>
+            <a:off x="640080" y="1600200"/>
+            <a:ext cx="6035040" cy="292608"/>
+          </a:xfrm>
+          <a:prstGeom prst="rect">
+            <a:avLst/>
+          </a:prstGeom>
+          <a:noFill/>
+          <a:ln/>
+        </p:spPr>
+        <p:txBody>
+          <a:bodyPr wrap="square" lIns="0" tIns="0" rIns="0" bIns="0" rtlCol="0" anchor="ctr"/>
+          <a:lstStyle/>
+          <a:p>
+            <a:pPr indent="0" marL="0">
+              <a:buNone/>
+            </a:pPr>
+            <a:r>
+              <a:rPr lang="en-US" sz="1300" b="1" dirty="0">
+                <a:solidFill>
+                  <a:srgbClr val="A9834A"/>
+                </a:solidFill>
+                <a:latin typeface="Calibri" pitchFamily="34" charset="0"/>
+                <a:ea typeface="Calibri" pitchFamily="34" charset="-122"/>
+                <a:cs typeface="Calibri" pitchFamily="34" charset="-120"/>
+              </a:rPr>
+              <a:t>Nazarbayev University: факультеты</a:t>
+            </a:r>
+            <a:endParaRPr lang="en-US" sz="1300" dirty="0"/>
+          </a:p>
+        </p:txBody>
+      </p:sp>
+      <p:sp>
+        <p:nvSpPr>
+          <p:cNvPr id="5" name="Shape 3"/>
           <p:cNvSpPr/>
           <p:nvPr/>
         </p:nvSpPr>
         <p:spPr>
           <a:xfrm>
-            <a:off x="640080" y="1783080"/>
-            <a:ext cx="5303520" cy="1143000"/>
+            <a:off x="640080" y="2011680"/>
+            <a:ext cx="6035040" cy="1051560"/>
           </a:xfrm>
           <a:prstGeom prst="roundRect">
             <a:avLst>
-              <a:gd name="adj" fmla="val 8000"/>
+              <a:gd name="adj" fmla="val 8696"/>
             </a:avLst>
           </a:prstGeom>
           <a:solidFill>
@@ -6995,17 +8553,197 @@
       </p:sp>
       <p:sp>
         <p:nvSpPr>
-          <p:cNvPr id="5" name="Shape 3"/>
+          <p:cNvPr id="6" name="Text 4"/>
+          <p:cNvSpPr txBox="1"/>
+          <p:nvPr/>
+        </p:nvSpPr>
+        <p:spPr>
+          <a:xfrm>
+            <a:off x="868680" y="2103120"/>
+            <a:ext cx="4206240" cy="329184"/>
+          </a:xfrm>
+          <a:prstGeom prst="rect">
+            <a:avLst/>
+          </a:prstGeom>
+          <a:noFill/>
+          <a:ln/>
+        </p:spPr>
+        <p:txBody>
+          <a:bodyPr wrap="square" lIns="0" tIns="0" rIns="0" bIns="0" rtlCol="0" anchor="ctr"/>
+          <a:lstStyle/>
+          <a:p>
+            <a:pPr indent="0" marL="0">
+              <a:buNone/>
+            </a:pPr>
+            <a:r>
+              <a:rPr lang="en-US" sz="1400" b="1" dirty="0">
+                <a:solidFill>
+                  <a:srgbClr val="1F4A3D"/>
+                </a:solidFill>
+                <a:latin typeface="Cambria" pitchFamily="34" charset="0"/>
+                <a:ea typeface="Cambria" pitchFamily="34" charset="-122"/>
+                <a:cs typeface="Cambria" pitchFamily="34" charset="-120"/>
+              </a:rPr>
+              <a:t>School of Engineering and Digital Sciences</a:t>
+            </a:r>
+            <a:endParaRPr lang="en-US" sz="1400" dirty="0"/>
+          </a:p>
+        </p:txBody>
+      </p:sp>
+      <p:sp>
+        <p:nvSpPr>
+          <p:cNvPr id="7" name="Shape 5"/>
           <p:cNvSpPr/>
           <p:nvPr/>
         </p:nvSpPr>
         <p:spPr>
           <a:xfrm>
-            <a:off x="914400" y="2075688"/>
-            <a:ext cx="548640" cy="548640"/>
-          </a:xfrm>
-          <a:prstGeom prst="ellipse">
-            <a:avLst/>
+            <a:off x="5257800" y="2130552"/>
+            <a:ext cx="1234440" cy="256032"/>
+          </a:xfrm>
+          <a:prstGeom prst="roundRect">
+            <a:avLst>
+              <a:gd name="adj" fmla="val 50000"/>
+            </a:avLst>
+          </a:prstGeom>
+          <a:solidFill>
+            <a:srgbClr val="F0E3C8"/>
+          </a:solidFill>
+          <a:ln/>
+        </p:spPr>
+      </p:sp>
+      <p:sp>
+        <p:nvSpPr>
+          <p:cNvPr id="8" name="Text 6"/>
+          <p:cNvSpPr txBox="1"/>
+          <p:nvPr/>
+        </p:nvSpPr>
+        <p:spPr>
+          <a:xfrm>
+            <a:off x="5257800" y="2130552"/>
+            <a:ext cx="1234440" cy="256032"/>
+          </a:xfrm>
+          <a:prstGeom prst="rect">
+            <a:avLst/>
+          </a:prstGeom>
+          <a:noFill/>
+          <a:ln/>
+        </p:spPr>
+        <p:txBody>
+          <a:bodyPr wrap="square" lIns="0" tIns="0" rIns="0" bIns="0" rtlCol="0" anchor="ctr"/>
+          <a:lstStyle/>
+          <a:p>
+            <a:pPr algn="ctr" indent="0" marL="0">
+              <a:buNone/>
+            </a:pPr>
+            <a:r>
+              <a:rPr lang="en-US" sz="1000" dirty="0">
+                <a:solidFill>
+                  <a:srgbClr val="7A5A1E"/>
+                </a:solidFill>
+                <a:latin typeface="Calibri" pitchFamily="34" charset="0"/>
+                <a:ea typeface="Calibri" pitchFamily="34" charset="-122"/>
+                <a:cs typeface="Calibri" pitchFamily="34" charset="-120"/>
+              </a:rPr>
+              <a:t>оценка ИИ</a:t>
+            </a:r>
+            <a:endParaRPr lang="en-US" sz="1000" dirty="0"/>
+          </a:p>
+        </p:txBody>
+      </p:sp>
+      <p:sp>
+        <p:nvSpPr>
+          <p:cNvPr id="9" name="Text 7"/>
+          <p:cNvSpPr txBox="1"/>
+          <p:nvPr/>
+        </p:nvSpPr>
+        <p:spPr>
+          <a:xfrm>
+            <a:off x="868680" y="2514600"/>
+            <a:ext cx="1463040" cy="228600"/>
+          </a:xfrm>
+          <a:prstGeom prst="rect">
+            <a:avLst/>
+          </a:prstGeom>
+          <a:noFill/>
+          <a:ln/>
+        </p:spPr>
+        <p:txBody>
+          <a:bodyPr wrap="square" lIns="0" tIns="0" rIns="0" bIns="0" rtlCol="0" anchor="ctr"/>
+          <a:lstStyle/>
+          <a:p>
+            <a:pPr indent="0" marL="0">
+              <a:buNone/>
+            </a:pPr>
+            <a:r>
+              <a:rPr lang="en-US" sz="1050" dirty="0">
+                <a:solidFill>
+                  <a:srgbClr val="6D6555"/>
+                </a:solidFill>
+                <a:latin typeface="Calibri" pitchFamily="34" charset="0"/>
+                <a:ea typeface="Calibri" pitchFamily="34" charset="-122"/>
+                <a:cs typeface="Calibri" pitchFamily="34" charset="-120"/>
+              </a:rPr>
+              <a:t>Популярность</a:t>
+            </a:r>
+            <a:endParaRPr lang="en-US" sz="1050" dirty="0"/>
+          </a:p>
+        </p:txBody>
+      </p:sp>
+      <p:sp>
+        <p:nvSpPr>
+          <p:cNvPr id="10" name="Text 8"/>
+          <p:cNvSpPr txBox="1"/>
+          <p:nvPr/>
+        </p:nvSpPr>
+        <p:spPr>
+          <a:xfrm>
+            <a:off x="2148840" y="2514600"/>
+            <a:ext cx="1280160" cy="228600"/>
+          </a:xfrm>
+          <a:prstGeom prst="rect">
+            <a:avLst/>
+          </a:prstGeom>
+          <a:noFill/>
+          <a:ln/>
+        </p:spPr>
+        <p:txBody>
+          <a:bodyPr wrap="square" lIns="0" tIns="0" rIns="0" bIns="0" rtlCol="0" anchor="ctr"/>
+          <a:lstStyle/>
+          <a:p>
+            <a:pPr algn="r" indent="0" marL="0">
+              <a:buNone/>
+            </a:pPr>
+            <a:r>
+              <a:rPr lang="en-US" sz="1050" b="1" dirty="0">
+                <a:solidFill>
+                  <a:srgbClr val="1F4A3D"/>
+                </a:solidFill>
+                <a:latin typeface="Calibri" pitchFamily="34" charset="0"/>
+                <a:ea typeface="Calibri" pitchFamily="34" charset="-122"/>
+                <a:cs typeface="Calibri" pitchFamily="34" charset="-120"/>
+              </a:rPr>
+              <a:t>высокая</a:t>
+            </a:r>
+            <a:endParaRPr lang="en-US" sz="1050" dirty="0"/>
+          </a:p>
+        </p:txBody>
+      </p:sp>
+      <p:sp>
+        <p:nvSpPr>
+          <p:cNvPr id="11" name="Shape 9"/>
+          <p:cNvSpPr/>
+          <p:nvPr/>
+        </p:nvSpPr>
+        <p:spPr>
+          <a:xfrm>
+            <a:off x="868680" y="2798064"/>
+            <a:ext cx="822960" cy="91440"/>
+          </a:xfrm>
+          <a:prstGeom prst="roundRect">
+            <a:avLst>
+              <a:gd name="adj" fmla="val 50000"/>
+            </a:avLst>
           </a:prstGeom>
           <a:solidFill>
             <a:srgbClr val="1F4A3D"/>
@@ -7015,135 +8753,206 @@
       </p:sp>
       <p:sp>
         <p:nvSpPr>
-          <p:cNvPr id="6" name="Text 4"/>
-          <p:cNvSpPr txBox="1"/>
-          <p:nvPr/>
-        </p:nvSpPr>
-        <p:spPr>
-          <a:xfrm>
-            <a:off x="914400" y="2075688"/>
-            <a:ext cx="548640" cy="548640"/>
-          </a:xfrm>
-          <a:prstGeom prst="rect">
-            <a:avLst/>
-          </a:prstGeom>
-          <a:noFill/>
-          <a:ln/>
-        </p:spPr>
-        <p:txBody>
-          <a:bodyPr wrap="square" lIns="0" tIns="0" rIns="0" bIns="0" rtlCol="0" anchor="ctr"/>
-          <a:lstStyle/>
-          <a:p>
-            <a:pPr algn="ctr" indent="0" marL="0">
-              <a:buNone/>
-            </a:pPr>
-            <a:r>
-              <a:rPr lang="en-US" sz="1600" b="1" dirty="0">
-                <a:solidFill>
-                  <a:srgbClr val="F0E3C8"/>
-                </a:solidFill>
-                <a:latin typeface="Cambria" pitchFamily="34" charset="0"/>
-                <a:ea typeface="Cambria" pitchFamily="34" charset="-122"/>
-                <a:cs typeface="Cambria" pitchFamily="34" charset="-120"/>
-              </a:rPr>
-              <a:t>1</a:t>
-            </a:r>
-            <a:endParaRPr lang="en-US" sz="1600" dirty="0"/>
-          </a:p>
-        </p:txBody>
-      </p:sp>
-      <p:sp>
-        <p:nvSpPr>
-          <p:cNvPr id="7" name="Text 5"/>
-          <p:cNvSpPr txBox="1"/>
-          <p:nvPr/>
-        </p:nvSpPr>
-        <p:spPr>
-          <a:xfrm>
-            <a:off x="1691640" y="1965960"/>
-            <a:ext cx="4023360" cy="365760"/>
-          </a:xfrm>
-          <a:prstGeom prst="rect">
-            <a:avLst/>
-          </a:prstGeom>
-          <a:noFill/>
-          <a:ln/>
-        </p:spPr>
-        <p:txBody>
-          <a:bodyPr wrap="square" lIns="0" tIns="0" rIns="0" bIns="0" rtlCol="0" anchor="ctr"/>
-          <a:lstStyle/>
-          <a:p>
-            <a:pPr indent="0" marL="0">
-              <a:buNone/>
-            </a:pPr>
-            <a:r>
-              <a:rPr lang="en-US" sz="1800" b="1" dirty="0">
-                <a:solidFill>
-                  <a:srgbClr val="1F4A3D"/>
-                </a:solidFill>
-                <a:latin typeface="Cambria" pitchFamily="34" charset="0"/>
-                <a:ea typeface="Cambria" pitchFamily="34" charset="-122"/>
-                <a:cs typeface="Cambria" pitchFamily="34" charset="-120"/>
-              </a:rPr>
-              <a:t>Frontend</a:t>
-            </a:r>
-            <a:endParaRPr lang="en-US" sz="1800" dirty="0"/>
-          </a:p>
-        </p:txBody>
-      </p:sp>
-      <p:sp>
-        <p:nvSpPr>
-          <p:cNvPr id="8" name="Text 6"/>
-          <p:cNvSpPr txBox="1"/>
-          <p:nvPr/>
-        </p:nvSpPr>
-        <p:spPr>
-          <a:xfrm>
-            <a:off x="1691640" y="2377440"/>
-            <a:ext cx="4023360" cy="457200"/>
-          </a:xfrm>
-          <a:prstGeom prst="rect">
-            <a:avLst/>
-          </a:prstGeom>
-          <a:noFill/>
-          <a:ln/>
-        </p:spPr>
-        <p:txBody>
-          <a:bodyPr wrap="square" lIns="0" tIns="0" rIns="0" bIns="0" rtlCol="0" anchor="t"/>
-          <a:lstStyle/>
-          <a:p>
-            <a:pPr indent="0" marL="0">
-              <a:buNone/>
-            </a:pPr>
-            <a:r>
-              <a:rPr lang="en-US" sz="1400" dirty="0">
-                <a:solidFill>
-                  <a:srgbClr val="6D6555"/>
-                </a:solidFill>
-                <a:latin typeface="Calibri" pitchFamily="34" charset="0"/>
-                <a:ea typeface="Calibri" pitchFamily="34" charset="-122"/>
-                <a:cs typeface="Calibri" pitchFamily="34" charset="-120"/>
-              </a:rPr>
-              <a:t>Next.js 16 · React 19 · Tailwind CSS 4</a:t>
-            </a:r>
-            <a:endParaRPr lang="en-US" sz="1400" dirty="0"/>
-          </a:p>
-        </p:txBody>
-      </p:sp>
-      <p:sp>
-        <p:nvSpPr>
-          <p:cNvPr id="9" name="Shape 7"/>
+          <p:cNvPr id="12" name="Shape 10"/>
           <p:cNvSpPr/>
           <p:nvPr/>
         </p:nvSpPr>
         <p:spPr>
           <a:xfrm>
-            <a:off x="6217920" y="1783080"/>
-            <a:ext cx="5303520" cy="1143000"/>
+            <a:off x="1746504" y="2798064"/>
+            <a:ext cx="822960" cy="91440"/>
           </a:xfrm>
           <a:prstGeom prst="roundRect">
             <a:avLst>
-              <a:gd name="adj" fmla="val 8000"/>
+              <a:gd name="adj" fmla="val 50000"/>
+            </a:avLst>
+          </a:prstGeom>
+          <a:solidFill>
+            <a:srgbClr val="1F4A3D"/>
+          </a:solidFill>
+          <a:ln/>
+        </p:spPr>
+      </p:sp>
+      <p:sp>
+        <p:nvSpPr>
+          <p:cNvPr id="13" name="Shape 11"/>
+          <p:cNvSpPr/>
+          <p:nvPr/>
+        </p:nvSpPr>
+        <p:spPr>
+          <a:xfrm>
+            <a:off x="2624328" y="2798064"/>
+            <a:ext cx="822960" cy="91440"/>
+          </a:xfrm>
+          <a:prstGeom prst="roundRect">
+            <a:avLst>
+              <a:gd name="adj" fmla="val 50000"/>
+            </a:avLst>
+          </a:prstGeom>
+          <a:solidFill>
+            <a:srgbClr val="1F4A3D"/>
+          </a:solidFill>
+          <a:ln/>
+        </p:spPr>
+      </p:sp>
+      <p:sp>
+        <p:nvSpPr>
+          <p:cNvPr id="14" name="Text 12"/>
+          <p:cNvSpPr txBox="1"/>
+          <p:nvPr/>
+        </p:nvSpPr>
+        <p:spPr>
+          <a:xfrm>
+            <a:off x="3794760" y="2514600"/>
+            <a:ext cx="1463040" cy="228600"/>
+          </a:xfrm>
+          <a:prstGeom prst="rect">
+            <a:avLst/>
+          </a:prstGeom>
+          <a:noFill/>
+          <a:ln/>
+        </p:spPr>
+        <p:txBody>
+          <a:bodyPr wrap="square" lIns="0" tIns="0" rIns="0" bIns="0" rtlCol="0" anchor="ctr"/>
+          <a:lstStyle/>
+          <a:p>
+            <a:pPr indent="0" marL="0">
+              <a:buNone/>
+            </a:pPr>
+            <a:r>
+              <a:rPr lang="en-US" sz="1050" dirty="0">
+                <a:solidFill>
+                  <a:srgbClr val="6D6555"/>
+                </a:solidFill>
+                <a:latin typeface="Calibri" pitchFamily="34" charset="0"/>
+                <a:ea typeface="Calibri" pitchFamily="34" charset="-122"/>
+                <a:cs typeface="Calibri" pitchFamily="34" charset="-120"/>
+              </a:rPr>
+              <a:t>Загруженность</a:t>
+            </a:r>
+            <a:endParaRPr lang="en-US" sz="1050" dirty="0"/>
+          </a:p>
+        </p:txBody>
+      </p:sp>
+      <p:sp>
+        <p:nvSpPr>
+          <p:cNvPr id="15" name="Text 13"/>
+          <p:cNvSpPr txBox="1"/>
+          <p:nvPr/>
+        </p:nvSpPr>
+        <p:spPr>
+          <a:xfrm>
+            <a:off x="5074920" y="2514600"/>
+            <a:ext cx="1280160" cy="228600"/>
+          </a:xfrm>
+          <a:prstGeom prst="rect">
+            <a:avLst/>
+          </a:prstGeom>
+          <a:noFill/>
+          <a:ln/>
+        </p:spPr>
+        <p:txBody>
+          <a:bodyPr wrap="square" lIns="0" tIns="0" rIns="0" bIns="0" rtlCol="0" anchor="ctr"/>
+          <a:lstStyle/>
+          <a:p>
+            <a:pPr algn="r" indent="0" marL="0">
+              <a:buNone/>
+            </a:pPr>
+            <a:r>
+              <a:rPr lang="en-US" sz="1050" b="1" dirty="0">
+                <a:solidFill>
+                  <a:srgbClr val="1F4A3D"/>
+                </a:solidFill>
+                <a:latin typeface="Calibri" pitchFamily="34" charset="0"/>
+                <a:ea typeface="Calibri" pitchFamily="34" charset="-122"/>
+                <a:cs typeface="Calibri" pitchFamily="34" charset="-120"/>
+              </a:rPr>
+              <a:t>высокая</a:t>
+            </a:r>
+            <a:endParaRPr lang="en-US" sz="1050" dirty="0"/>
+          </a:p>
+        </p:txBody>
+      </p:sp>
+      <p:sp>
+        <p:nvSpPr>
+          <p:cNvPr id="16" name="Shape 14"/>
+          <p:cNvSpPr/>
+          <p:nvPr/>
+        </p:nvSpPr>
+        <p:spPr>
+          <a:xfrm>
+            <a:off x="3794760" y="2798064"/>
+            <a:ext cx="822960" cy="91440"/>
+          </a:xfrm>
+          <a:prstGeom prst="roundRect">
+            <a:avLst>
+              <a:gd name="adj" fmla="val 50000"/>
+            </a:avLst>
+          </a:prstGeom>
+          <a:solidFill>
+            <a:srgbClr val="1F4A3D"/>
+          </a:solidFill>
+          <a:ln/>
+        </p:spPr>
+      </p:sp>
+      <p:sp>
+        <p:nvSpPr>
+          <p:cNvPr id="17" name="Shape 15"/>
+          <p:cNvSpPr/>
+          <p:nvPr/>
+        </p:nvSpPr>
+        <p:spPr>
+          <a:xfrm>
+            <a:off x="4672584" y="2798064"/>
+            <a:ext cx="822960" cy="91440"/>
+          </a:xfrm>
+          <a:prstGeom prst="roundRect">
+            <a:avLst>
+              <a:gd name="adj" fmla="val 50000"/>
+            </a:avLst>
+          </a:prstGeom>
+          <a:solidFill>
+            <a:srgbClr val="1F4A3D"/>
+          </a:solidFill>
+          <a:ln/>
+        </p:spPr>
+      </p:sp>
+      <p:sp>
+        <p:nvSpPr>
+          <p:cNvPr id="18" name="Shape 16"/>
+          <p:cNvSpPr/>
+          <p:nvPr/>
+        </p:nvSpPr>
+        <p:spPr>
+          <a:xfrm>
+            <a:off x="5550408" y="2798064"/>
+            <a:ext cx="822960" cy="91440"/>
+          </a:xfrm>
+          <a:prstGeom prst="roundRect">
+            <a:avLst>
+              <a:gd name="adj" fmla="val 50000"/>
+            </a:avLst>
+          </a:prstGeom>
+          <a:solidFill>
+            <a:srgbClr val="1F4A3D"/>
+          </a:solidFill>
+          <a:ln/>
+        </p:spPr>
+      </p:sp>
+      <p:sp>
+        <p:nvSpPr>
+          <p:cNvPr id="19" name="Shape 17"/>
+          <p:cNvSpPr/>
+          <p:nvPr/>
+        </p:nvSpPr>
+        <p:spPr>
+          <a:xfrm>
+            <a:off x="640080" y="3200400"/>
+            <a:ext cx="6035040" cy="1051560"/>
+          </a:xfrm>
+          <a:prstGeom prst="roundRect">
+            <a:avLst>
+              <a:gd name="adj" fmla="val 8696"/>
             </a:avLst>
           </a:prstGeom>
           <a:solidFill>
@@ -7159,17 +8968,197 @@
       </p:sp>
       <p:sp>
         <p:nvSpPr>
-          <p:cNvPr id="10" name="Shape 8"/>
+          <p:cNvPr id="20" name="Text 18"/>
+          <p:cNvSpPr txBox="1"/>
+          <p:nvPr/>
+        </p:nvSpPr>
+        <p:spPr>
+          <a:xfrm>
+            <a:off x="868680" y="3291840"/>
+            <a:ext cx="4206240" cy="329184"/>
+          </a:xfrm>
+          <a:prstGeom prst="rect">
+            <a:avLst/>
+          </a:prstGeom>
+          <a:noFill/>
+          <a:ln/>
+        </p:spPr>
+        <p:txBody>
+          <a:bodyPr wrap="square" lIns="0" tIns="0" rIns="0" bIns="0" rtlCol="0" anchor="ctr"/>
+          <a:lstStyle/>
+          <a:p>
+            <a:pPr indent="0" marL="0">
+              <a:buNone/>
+            </a:pPr>
+            <a:r>
+              <a:rPr lang="en-US" sz="1400" b="1" dirty="0">
+                <a:solidFill>
+                  <a:srgbClr val="1F4A3D"/>
+                </a:solidFill>
+                <a:latin typeface="Cambria" pitchFamily="34" charset="0"/>
+                <a:ea typeface="Cambria" pitchFamily="34" charset="-122"/>
+                <a:cs typeface="Cambria" pitchFamily="34" charset="-120"/>
+              </a:rPr>
+              <a:t>School of Sciences and Humanities</a:t>
+            </a:r>
+            <a:endParaRPr lang="en-US" sz="1400" dirty="0"/>
+          </a:p>
+        </p:txBody>
+      </p:sp>
+      <p:sp>
+        <p:nvSpPr>
+          <p:cNvPr id="21" name="Shape 19"/>
           <p:cNvSpPr/>
           <p:nvPr/>
         </p:nvSpPr>
         <p:spPr>
           <a:xfrm>
-            <a:off x="6492240" y="2075688"/>
-            <a:ext cx="548640" cy="548640"/>
-          </a:xfrm>
-          <a:prstGeom prst="ellipse">
-            <a:avLst/>
+            <a:off x="5257800" y="3319272"/>
+            <a:ext cx="1234440" cy="256032"/>
+          </a:xfrm>
+          <a:prstGeom prst="roundRect">
+            <a:avLst>
+              <a:gd name="adj" fmla="val 50000"/>
+            </a:avLst>
+          </a:prstGeom>
+          <a:solidFill>
+            <a:srgbClr val="F0E3C8"/>
+          </a:solidFill>
+          <a:ln/>
+        </p:spPr>
+      </p:sp>
+      <p:sp>
+        <p:nvSpPr>
+          <p:cNvPr id="22" name="Text 20"/>
+          <p:cNvSpPr txBox="1"/>
+          <p:nvPr/>
+        </p:nvSpPr>
+        <p:spPr>
+          <a:xfrm>
+            <a:off x="5257800" y="3319272"/>
+            <a:ext cx="1234440" cy="256032"/>
+          </a:xfrm>
+          <a:prstGeom prst="rect">
+            <a:avLst/>
+          </a:prstGeom>
+          <a:noFill/>
+          <a:ln/>
+        </p:spPr>
+        <p:txBody>
+          <a:bodyPr wrap="square" lIns="0" tIns="0" rIns="0" bIns="0" rtlCol="0" anchor="ctr"/>
+          <a:lstStyle/>
+          <a:p>
+            <a:pPr algn="ctr" indent="0" marL="0">
+              <a:buNone/>
+            </a:pPr>
+            <a:r>
+              <a:rPr lang="en-US" sz="1000" dirty="0">
+                <a:solidFill>
+                  <a:srgbClr val="7A5A1E"/>
+                </a:solidFill>
+                <a:latin typeface="Calibri" pitchFamily="34" charset="0"/>
+                <a:ea typeface="Calibri" pitchFamily="34" charset="-122"/>
+                <a:cs typeface="Calibri" pitchFamily="34" charset="-120"/>
+              </a:rPr>
+              <a:t>оценка ИИ</a:t>
+            </a:r>
+            <a:endParaRPr lang="en-US" sz="1000" dirty="0"/>
+          </a:p>
+        </p:txBody>
+      </p:sp>
+      <p:sp>
+        <p:nvSpPr>
+          <p:cNvPr id="23" name="Text 21"/>
+          <p:cNvSpPr txBox="1"/>
+          <p:nvPr/>
+        </p:nvSpPr>
+        <p:spPr>
+          <a:xfrm>
+            <a:off x="868680" y="3703320"/>
+            <a:ext cx="1463040" cy="228600"/>
+          </a:xfrm>
+          <a:prstGeom prst="rect">
+            <a:avLst/>
+          </a:prstGeom>
+          <a:noFill/>
+          <a:ln/>
+        </p:spPr>
+        <p:txBody>
+          <a:bodyPr wrap="square" lIns="0" tIns="0" rIns="0" bIns="0" rtlCol="0" anchor="ctr"/>
+          <a:lstStyle/>
+          <a:p>
+            <a:pPr indent="0" marL="0">
+              <a:buNone/>
+            </a:pPr>
+            <a:r>
+              <a:rPr lang="en-US" sz="1050" dirty="0">
+                <a:solidFill>
+                  <a:srgbClr val="6D6555"/>
+                </a:solidFill>
+                <a:latin typeface="Calibri" pitchFamily="34" charset="0"/>
+                <a:ea typeface="Calibri" pitchFamily="34" charset="-122"/>
+                <a:cs typeface="Calibri" pitchFamily="34" charset="-120"/>
+              </a:rPr>
+              <a:t>Популярность</a:t>
+            </a:r>
+            <a:endParaRPr lang="en-US" sz="1050" dirty="0"/>
+          </a:p>
+        </p:txBody>
+      </p:sp>
+      <p:sp>
+        <p:nvSpPr>
+          <p:cNvPr id="24" name="Text 22"/>
+          <p:cNvSpPr txBox="1"/>
+          <p:nvPr/>
+        </p:nvSpPr>
+        <p:spPr>
+          <a:xfrm>
+            <a:off x="2148840" y="3703320"/>
+            <a:ext cx="1280160" cy="228600"/>
+          </a:xfrm>
+          <a:prstGeom prst="rect">
+            <a:avLst/>
+          </a:prstGeom>
+          <a:noFill/>
+          <a:ln/>
+        </p:spPr>
+        <p:txBody>
+          <a:bodyPr wrap="square" lIns="0" tIns="0" rIns="0" bIns="0" rtlCol="0" anchor="ctr"/>
+          <a:lstStyle/>
+          <a:p>
+            <a:pPr algn="r" indent="0" marL="0">
+              <a:buNone/>
+            </a:pPr>
+            <a:r>
+              <a:rPr lang="en-US" sz="1050" b="1" dirty="0">
+                <a:solidFill>
+                  <a:srgbClr val="1F4A3D"/>
+                </a:solidFill>
+                <a:latin typeface="Calibri" pitchFamily="34" charset="0"/>
+                <a:ea typeface="Calibri" pitchFamily="34" charset="-122"/>
+                <a:cs typeface="Calibri" pitchFamily="34" charset="-120"/>
+              </a:rPr>
+              <a:t>высокая</a:t>
+            </a:r>
+            <a:endParaRPr lang="en-US" sz="1050" dirty="0"/>
+          </a:p>
+        </p:txBody>
+      </p:sp>
+      <p:sp>
+        <p:nvSpPr>
+          <p:cNvPr id="25" name="Shape 23"/>
+          <p:cNvSpPr/>
+          <p:nvPr/>
+        </p:nvSpPr>
+        <p:spPr>
+          <a:xfrm>
+            <a:off x="868680" y="3986784"/>
+            <a:ext cx="822960" cy="91440"/>
+          </a:xfrm>
+          <a:prstGeom prst="roundRect">
+            <a:avLst>
+              <a:gd name="adj" fmla="val 50000"/>
+            </a:avLst>
           </a:prstGeom>
           <a:solidFill>
             <a:srgbClr val="1F4A3D"/>
@@ -7179,135 +9168,206 @@
       </p:sp>
       <p:sp>
         <p:nvSpPr>
-          <p:cNvPr id="11" name="Text 9"/>
-          <p:cNvSpPr txBox="1"/>
-          <p:nvPr/>
-        </p:nvSpPr>
-        <p:spPr>
-          <a:xfrm>
-            <a:off x="6492240" y="2075688"/>
-            <a:ext cx="548640" cy="548640"/>
-          </a:xfrm>
-          <a:prstGeom prst="rect">
-            <a:avLst/>
-          </a:prstGeom>
-          <a:noFill/>
-          <a:ln/>
-        </p:spPr>
-        <p:txBody>
-          <a:bodyPr wrap="square" lIns="0" tIns="0" rIns="0" bIns="0" rtlCol="0" anchor="ctr"/>
-          <a:lstStyle/>
-          <a:p>
-            <a:pPr algn="ctr" indent="0" marL="0">
-              <a:buNone/>
-            </a:pPr>
-            <a:r>
-              <a:rPr lang="en-US" sz="1600" b="1" dirty="0">
-                <a:solidFill>
-                  <a:srgbClr val="F0E3C8"/>
-                </a:solidFill>
-                <a:latin typeface="Cambria" pitchFamily="34" charset="0"/>
-                <a:ea typeface="Cambria" pitchFamily="34" charset="-122"/>
-                <a:cs typeface="Cambria" pitchFamily="34" charset="-120"/>
-              </a:rPr>
-              <a:t>2</a:t>
-            </a:r>
-            <a:endParaRPr lang="en-US" sz="1600" dirty="0"/>
-          </a:p>
-        </p:txBody>
-      </p:sp>
-      <p:sp>
-        <p:nvSpPr>
-          <p:cNvPr id="12" name="Text 10"/>
-          <p:cNvSpPr txBox="1"/>
-          <p:nvPr/>
-        </p:nvSpPr>
-        <p:spPr>
-          <a:xfrm>
-            <a:off x="7269480" y="1965960"/>
-            <a:ext cx="4023360" cy="365760"/>
-          </a:xfrm>
-          <a:prstGeom prst="rect">
-            <a:avLst/>
-          </a:prstGeom>
-          <a:noFill/>
-          <a:ln/>
-        </p:spPr>
-        <p:txBody>
-          <a:bodyPr wrap="square" lIns="0" tIns="0" rIns="0" bIns="0" rtlCol="0" anchor="ctr"/>
-          <a:lstStyle/>
-          <a:p>
-            <a:pPr indent="0" marL="0">
-              <a:buNone/>
-            </a:pPr>
-            <a:r>
-              <a:rPr lang="en-US" sz="1800" b="1" dirty="0">
-                <a:solidFill>
-                  <a:srgbClr val="1F4A3D"/>
-                </a:solidFill>
-                <a:latin typeface="Cambria" pitchFamily="34" charset="0"/>
-                <a:ea typeface="Cambria" pitchFamily="34" charset="-122"/>
-                <a:cs typeface="Cambria" pitchFamily="34" charset="-120"/>
-              </a:rPr>
-              <a:t>Backend</a:t>
-            </a:r>
-            <a:endParaRPr lang="en-US" sz="1800" dirty="0"/>
-          </a:p>
-        </p:txBody>
-      </p:sp>
-      <p:sp>
-        <p:nvSpPr>
-          <p:cNvPr id="13" name="Text 11"/>
-          <p:cNvSpPr txBox="1"/>
-          <p:nvPr/>
-        </p:nvSpPr>
-        <p:spPr>
-          <a:xfrm>
-            <a:off x="7269480" y="2377440"/>
-            <a:ext cx="4023360" cy="457200"/>
-          </a:xfrm>
-          <a:prstGeom prst="rect">
-            <a:avLst/>
-          </a:prstGeom>
-          <a:noFill/>
-          <a:ln/>
-        </p:spPr>
-        <p:txBody>
-          <a:bodyPr wrap="square" lIns="0" tIns="0" rIns="0" bIns="0" rtlCol="0" anchor="t"/>
-          <a:lstStyle/>
-          <a:p>
-            <a:pPr indent="0" marL="0">
-              <a:buNone/>
-            </a:pPr>
-            <a:r>
-              <a:rPr lang="en-US" sz="1400" dirty="0">
-                <a:solidFill>
-                  <a:srgbClr val="6D6555"/>
-                </a:solidFill>
-                <a:latin typeface="Calibri" pitchFamily="34" charset="0"/>
-                <a:ea typeface="Calibri" pitchFamily="34" charset="-122"/>
-                <a:cs typeface="Calibri" pitchFamily="34" charset="-120"/>
-              </a:rPr>
-              <a:t>Next.js Route Handlers, serverless на Vercel</a:t>
-            </a:r>
-            <a:endParaRPr lang="en-US" sz="1400" dirty="0"/>
-          </a:p>
-        </p:txBody>
-      </p:sp>
-      <p:sp>
-        <p:nvSpPr>
-          <p:cNvPr id="14" name="Shape 12"/>
+          <p:cNvPr id="26" name="Shape 24"/>
           <p:cNvSpPr/>
           <p:nvPr/>
         </p:nvSpPr>
         <p:spPr>
           <a:xfrm>
-            <a:off x="640080" y="3154680"/>
-            <a:ext cx="5303520" cy="1143000"/>
+            <a:off x="1746504" y="3986784"/>
+            <a:ext cx="822960" cy="91440"/>
           </a:xfrm>
           <a:prstGeom prst="roundRect">
             <a:avLst>
-              <a:gd name="adj" fmla="val 8000"/>
+              <a:gd name="adj" fmla="val 50000"/>
+            </a:avLst>
+          </a:prstGeom>
+          <a:solidFill>
+            <a:srgbClr val="1F4A3D"/>
+          </a:solidFill>
+          <a:ln/>
+        </p:spPr>
+      </p:sp>
+      <p:sp>
+        <p:nvSpPr>
+          <p:cNvPr id="27" name="Shape 25"/>
+          <p:cNvSpPr/>
+          <p:nvPr/>
+        </p:nvSpPr>
+        <p:spPr>
+          <a:xfrm>
+            <a:off x="2624328" y="3986784"/>
+            <a:ext cx="822960" cy="91440"/>
+          </a:xfrm>
+          <a:prstGeom prst="roundRect">
+            <a:avLst>
+              <a:gd name="adj" fmla="val 50000"/>
+            </a:avLst>
+          </a:prstGeom>
+          <a:solidFill>
+            <a:srgbClr val="1F4A3D"/>
+          </a:solidFill>
+          <a:ln/>
+        </p:spPr>
+      </p:sp>
+      <p:sp>
+        <p:nvSpPr>
+          <p:cNvPr id="28" name="Text 26"/>
+          <p:cNvSpPr txBox="1"/>
+          <p:nvPr/>
+        </p:nvSpPr>
+        <p:spPr>
+          <a:xfrm>
+            <a:off x="3794760" y="3703320"/>
+            <a:ext cx="1463040" cy="228600"/>
+          </a:xfrm>
+          <a:prstGeom prst="rect">
+            <a:avLst/>
+          </a:prstGeom>
+          <a:noFill/>
+          <a:ln/>
+        </p:spPr>
+        <p:txBody>
+          <a:bodyPr wrap="square" lIns="0" tIns="0" rIns="0" bIns="0" rtlCol="0" anchor="ctr"/>
+          <a:lstStyle/>
+          <a:p>
+            <a:pPr indent="0" marL="0">
+              <a:buNone/>
+            </a:pPr>
+            <a:r>
+              <a:rPr lang="en-US" sz="1050" dirty="0">
+                <a:solidFill>
+                  <a:srgbClr val="6D6555"/>
+                </a:solidFill>
+                <a:latin typeface="Calibri" pitchFamily="34" charset="0"/>
+                <a:ea typeface="Calibri" pitchFamily="34" charset="-122"/>
+                <a:cs typeface="Calibri" pitchFamily="34" charset="-120"/>
+              </a:rPr>
+              <a:t>Загруженность</a:t>
+            </a:r>
+            <a:endParaRPr lang="en-US" sz="1050" dirty="0"/>
+          </a:p>
+        </p:txBody>
+      </p:sp>
+      <p:sp>
+        <p:nvSpPr>
+          <p:cNvPr id="29" name="Text 27"/>
+          <p:cNvSpPr txBox="1"/>
+          <p:nvPr/>
+        </p:nvSpPr>
+        <p:spPr>
+          <a:xfrm>
+            <a:off x="5074920" y="3703320"/>
+            <a:ext cx="1280160" cy="228600"/>
+          </a:xfrm>
+          <a:prstGeom prst="rect">
+            <a:avLst/>
+          </a:prstGeom>
+          <a:noFill/>
+          <a:ln/>
+        </p:spPr>
+        <p:txBody>
+          <a:bodyPr wrap="square" lIns="0" tIns="0" rIns="0" bIns="0" rtlCol="0" anchor="ctr"/>
+          <a:lstStyle/>
+          <a:p>
+            <a:pPr algn="r" indent="0" marL="0">
+              <a:buNone/>
+            </a:pPr>
+            <a:r>
+              <a:rPr lang="en-US" sz="1050" b="1" dirty="0">
+                <a:solidFill>
+                  <a:srgbClr val="1F4A3D"/>
+                </a:solidFill>
+                <a:latin typeface="Calibri" pitchFamily="34" charset="0"/>
+                <a:ea typeface="Calibri" pitchFamily="34" charset="-122"/>
+                <a:cs typeface="Calibri" pitchFamily="34" charset="-120"/>
+              </a:rPr>
+              <a:t>средняя</a:t>
+            </a:r>
+            <a:endParaRPr lang="en-US" sz="1050" dirty="0"/>
+          </a:p>
+        </p:txBody>
+      </p:sp>
+      <p:sp>
+        <p:nvSpPr>
+          <p:cNvPr id="30" name="Shape 28"/>
+          <p:cNvSpPr/>
+          <p:nvPr/>
+        </p:nvSpPr>
+        <p:spPr>
+          <a:xfrm>
+            <a:off x="3794760" y="3986784"/>
+            <a:ext cx="822960" cy="91440"/>
+          </a:xfrm>
+          <a:prstGeom prst="roundRect">
+            <a:avLst>
+              <a:gd name="adj" fmla="val 50000"/>
+            </a:avLst>
+          </a:prstGeom>
+          <a:solidFill>
+            <a:srgbClr val="1F4A3D"/>
+          </a:solidFill>
+          <a:ln/>
+        </p:spPr>
+      </p:sp>
+      <p:sp>
+        <p:nvSpPr>
+          <p:cNvPr id="31" name="Shape 29"/>
+          <p:cNvSpPr/>
+          <p:nvPr/>
+        </p:nvSpPr>
+        <p:spPr>
+          <a:xfrm>
+            <a:off x="4672584" y="3986784"/>
+            <a:ext cx="822960" cy="91440"/>
+          </a:xfrm>
+          <a:prstGeom prst="roundRect">
+            <a:avLst>
+              <a:gd name="adj" fmla="val 50000"/>
+            </a:avLst>
+          </a:prstGeom>
+          <a:solidFill>
+            <a:srgbClr val="1F4A3D"/>
+          </a:solidFill>
+          <a:ln/>
+        </p:spPr>
+      </p:sp>
+      <p:sp>
+        <p:nvSpPr>
+          <p:cNvPr id="32" name="Shape 30"/>
+          <p:cNvSpPr/>
+          <p:nvPr/>
+        </p:nvSpPr>
+        <p:spPr>
+          <a:xfrm>
+            <a:off x="5550408" y="3986784"/>
+            <a:ext cx="822960" cy="91440"/>
+          </a:xfrm>
+          <a:prstGeom prst="roundRect">
+            <a:avLst>
+              <a:gd name="adj" fmla="val 50000"/>
+            </a:avLst>
+          </a:prstGeom>
+          <a:solidFill>
+            <a:srgbClr val="E3DAC6"/>
+          </a:solidFill>
+          <a:ln/>
+        </p:spPr>
+      </p:sp>
+      <p:sp>
+        <p:nvSpPr>
+          <p:cNvPr id="33" name="Shape 31"/>
+          <p:cNvSpPr/>
+          <p:nvPr/>
+        </p:nvSpPr>
+        <p:spPr>
+          <a:xfrm>
+            <a:off x="640080" y="4389120"/>
+            <a:ext cx="6035040" cy="1051560"/>
+          </a:xfrm>
+          <a:prstGeom prst="roundRect">
+            <a:avLst>
+              <a:gd name="adj" fmla="val 8696"/>
             </a:avLst>
           </a:prstGeom>
           <a:solidFill>
@@ -7323,17 +9383,197 @@
       </p:sp>
       <p:sp>
         <p:nvSpPr>
-          <p:cNvPr id="15" name="Shape 13"/>
+          <p:cNvPr id="34" name="Text 32"/>
+          <p:cNvSpPr txBox="1"/>
+          <p:nvPr/>
+        </p:nvSpPr>
+        <p:spPr>
+          <a:xfrm>
+            <a:off x="868680" y="4480560"/>
+            <a:ext cx="4206240" cy="329184"/>
+          </a:xfrm>
+          <a:prstGeom prst="rect">
+            <a:avLst/>
+          </a:prstGeom>
+          <a:noFill/>
+          <a:ln/>
+        </p:spPr>
+        <p:txBody>
+          <a:bodyPr wrap="square" lIns="0" tIns="0" rIns="0" bIns="0" rtlCol="0" anchor="ctr"/>
+          <a:lstStyle/>
+          <a:p>
+            <a:pPr indent="0" marL="0">
+              <a:buNone/>
+            </a:pPr>
+            <a:r>
+              <a:rPr lang="en-US" sz="1400" b="1" dirty="0">
+                <a:solidFill>
+                  <a:srgbClr val="1F4A3D"/>
+                </a:solidFill>
+                <a:latin typeface="Cambria" pitchFamily="34" charset="0"/>
+                <a:ea typeface="Cambria" pitchFamily="34" charset="-122"/>
+                <a:cs typeface="Cambria" pitchFamily="34" charset="-120"/>
+              </a:rPr>
+              <a:t>School of Mining and Geosciences</a:t>
+            </a:r>
+            <a:endParaRPr lang="en-US" sz="1400" dirty="0"/>
+          </a:p>
+        </p:txBody>
+      </p:sp>
+      <p:sp>
+        <p:nvSpPr>
+          <p:cNvPr id="35" name="Shape 33"/>
           <p:cNvSpPr/>
           <p:nvPr/>
         </p:nvSpPr>
         <p:spPr>
           <a:xfrm>
-            <a:off x="914400" y="3447288"/>
-            <a:ext cx="548640" cy="548640"/>
-          </a:xfrm>
-          <a:prstGeom prst="ellipse">
-            <a:avLst/>
+            <a:off x="5257800" y="4507992"/>
+            <a:ext cx="1234440" cy="256032"/>
+          </a:xfrm>
+          <a:prstGeom prst="roundRect">
+            <a:avLst>
+              <a:gd name="adj" fmla="val 50000"/>
+            </a:avLst>
+          </a:prstGeom>
+          <a:solidFill>
+            <a:srgbClr val="F0E3C8"/>
+          </a:solidFill>
+          <a:ln/>
+        </p:spPr>
+      </p:sp>
+      <p:sp>
+        <p:nvSpPr>
+          <p:cNvPr id="36" name="Text 34"/>
+          <p:cNvSpPr txBox="1"/>
+          <p:nvPr/>
+        </p:nvSpPr>
+        <p:spPr>
+          <a:xfrm>
+            <a:off x="5257800" y="4507992"/>
+            <a:ext cx="1234440" cy="256032"/>
+          </a:xfrm>
+          <a:prstGeom prst="rect">
+            <a:avLst/>
+          </a:prstGeom>
+          <a:noFill/>
+          <a:ln/>
+        </p:spPr>
+        <p:txBody>
+          <a:bodyPr wrap="square" lIns="0" tIns="0" rIns="0" bIns="0" rtlCol="0" anchor="ctr"/>
+          <a:lstStyle/>
+          <a:p>
+            <a:pPr algn="ctr" indent="0" marL="0">
+              <a:buNone/>
+            </a:pPr>
+            <a:r>
+              <a:rPr lang="en-US" sz="1000" dirty="0">
+                <a:solidFill>
+                  <a:srgbClr val="7A5A1E"/>
+                </a:solidFill>
+                <a:latin typeface="Calibri" pitchFamily="34" charset="0"/>
+                <a:ea typeface="Calibri" pitchFamily="34" charset="-122"/>
+                <a:cs typeface="Calibri" pitchFamily="34" charset="-120"/>
+              </a:rPr>
+              <a:t>оценка ИИ</a:t>
+            </a:r>
+            <a:endParaRPr lang="en-US" sz="1000" dirty="0"/>
+          </a:p>
+        </p:txBody>
+      </p:sp>
+      <p:sp>
+        <p:nvSpPr>
+          <p:cNvPr id="37" name="Text 35"/>
+          <p:cNvSpPr txBox="1"/>
+          <p:nvPr/>
+        </p:nvSpPr>
+        <p:spPr>
+          <a:xfrm>
+            <a:off x="868680" y="4892040"/>
+            <a:ext cx="1463040" cy="228600"/>
+          </a:xfrm>
+          <a:prstGeom prst="rect">
+            <a:avLst/>
+          </a:prstGeom>
+          <a:noFill/>
+          <a:ln/>
+        </p:spPr>
+        <p:txBody>
+          <a:bodyPr wrap="square" lIns="0" tIns="0" rIns="0" bIns="0" rtlCol="0" anchor="ctr"/>
+          <a:lstStyle/>
+          <a:p>
+            <a:pPr indent="0" marL="0">
+              <a:buNone/>
+            </a:pPr>
+            <a:r>
+              <a:rPr lang="en-US" sz="1050" dirty="0">
+                <a:solidFill>
+                  <a:srgbClr val="6D6555"/>
+                </a:solidFill>
+                <a:latin typeface="Calibri" pitchFamily="34" charset="0"/>
+                <a:ea typeface="Calibri" pitchFamily="34" charset="-122"/>
+                <a:cs typeface="Calibri" pitchFamily="34" charset="-120"/>
+              </a:rPr>
+              <a:t>Популярность</a:t>
+            </a:r>
+            <a:endParaRPr lang="en-US" sz="1050" dirty="0"/>
+          </a:p>
+        </p:txBody>
+      </p:sp>
+      <p:sp>
+        <p:nvSpPr>
+          <p:cNvPr id="38" name="Text 36"/>
+          <p:cNvSpPr txBox="1"/>
+          <p:nvPr/>
+        </p:nvSpPr>
+        <p:spPr>
+          <a:xfrm>
+            <a:off x="2148840" y="4892040"/>
+            <a:ext cx="1280160" cy="228600"/>
+          </a:xfrm>
+          <a:prstGeom prst="rect">
+            <a:avLst/>
+          </a:prstGeom>
+          <a:noFill/>
+          <a:ln/>
+        </p:spPr>
+        <p:txBody>
+          <a:bodyPr wrap="square" lIns="0" tIns="0" rIns="0" bIns="0" rtlCol="0" anchor="ctr"/>
+          <a:lstStyle/>
+          <a:p>
+            <a:pPr algn="r" indent="0" marL="0">
+              <a:buNone/>
+            </a:pPr>
+            <a:r>
+              <a:rPr lang="en-US" sz="1050" b="1" dirty="0">
+                <a:solidFill>
+                  <a:srgbClr val="1F4A3D"/>
+                </a:solidFill>
+                <a:latin typeface="Calibri" pitchFamily="34" charset="0"/>
+                <a:ea typeface="Calibri" pitchFamily="34" charset="-122"/>
+                <a:cs typeface="Calibri" pitchFamily="34" charset="-120"/>
+              </a:rPr>
+              <a:t>средняя</a:t>
+            </a:r>
+            <a:endParaRPr lang="en-US" sz="1050" dirty="0"/>
+          </a:p>
+        </p:txBody>
+      </p:sp>
+      <p:sp>
+        <p:nvSpPr>
+          <p:cNvPr id="39" name="Shape 37"/>
+          <p:cNvSpPr/>
+          <p:nvPr/>
+        </p:nvSpPr>
+        <p:spPr>
+          <a:xfrm>
+            <a:off x="868680" y="5175504"/>
+            <a:ext cx="822960" cy="91440"/>
+          </a:xfrm>
+          <a:prstGeom prst="roundRect">
+            <a:avLst>
+              <a:gd name="adj" fmla="val 50000"/>
+            </a:avLst>
           </a:prstGeom>
           <a:solidFill>
             <a:srgbClr val="1F4A3D"/>
@@ -7343,135 +9583,245 @@
       </p:sp>
       <p:sp>
         <p:nvSpPr>
-          <p:cNvPr id="16" name="Text 14"/>
-          <p:cNvSpPr txBox="1"/>
-          <p:nvPr/>
-        </p:nvSpPr>
-        <p:spPr>
-          <a:xfrm>
-            <a:off x="914400" y="3447288"/>
-            <a:ext cx="548640" cy="548640"/>
-          </a:xfrm>
-          <a:prstGeom prst="rect">
-            <a:avLst/>
-          </a:prstGeom>
-          <a:noFill/>
-          <a:ln/>
-        </p:spPr>
-        <p:txBody>
-          <a:bodyPr wrap="square" lIns="0" tIns="0" rIns="0" bIns="0" rtlCol="0" anchor="ctr"/>
-          <a:lstStyle/>
-          <a:p>
-            <a:pPr algn="ctr" indent="0" marL="0">
-              <a:buNone/>
-            </a:pPr>
-            <a:r>
-              <a:rPr lang="en-US" sz="1600" b="1" dirty="0">
-                <a:solidFill>
-                  <a:srgbClr val="F0E3C8"/>
-                </a:solidFill>
-                <a:latin typeface="Cambria" pitchFamily="34" charset="0"/>
-                <a:ea typeface="Cambria" pitchFamily="34" charset="-122"/>
-                <a:cs typeface="Cambria" pitchFamily="34" charset="-120"/>
-              </a:rPr>
-              <a:t>3</a:t>
-            </a:r>
-            <a:endParaRPr lang="en-US" sz="1600" dirty="0"/>
-          </a:p>
-        </p:txBody>
-      </p:sp>
-      <p:sp>
-        <p:nvSpPr>
-          <p:cNvPr id="17" name="Text 15"/>
-          <p:cNvSpPr txBox="1"/>
-          <p:nvPr/>
-        </p:nvSpPr>
-        <p:spPr>
-          <a:xfrm>
-            <a:off x="1691640" y="3337560"/>
-            <a:ext cx="4023360" cy="365760"/>
-          </a:xfrm>
-          <a:prstGeom prst="rect">
-            <a:avLst/>
-          </a:prstGeom>
-          <a:noFill/>
-          <a:ln/>
-        </p:spPr>
-        <p:txBody>
-          <a:bodyPr wrap="square" lIns="0" tIns="0" rIns="0" bIns="0" rtlCol="0" anchor="ctr"/>
-          <a:lstStyle/>
-          <a:p>
-            <a:pPr indent="0" marL="0">
-              <a:buNone/>
-            </a:pPr>
-            <a:r>
-              <a:rPr lang="en-US" sz="1800" b="1" dirty="0">
-                <a:solidFill>
-                  <a:srgbClr val="1F4A3D"/>
-                </a:solidFill>
-                <a:latin typeface="Cambria" pitchFamily="34" charset="0"/>
-                <a:ea typeface="Cambria" pitchFamily="34" charset="-122"/>
-                <a:cs typeface="Cambria" pitchFamily="34" charset="-120"/>
-              </a:rPr>
-              <a:t>Источники фото</a:t>
-            </a:r>
-            <a:endParaRPr lang="en-US" sz="1800" dirty="0"/>
-          </a:p>
-        </p:txBody>
-      </p:sp>
-      <p:sp>
-        <p:nvSpPr>
-          <p:cNvPr id="18" name="Text 16"/>
-          <p:cNvSpPr txBox="1"/>
-          <p:nvPr/>
-        </p:nvSpPr>
-        <p:spPr>
-          <a:xfrm>
-            <a:off x="1691640" y="3749040"/>
-            <a:ext cx="4023360" cy="457200"/>
-          </a:xfrm>
-          <a:prstGeom prst="rect">
-            <a:avLst/>
-          </a:prstGeom>
-          <a:noFill/>
-          <a:ln/>
-        </p:spPr>
-        <p:txBody>
-          <a:bodyPr wrap="square" lIns="0" tIns="0" rIns="0" bIns="0" rtlCol="0" anchor="t"/>
-          <a:lstStyle/>
-          <a:p>
-            <a:pPr indent="0" marL="0">
-              <a:buNone/>
-            </a:pPr>
-            <a:r>
-              <a:rPr lang="en-US" sz="1400" dirty="0">
-                <a:solidFill>
-                  <a:srgbClr val="6D6555"/>
-                </a:solidFill>
-                <a:latin typeface="Calibri" pitchFamily="34" charset="0"/>
-                <a:ea typeface="Calibri" pitchFamily="34" charset="-122"/>
-                <a:cs typeface="Calibri" pitchFamily="34" charset="-120"/>
-              </a:rPr>
-              <a:t>Wikimedia Commons · Openverse · сайт вуза</a:t>
-            </a:r>
-            <a:endParaRPr lang="en-US" sz="1400" dirty="0"/>
-          </a:p>
-        </p:txBody>
-      </p:sp>
-      <p:sp>
-        <p:nvSpPr>
-          <p:cNvPr id="19" name="Shape 17"/>
+          <p:cNvPr id="40" name="Shape 38"/>
           <p:cNvSpPr/>
           <p:nvPr/>
         </p:nvSpPr>
         <p:spPr>
           <a:xfrm>
-            <a:off x="6217920" y="3154680"/>
-            <a:ext cx="5303520" cy="1143000"/>
+            <a:off x="1746504" y="5175504"/>
+            <a:ext cx="822960" cy="91440"/>
           </a:xfrm>
           <a:prstGeom prst="roundRect">
             <a:avLst>
-              <a:gd name="adj" fmla="val 8000"/>
+              <a:gd name="adj" fmla="val 50000"/>
+            </a:avLst>
+          </a:prstGeom>
+          <a:solidFill>
+            <a:srgbClr val="1F4A3D"/>
+          </a:solidFill>
+          <a:ln/>
+        </p:spPr>
+      </p:sp>
+      <p:sp>
+        <p:nvSpPr>
+          <p:cNvPr id="41" name="Shape 39"/>
+          <p:cNvSpPr/>
+          <p:nvPr/>
+        </p:nvSpPr>
+        <p:spPr>
+          <a:xfrm>
+            <a:off x="2624328" y="5175504"/>
+            <a:ext cx="822960" cy="91440"/>
+          </a:xfrm>
+          <a:prstGeom prst="roundRect">
+            <a:avLst>
+              <a:gd name="adj" fmla="val 50000"/>
+            </a:avLst>
+          </a:prstGeom>
+          <a:solidFill>
+            <a:srgbClr val="E3DAC6"/>
+          </a:solidFill>
+          <a:ln/>
+        </p:spPr>
+      </p:sp>
+      <p:sp>
+        <p:nvSpPr>
+          <p:cNvPr id="42" name="Text 40"/>
+          <p:cNvSpPr txBox="1"/>
+          <p:nvPr/>
+        </p:nvSpPr>
+        <p:spPr>
+          <a:xfrm>
+            <a:off x="3794760" y="4892040"/>
+            <a:ext cx="1463040" cy="228600"/>
+          </a:xfrm>
+          <a:prstGeom prst="rect">
+            <a:avLst/>
+          </a:prstGeom>
+          <a:noFill/>
+          <a:ln/>
+        </p:spPr>
+        <p:txBody>
+          <a:bodyPr wrap="square" lIns="0" tIns="0" rIns="0" bIns="0" rtlCol="0" anchor="ctr"/>
+          <a:lstStyle/>
+          <a:p>
+            <a:pPr indent="0" marL="0">
+              <a:buNone/>
+            </a:pPr>
+            <a:r>
+              <a:rPr lang="en-US" sz="1050" dirty="0">
+                <a:solidFill>
+                  <a:srgbClr val="6D6555"/>
+                </a:solidFill>
+                <a:latin typeface="Calibri" pitchFamily="34" charset="0"/>
+                <a:ea typeface="Calibri" pitchFamily="34" charset="-122"/>
+                <a:cs typeface="Calibri" pitchFamily="34" charset="-120"/>
+              </a:rPr>
+              <a:t>Загруженность</a:t>
+            </a:r>
+            <a:endParaRPr lang="en-US" sz="1050" dirty="0"/>
+          </a:p>
+        </p:txBody>
+      </p:sp>
+      <p:sp>
+        <p:nvSpPr>
+          <p:cNvPr id="43" name="Text 41"/>
+          <p:cNvSpPr txBox="1"/>
+          <p:nvPr/>
+        </p:nvSpPr>
+        <p:spPr>
+          <a:xfrm>
+            <a:off x="5074920" y="4892040"/>
+            <a:ext cx="1280160" cy="228600"/>
+          </a:xfrm>
+          <a:prstGeom prst="rect">
+            <a:avLst/>
+          </a:prstGeom>
+          <a:noFill/>
+          <a:ln/>
+        </p:spPr>
+        <p:txBody>
+          <a:bodyPr wrap="square" lIns="0" tIns="0" rIns="0" bIns="0" rtlCol="0" anchor="ctr"/>
+          <a:lstStyle/>
+          <a:p>
+            <a:pPr algn="r" indent="0" marL="0">
+              <a:buNone/>
+            </a:pPr>
+            <a:r>
+              <a:rPr lang="en-US" sz="1050" b="1" dirty="0">
+                <a:solidFill>
+                  <a:srgbClr val="1F4A3D"/>
+                </a:solidFill>
+                <a:latin typeface="Calibri" pitchFamily="34" charset="0"/>
+                <a:ea typeface="Calibri" pitchFamily="34" charset="-122"/>
+                <a:cs typeface="Calibri" pitchFamily="34" charset="-120"/>
+              </a:rPr>
+              <a:t>средняя</a:t>
+            </a:r>
+            <a:endParaRPr lang="en-US" sz="1050" dirty="0"/>
+          </a:p>
+        </p:txBody>
+      </p:sp>
+      <p:sp>
+        <p:nvSpPr>
+          <p:cNvPr id="44" name="Shape 42"/>
+          <p:cNvSpPr/>
+          <p:nvPr/>
+        </p:nvSpPr>
+        <p:spPr>
+          <a:xfrm>
+            <a:off x="3794760" y="5175504"/>
+            <a:ext cx="822960" cy="91440"/>
+          </a:xfrm>
+          <a:prstGeom prst="roundRect">
+            <a:avLst>
+              <a:gd name="adj" fmla="val 50000"/>
+            </a:avLst>
+          </a:prstGeom>
+          <a:solidFill>
+            <a:srgbClr val="1F4A3D"/>
+          </a:solidFill>
+          <a:ln/>
+        </p:spPr>
+      </p:sp>
+      <p:sp>
+        <p:nvSpPr>
+          <p:cNvPr id="45" name="Shape 43"/>
+          <p:cNvSpPr/>
+          <p:nvPr/>
+        </p:nvSpPr>
+        <p:spPr>
+          <a:xfrm>
+            <a:off x="4672584" y="5175504"/>
+            <a:ext cx="822960" cy="91440"/>
+          </a:xfrm>
+          <a:prstGeom prst="roundRect">
+            <a:avLst>
+              <a:gd name="adj" fmla="val 50000"/>
+            </a:avLst>
+          </a:prstGeom>
+          <a:solidFill>
+            <a:srgbClr val="1F4A3D"/>
+          </a:solidFill>
+          <a:ln/>
+        </p:spPr>
+      </p:sp>
+      <p:sp>
+        <p:nvSpPr>
+          <p:cNvPr id="46" name="Shape 44"/>
+          <p:cNvSpPr/>
+          <p:nvPr/>
+        </p:nvSpPr>
+        <p:spPr>
+          <a:xfrm>
+            <a:off x="5550408" y="5175504"/>
+            <a:ext cx="822960" cy="91440"/>
+          </a:xfrm>
+          <a:prstGeom prst="roundRect">
+            <a:avLst>
+              <a:gd name="adj" fmla="val 50000"/>
+            </a:avLst>
+          </a:prstGeom>
+          <a:solidFill>
+            <a:srgbClr val="E3DAC6"/>
+          </a:solidFill>
+          <a:ln/>
+        </p:spPr>
+      </p:sp>
+      <p:sp>
+        <p:nvSpPr>
+          <p:cNvPr id="47" name="Text 45"/>
+          <p:cNvSpPr txBox="1"/>
+          <p:nvPr/>
+        </p:nvSpPr>
+        <p:spPr>
+          <a:xfrm>
+            <a:off x="7040880" y="1600200"/>
+            <a:ext cx="4480560" cy="292608"/>
+          </a:xfrm>
+          <a:prstGeom prst="rect">
+            <a:avLst/>
+          </a:prstGeom>
+          <a:noFill/>
+          <a:ln/>
+        </p:spPr>
+        <p:txBody>
+          <a:bodyPr wrap="square" lIns="0" tIns="0" rIns="0" bIns="0" rtlCol="0" anchor="ctr"/>
+          <a:lstStyle/>
+          <a:p>
+            <a:pPr indent="0" marL="0">
+              <a:buNone/>
+            </a:pPr>
+            <a:r>
+              <a:rPr lang="en-US" sz="1300" b="1" dirty="0">
+                <a:solidFill>
+                  <a:srgbClr val="A9834A"/>
+                </a:solidFill>
+                <a:latin typeface="Calibri" pitchFamily="34" charset="0"/>
+                <a:ea typeface="Calibri" pitchFamily="34" charset="-122"/>
+                <a:cs typeface="Calibri" pitchFamily="34" charset="-120"/>
+              </a:rPr>
+              <a:t>Активности для студентов</a:t>
+            </a:r>
+            <a:endParaRPr lang="en-US" sz="1300" dirty="0"/>
+          </a:p>
+        </p:txBody>
+      </p:sp>
+      <p:sp>
+        <p:nvSpPr>
+          <p:cNvPr id="48" name="Shape 46"/>
+          <p:cNvSpPr/>
+          <p:nvPr/>
+        </p:nvSpPr>
+        <p:spPr>
+          <a:xfrm>
+            <a:off x="7040880" y="2011680"/>
+            <a:ext cx="4480560" cy="1051560"/>
+          </a:xfrm>
+          <a:prstGeom prst="roundRect">
+            <a:avLst>
+              <a:gd name="adj" fmla="val 8696"/>
             </a:avLst>
           </a:prstGeom>
           <a:solidFill>
@@ -7487,128 +9837,108 @@
       </p:sp>
       <p:sp>
         <p:nvSpPr>
-          <p:cNvPr id="20" name="Shape 18"/>
-          <p:cNvSpPr/>
-          <p:nvPr/>
-        </p:nvSpPr>
-        <p:spPr>
-          <a:xfrm>
-            <a:off x="6492240" y="3447288"/>
-            <a:ext cx="548640" cy="548640"/>
-          </a:xfrm>
-          <a:prstGeom prst="ellipse">
-            <a:avLst/>
-          </a:prstGeom>
-          <a:solidFill>
-            <a:srgbClr val="1F4A3D"/>
-          </a:solidFill>
-          <a:ln/>
-        </p:spPr>
-      </p:sp>
-      <p:sp>
-        <p:nvSpPr>
-          <p:cNvPr id="21" name="Text 19"/>
-          <p:cNvSpPr txBox="1"/>
-          <p:nvPr/>
-        </p:nvSpPr>
-        <p:spPr>
-          <a:xfrm>
-            <a:off x="6492240" y="3447288"/>
-            <a:ext cx="548640" cy="548640"/>
-          </a:xfrm>
-          <a:prstGeom prst="rect">
-            <a:avLst/>
-          </a:prstGeom>
-          <a:noFill/>
-          <a:ln/>
-        </p:spPr>
-        <p:txBody>
-          <a:bodyPr wrap="square" lIns="0" tIns="0" rIns="0" bIns="0" rtlCol="0" anchor="ctr"/>
-          <a:lstStyle/>
-          <a:p>
-            <a:pPr algn="ctr" indent="0" marL="0">
-              <a:buNone/>
-            </a:pPr>
-            <a:r>
-              <a:rPr lang="en-US" sz="1600" b="1" dirty="0">
-                <a:solidFill>
-                  <a:srgbClr val="F0E3C8"/>
+          <p:cNvPr id="49" name="Text 47"/>
+          <p:cNvSpPr txBox="1"/>
+          <p:nvPr/>
+        </p:nvSpPr>
+        <p:spPr>
+          <a:xfrm>
+            <a:off x="7269480" y="2103120"/>
+            <a:ext cx="2286000" cy="228600"/>
+          </a:xfrm>
+          <a:prstGeom prst="rect">
+            <a:avLst/>
+          </a:prstGeom>
+          <a:noFill/>
+          <a:ln/>
+        </p:spPr>
+        <p:txBody>
+          <a:bodyPr wrap="square" lIns="0" tIns="0" rIns="0" bIns="0" rtlCol="0" anchor="ctr"/>
+          <a:lstStyle/>
+          <a:p>
+            <a:pPr indent="0" marL="0">
+              <a:buNone/>
+            </a:pPr>
+            <a:r>
+              <a:rPr lang="en-US" sz="1000" b="1" spc="200" kern="0" dirty="0">
+                <a:solidFill>
+                  <a:srgbClr val="A9834A"/>
+                </a:solidFill>
+                <a:latin typeface="Calibri" pitchFamily="34" charset="0"/>
+                <a:ea typeface="Calibri" pitchFamily="34" charset="-122"/>
+                <a:cs typeface="Calibri" pitchFamily="34" charset="-120"/>
+              </a:rPr>
+              <a:t>МЕРОПРИЯТИЕ</a:t>
+            </a:r>
+            <a:endParaRPr lang="en-US" sz="1000" dirty="0"/>
+          </a:p>
+        </p:txBody>
+      </p:sp>
+      <p:sp>
+        <p:nvSpPr>
+          <p:cNvPr id="50" name="Text 48"/>
+          <p:cNvSpPr txBox="1"/>
+          <p:nvPr/>
+        </p:nvSpPr>
+        <p:spPr>
+          <a:xfrm>
+            <a:off x="7269480" y="2359152"/>
+            <a:ext cx="4023360" cy="292608"/>
+          </a:xfrm>
+          <a:prstGeom prst="rect">
+            <a:avLst/>
+          </a:prstGeom>
+          <a:noFill/>
+          <a:ln/>
+        </p:spPr>
+        <p:txBody>
+          <a:bodyPr wrap="square" lIns="0" tIns="0" rIns="0" bIns="0" rtlCol="0" anchor="ctr"/>
+          <a:lstStyle/>
+          <a:p>
+            <a:pPr indent="0" marL="0">
+              <a:buNone/>
+            </a:pPr>
+            <a:r>
+              <a:rPr lang="en-US" sz="1500" b="1" dirty="0">
+                <a:solidFill>
+                  <a:srgbClr val="1F4A3D"/>
                 </a:solidFill>
                 <a:latin typeface="Cambria" pitchFamily="34" charset="0"/>
                 <a:ea typeface="Cambria" pitchFamily="34" charset="-122"/>
                 <a:cs typeface="Cambria" pitchFamily="34" charset="-120"/>
               </a:rPr>
-              <a:t>4</a:t>
-            </a:r>
-            <a:endParaRPr lang="en-US" sz="1600" dirty="0"/>
-          </a:p>
-        </p:txBody>
-      </p:sp>
-      <p:sp>
-        <p:nvSpPr>
-          <p:cNvPr id="22" name="Text 20"/>
-          <p:cNvSpPr txBox="1"/>
-          <p:nvPr/>
-        </p:nvSpPr>
-        <p:spPr>
-          <a:xfrm>
-            <a:off x="7269480" y="3337560"/>
-            <a:ext cx="4023360" cy="365760"/>
-          </a:xfrm>
-          <a:prstGeom prst="rect">
-            <a:avLst/>
-          </a:prstGeom>
-          <a:noFill/>
-          <a:ln/>
-        </p:spPr>
-        <p:txBody>
-          <a:bodyPr wrap="square" lIns="0" tIns="0" rIns="0" bIns="0" rtlCol="0" anchor="ctr"/>
-          <a:lstStyle/>
-          <a:p>
-            <a:pPr indent="0" marL="0">
-              <a:buNone/>
-            </a:pPr>
-            <a:r>
-              <a:rPr lang="en-US" sz="1800" b="1" dirty="0">
-                <a:solidFill>
-                  <a:srgbClr val="1F4A3D"/>
-                </a:solidFill>
-                <a:latin typeface="Cambria" pitchFamily="34" charset="0"/>
-                <a:ea typeface="Cambria" pitchFamily="34" charset="-122"/>
-                <a:cs typeface="Cambria" pitchFamily="34" charset="-120"/>
-              </a:rPr>
-              <a:t>Данные о вузе</a:t>
-            </a:r>
-            <a:endParaRPr lang="en-US" sz="1800" dirty="0"/>
-          </a:p>
-        </p:txBody>
-      </p:sp>
-      <p:sp>
-        <p:nvSpPr>
-          <p:cNvPr id="23" name="Text 21"/>
-          <p:cNvSpPr txBox="1"/>
-          <p:nvPr/>
-        </p:nvSpPr>
-        <p:spPr>
-          <a:xfrm>
-            <a:off x="7269480" y="3749040"/>
-            <a:ext cx="4023360" cy="457200"/>
-          </a:xfrm>
-          <a:prstGeom prst="rect">
-            <a:avLst/>
-          </a:prstGeom>
-          <a:noFill/>
-          <a:ln/>
-        </p:spPr>
-        <p:txBody>
-          <a:bodyPr wrap="square" lIns="0" tIns="0" rIns="0" bIns="0" rtlCol="0" anchor="t"/>
-          <a:lstStyle/>
-          <a:p>
-            <a:pPr indent="0" marL="0">
-              <a:buNone/>
-            </a:pPr>
-            <a:r>
-              <a:rPr lang="en-US" sz="1400" dirty="0">
+              <a:t>Orientation Week</a:t>
+            </a:r>
+            <a:endParaRPr lang="en-US" sz="1500" dirty="0"/>
+          </a:p>
+        </p:txBody>
+      </p:sp>
+      <p:sp>
+        <p:nvSpPr>
+          <p:cNvPr id="51" name="Text 49"/>
+          <p:cNvSpPr txBox="1"/>
+          <p:nvPr/>
+        </p:nvSpPr>
+        <p:spPr>
+          <a:xfrm>
+            <a:off x="7269480" y="2688336"/>
+            <a:ext cx="4023360" cy="274320"/>
+          </a:xfrm>
+          <a:prstGeom prst="rect">
+            <a:avLst/>
+          </a:prstGeom>
+          <a:noFill/>
+          <a:ln/>
+        </p:spPr>
+        <p:txBody>
+          <a:bodyPr wrap="square" lIns="0" tIns="0" rIns="0" bIns="0" rtlCol="0" anchor="ctr"/>
+          <a:lstStyle/>
+          <a:p>
+            <a:pPr indent="0" marL="0">
+              <a:buNone/>
+            </a:pPr>
+            <a:r>
+              <a:rPr lang="en-US" sz="1150" dirty="0">
                 <a:solidFill>
                   <a:srgbClr val="6D6555"/>
                 </a:solidFill>
@@ -7616,26 +9946,26 @@
                 <a:ea typeface="Calibri" pitchFamily="34" charset="-122"/>
                 <a:cs typeface="Calibri" pitchFamily="34" charset="-120"/>
               </a:rPr>
-              <a:t>Wikidata · Wikipedia · официальные соцсети</a:t>
-            </a:r>
-            <a:endParaRPr lang="en-US" sz="1400" dirty="0"/>
-          </a:p>
-        </p:txBody>
-      </p:sp>
-      <p:sp>
-        <p:nvSpPr>
-          <p:cNvPr id="24" name="Shape 22"/>
+              <a:t>Приветственная неделя для новых студентов.</a:t>
+            </a:r>
+            <a:endParaRPr lang="en-US" sz="1150" dirty="0"/>
+          </a:p>
+        </p:txBody>
+      </p:sp>
+      <p:sp>
+        <p:nvSpPr>
+          <p:cNvPr id="52" name="Shape 50"/>
           <p:cNvSpPr/>
           <p:nvPr/>
         </p:nvSpPr>
         <p:spPr>
           <a:xfrm>
-            <a:off x="640080" y="4526280"/>
-            <a:ext cx="5303520" cy="1143000"/>
+            <a:off x="7040880" y="3200400"/>
+            <a:ext cx="4480560" cy="1051560"/>
           </a:xfrm>
           <a:prstGeom prst="roundRect">
             <a:avLst>
-              <a:gd name="adj" fmla="val 8000"/>
+              <a:gd name="adj" fmla="val 8696"/>
             </a:avLst>
           </a:prstGeom>
           <a:solidFill>
@@ -7651,89 +9981,172 @@
       </p:sp>
       <p:sp>
         <p:nvSpPr>
-          <p:cNvPr id="25" name="Shape 23"/>
-          <p:cNvSpPr/>
-          <p:nvPr/>
-        </p:nvSpPr>
-        <p:spPr>
-          <a:xfrm>
-            <a:off x="914400" y="4818888"/>
-            <a:ext cx="548640" cy="548640"/>
-          </a:xfrm>
-          <a:prstGeom prst="ellipse">
-            <a:avLst/>
-          </a:prstGeom>
-          <a:solidFill>
-            <a:srgbClr val="1F4A3D"/>
-          </a:solidFill>
-          <a:ln/>
-        </p:spPr>
-      </p:sp>
-      <p:sp>
-        <p:nvSpPr>
-          <p:cNvPr id="26" name="Text 24"/>
-          <p:cNvSpPr txBox="1"/>
-          <p:nvPr/>
-        </p:nvSpPr>
-        <p:spPr>
-          <a:xfrm>
-            <a:off x="914400" y="4818888"/>
-            <a:ext cx="548640" cy="548640"/>
-          </a:xfrm>
-          <a:prstGeom prst="rect">
-            <a:avLst/>
-          </a:prstGeom>
-          <a:noFill/>
-          <a:ln/>
-        </p:spPr>
-        <p:txBody>
-          <a:bodyPr wrap="square" lIns="0" tIns="0" rIns="0" bIns="0" rtlCol="0" anchor="ctr"/>
-          <a:lstStyle/>
-          <a:p>
-            <a:pPr algn="ctr" indent="0" marL="0">
-              <a:buNone/>
-            </a:pPr>
-            <a:r>
-              <a:rPr lang="en-US" sz="1600" b="1" dirty="0">
-                <a:solidFill>
-                  <a:srgbClr val="F0E3C8"/>
+          <p:cNvPr id="53" name="Text 51"/>
+          <p:cNvSpPr txBox="1"/>
+          <p:nvPr/>
+        </p:nvSpPr>
+        <p:spPr>
+          <a:xfrm>
+            <a:off x="7269480" y="3291840"/>
+            <a:ext cx="2286000" cy="228600"/>
+          </a:xfrm>
+          <a:prstGeom prst="rect">
+            <a:avLst/>
+          </a:prstGeom>
+          <a:noFill/>
+          <a:ln/>
+        </p:spPr>
+        <p:txBody>
+          <a:bodyPr wrap="square" lIns="0" tIns="0" rIns="0" bIns="0" rtlCol="0" anchor="ctr"/>
+          <a:lstStyle/>
+          <a:p>
+            <a:pPr indent="0" marL="0">
+              <a:buNone/>
+            </a:pPr>
+            <a:r>
+              <a:rPr lang="en-US" sz="1000" b="1" spc="200" kern="0" dirty="0">
+                <a:solidFill>
+                  <a:srgbClr val="A9834A"/>
+                </a:solidFill>
+                <a:latin typeface="Calibri" pitchFamily="34" charset="0"/>
+                <a:ea typeface="Calibri" pitchFamily="34" charset="-122"/>
+                <a:cs typeface="Calibri" pitchFamily="34" charset="-120"/>
+              </a:rPr>
+              <a:t>КЛУБ</a:t>
+            </a:r>
+            <a:endParaRPr lang="en-US" sz="1000" dirty="0"/>
+          </a:p>
+        </p:txBody>
+      </p:sp>
+      <p:sp>
+        <p:nvSpPr>
+          <p:cNvPr id="54" name="Text 52"/>
+          <p:cNvSpPr txBox="1"/>
+          <p:nvPr/>
+        </p:nvSpPr>
+        <p:spPr>
+          <a:xfrm>
+            <a:off x="7269480" y="3547872"/>
+            <a:ext cx="4023360" cy="292608"/>
+          </a:xfrm>
+          <a:prstGeom prst="rect">
+            <a:avLst/>
+          </a:prstGeom>
+          <a:noFill/>
+          <a:ln/>
+        </p:spPr>
+        <p:txBody>
+          <a:bodyPr wrap="square" lIns="0" tIns="0" rIns="0" bIns="0" rtlCol="0" anchor="ctr"/>
+          <a:lstStyle/>
+          <a:p>
+            <a:pPr indent="0" marL="0">
+              <a:buNone/>
+            </a:pPr>
+            <a:r>
+              <a:rPr lang="en-US" sz="1500" b="1" dirty="0">
+                <a:solidFill>
+                  <a:srgbClr val="1F4A3D"/>
                 </a:solidFill>
                 <a:latin typeface="Cambria" pitchFamily="34" charset="0"/>
                 <a:ea typeface="Cambria" pitchFamily="34" charset="-122"/>
                 <a:cs typeface="Cambria" pitchFamily="34" charset="-120"/>
               </a:rPr>
-              <a:t>5</a:t>
-            </a:r>
-            <a:endParaRPr lang="en-US" sz="1600" dirty="0"/>
-          </a:p>
-        </p:txBody>
-      </p:sp>
-      <p:sp>
-        <p:nvSpPr>
-          <p:cNvPr id="27" name="Text 25"/>
-          <p:cNvSpPr txBox="1"/>
-          <p:nvPr/>
-        </p:nvSpPr>
-        <p:spPr>
-          <a:xfrm>
-            <a:off x="1691640" y="4709160"/>
-            <a:ext cx="4023360" cy="365760"/>
-          </a:xfrm>
-          <a:prstGeom prst="rect">
-            <a:avLst/>
-          </a:prstGeom>
-          <a:noFill/>
-          <a:ln/>
-        </p:spPr>
-        <p:txBody>
-          <a:bodyPr wrap="square" lIns="0" tIns="0" rIns="0" bIns="0" rtlCol="0" anchor="ctr"/>
-          <a:lstStyle/>
-          <a:p>
-            <a:pPr indent="0" marL="0">
-              <a:buNone/>
-            </a:pPr>
-            <a:r>
-              <a:rPr lang="en-US" sz="1800" b="1" dirty="0">
+              <a:t>Student Organizations &amp; Clubs</a:t>
+            </a:r>
+            <a:endParaRPr lang="en-US" sz="1500" dirty="0"/>
+          </a:p>
+        </p:txBody>
+      </p:sp>
+      <p:sp>
+        <p:nvSpPr>
+          <p:cNvPr id="55" name="Text 53"/>
+          <p:cNvSpPr txBox="1"/>
+          <p:nvPr/>
+        </p:nvSpPr>
+        <p:spPr>
+          <a:xfrm>
+            <a:off x="7269480" y="3877056"/>
+            <a:ext cx="4023360" cy="274320"/>
+          </a:xfrm>
+          <a:prstGeom prst="rect">
+            <a:avLst/>
+          </a:prstGeom>
+          <a:noFill/>
+          <a:ln/>
+        </p:spPr>
+        <p:txBody>
+          <a:bodyPr wrap="square" lIns="0" tIns="0" rIns="0" bIns="0" rtlCol="0" anchor="ctr"/>
+          <a:lstStyle/>
+          <a:p>
+            <a:pPr indent="0" marL="0">
+              <a:buNone/>
+            </a:pPr>
+            <a:r>
+              <a:rPr lang="en-US" sz="1150" dirty="0">
+                <a:solidFill>
+                  <a:srgbClr val="6D6555"/>
+                </a:solidFill>
+                <a:latin typeface="Calibri" pitchFamily="34" charset="0"/>
+                <a:ea typeface="Calibri" pitchFamily="34" charset="-122"/>
+                <a:cs typeface="Calibri" pitchFamily="34" charset="-120"/>
+              </a:rPr>
+              <a:t>Студенческие клубы и организации.</a:t>
+            </a:r>
+            <a:endParaRPr lang="en-US" sz="1150" dirty="0"/>
+          </a:p>
+        </p:txBody>
+      </p:sp>
+      <p:sp>
+        <p:nvSpPr>
+          <p:cNvPr id="56" name="Shape 54"/>
+          <p:cNvSpPr/>
+          <p:nvPr/>
+        </p:nvSpPr>
+        <p:spPr>
+          <a:xfrm>
+            <a:off x="7040880" y="4434840"/>
+            <a:ext cx="4480560" cy="1097280"/>
+          </a:xfrm>
+          <a:prstGeom prst="roundRect">
+            <a:avLst>
+              <a:gd name="adj" fmla="val 8333"/>
+            </a:avLst>
+          </a:prstGeom>
+          <a:solidFill>
+            <a:srgbClr val="F0E3C8"/>
+          </a:solidFill>
+          <a:ln/>
+        </p:spPr>
+      </p:sp>
+      <p:sp>
+        <p:nvSpPr>
+          <p:cNvPr id="57" name="Text 55"/>
+          <p:cNvSpPr txBox="1"/>
+          <p:nvPr/>
+        </p:nvSpPr>
+        <p:spPr>
+          <a:xfrm>
+            <a:off x="7269480" y="4526280"/>
+            <a:ext cx="4023360" cy="914400"/>
+          </a:xfrm>
+          <a:prstGeom prst="rect">
+            <a:avLst/>
+          </a:prstGeom>
+          <a:noFill/>
+          <a:ln/>
+        </p:spPr>
+        <p:txBody>
+          <a:bodyPr wrap="square" lIns="0" tIns="0" rIns="0" bIns="0" rtlCol="0" anchor="t"/>
+          <a:lstStyle/>
+          <a:p>
+            <a:pPr indent="0" marL="0">
+              <a:spcAft>
+                <a:spcPts val="300"/>
+              </a:spcAft>
+              <a:buNone/>
+            </a:pPr>
+            <a:r>
+              <a:rPr lang="en-US" sz="1300" b="1" dirty="0">
                 <a:solidFill>
                   <a:srgbClr val="1F4A3D"/>
                 </a:solidFill>
@@ -7741,218 +10154,74 @@
                 <a:ea typeface="Cambria" pitchFamily="34" charset="-122"/>
                 <a:cs typeface="Cambria" pitchFamily="34" charset="-120"/>
               </a:rPr>
-              <a:t>Проверка</a:t>
-            </a:r>
-            <a:endParaRPr lang="en-US" sz="1800" dirty="0"/>
-          </a:p>
-        </p:txBody>
-      </p:sp>
-      <p:sp>
-        <p:nvSpPr>
-          <p:cNvPr id="28" name="Text 26"/>
-          <p:cNvSpPr txBox="1"/>
-          <p:nvPr/>
-        </p:nvSpPr>
-        <p:spPr>
-          <a:xfrm>
-            <a:off x="1691640" y="5120640"/>
-            <a:ext cx="4023360" cy="457200"/>
-          </a:xfrm>
-          <a:prstGeom prst="rect">
-            <a:avLst/>
-          </a:prstGeom>
-          <a:noFill/>
-          <a:ln/>
-        </p:spPr>
-        <p:txBody>
-          <a:bodyPr wrap="square" lIns="0" tIns="0" rIns="0" bIns="0" rtlCol="0" anchor="t"/>
-          <a:lstStyle/>
-          <a:p>
-            <a:pPr indent="0" marL="0">
-              <a:buNone/>
-            </a:pPr>
-            <a:r>
-              <a:rPr lang="en-US" sz="1400" dirty="0">
-                <a:solidFill>
-                  <a:srgbClr val="6D6555"/>
-                </a:solidFill>
-                <a:latin typeface="Calibri" pitchFamily="34" charset="0"/>
-                <a:ea typeface="Calibri" pitchFamily="34" charset="-122"/>
-                <a:cs typeface="Calibri" pitchFamily="34" charset="-120"/>
-              </a:rPr>
-              <a:t>Google Gemini Vision + perceptual hash (sharp)</a:t>
-            </a:r>
-            <a:endParaRPr lang="en-US" sz="1400" dirty="0"/>
-          </a:p>
-        </p:txBody>
-      </p:sp>
-      <p:sp>
-        <p:nvSpPr>
-          <p:cNvPr id="29" name="Shape 27"/>
-          <p:cNvSpPr/>
-          <p:nvPr/>
-        </p:nvSpPr>
-        <p:spPr>
-          <a:xfrm>
-            <a:off x="6217920" y="4526280"/>
-            <a:ext cx="5303520" cy="1143000"/>
-          </a:xfrm>
-          <a:prstGeom prst="roundRect">
-            <a:avLst>
-              <a:gd name="adj" fmla="val 8000"/>
-            </a:avLst>
-          </a:prstGeom>
-          <a:solidFill>
-            <a:srgbClr val="F7F2E7"/>
-          </a:solidFill>
-          <a:ln w="12700">
-            <a:solidFill>
-              <a:srgbClr val="E3DAC6"/>
-            </a:solidFill>
-            <a:prstDash val="solid"/>
-          </a:ln>
-        </p:spPr>
-      </p:sp>
-      <p:sp>
-        <p:nvSpPr>
-          <p:cNvPr id="30" name="Shape 28"/>
-          <p:cNvSpPr/>
-          <p:nvPr/>
-        </p:nvSpPr>
-        <p:spPr>
-          <a:xfrm>
-            <a:off x="6492240" y="4818888"/>
-            <a:ext cx="548640" cy="548640"/>
-          </a:xfrm>
-          <a:prstGeom prst="ellipse">
-            <a:avLst/>
-          </a:prstGeom>
-          <a:solidFill>
-            <a:srgbClr val="1F4A3D"/>
-          </a:solidFill>
-          <a:ln/>
-        </p:spPr>
-      </p:sp>
-      <p:sp>
-        <p:nvSpPr>
-          <p:cNvPr id="31" name="Text 29"/>
-          <p:cNvSpPr txBox="1"/>
-          <p:nvPr/>
-        </p:nvSpPr>
-        <p:spPr>
-          <a:xfrm>
-            <a:off x="6492240" y="4818888"/>
-            <a:ext cx="548640" cy="548640"/>
-          </a:xfrm>
-          <a:prstGeom prst="rect">
-            <a:avLst/>
-          </a:prstGeom>
-          <a:noFill/>
-          <a:ln/>
-        </p:spPr>
-        <p:txBody>
-          <a:bodyPr wrap="square" lIns="0" tIns="0" rIns="0" bIns="0" rtlCol="0" anchor="ctr"/>
-          <a:lstStyle/>
-          <a:p>
-            <a:pPr algn="ctr" indent="0" marL="0">
-              <a:buNone/>
-            </a:pPr>
-            <a:r>
-              <a:rPr lang="en-US" sz="1600" b="1" dirty="0">
-                <a:solidFill>
-                  <a:srgbClr val="F0E3C8"/>
-                </a:solidFill>
-                <a:latin typeface="Cambria" pitchFamily="34" charset="0"/>
-                <a:ea typeface="Cambria" pitchFamily="34" charset="-122"/>
-                <a:cs typeface="Cambria" pitchFamily="34" charset="-120"/>
-              </a:rPr>
-              <a:t>6</a:t>
-            </a:r>
-            <a:endParaRPr lang="en-US" sz="1600" dirty="0"/>
-          </a:p>
-        </p:txBody>
-      </p:sp>
-      <p:sp>
-        <p:nvSpPr>
-          <p:cNvPr id="32" name="Text 30"/>
-          <p:cNvSpPr txBox="1"/>
-          <p:nvPr/>
-        </p:nvSpPr>
-        <p:spPr>
-          <a:xfrm>
-            <a:off x="7269480" y="4709160"/>
-            <a:ext cx="4023360" cy="365760"/>
-          </a:xfrm>
-          <a:prstGeom prst="rect">
-            <a:avLst/>
-          </a:prstGeom>
-          <a:noFill/>
-          <a:ln/>
-        </p:spPr>
-        <p:txBody>
-          <a:bodyPr wrap="square" lIns="0" tIns="0" rIns="0" bIns="0" rtlCol="0" anchor="ctr"/>
-          <a:lstStyle/>
-          <a:p>
-            <a:pPr indent="0" marL="0">
-              <a:buNone/>
-            </a:pPr>
-            <a:r>
-              <a:rPr lang="en-US" sz="1800" b="1" dirty="0">
+              <a:t>Честно об оценках</a:t>
+            </a:r>
+            <a:endParaRPr lang="en-US" sz="1300" dirty="0"/>
+          </a:p>
+          <a:p>
+            <a:pPr indent="0" marL="0">
+              <a:spcAft>
+                <a:spcPts val="300"/>
+              </a:spcAft>
+              <a:buNone/>
+            </a:pPr>
+            <a:r>
+              <a:rPr lang="en-US" sz="1100" dirty="0">
+                <a:solidFill>
+                  <a:srgbClr val="2A2620"/>
+                </a:solidFill>
+                <a:latin typeface="Calibri" pitchFamily="34" charset="0"/>
+                <a:ea typeface="Calibri" pitchFamily="34" charset="-122"/>
+                <a:cs typeface="Calibri" pitchFamily="34" charset="-120"/>
+              </a:rPr>
+              <a:t>Открытых данных о популярности и загруженности нет, поэтому это оценка ИИ, а не статистика. Факультеты и активности берутся из Wikipedia и сайта вуза.</a:t>
+            </a:r>
+            <a:endParaRPr lang="en-US" sz="1300" dirty="0"/>
+          </a:p>
+        </p:txBody>
+      </p:sp>
+      <p:sp>
+        <p:nvSpPr>
+          <p:cNvPr id="58" name="Text 56"/>
+          <p:cNvSpPr txBox="1"/>
+          <p:nvPr/>
+        </p:nvSpPr>
+        <p:spPr>
+          <a:xfrm>
+            <a:off x="640080" y="5806440"/>
+            <a:ext cx="10908792" cy="320040"/>
+          </a:xfrm>
+          <a:prstGeom prst="rect">
+            <a:avLst/>
+          </a:prstGeom>
+          <a:noFill/>
+          <a:ln/>
+        </p:spPr>
+        <p:txBody>
+          <a:bodyPr wrap="square" lIns="0" tIns="0" rIns="0" bIns="0" rtlCol="0" anchor="ctr"/>
+          <a:lstStyle/>
+          <a:p>
+            <a:pPr indent="0" marL="0">
+              <a:buNone/>
+            </a:pPr>
+            <a:r>
+              <a:rPr lang="en-US" sz="1300" i="1" dirty="0">
                 <a:solidFill>
                   <a:srgbClr val="1F4A3D"/>
                 </a:solidFill>
-                <a:latin typeface="Cambria" pitchFamily="34" charset="0"/>
-                <a:ea typeface="Cambria" pitchFamily="34" charset="-122"/>
-                <a:cs typeface="Cambria" pitchFamily="34" charset="-120"/>
-              </a:rPr>
-              <a:t>Кэш</a:t>
-            </a:r>
-            <a:endParaRPr lang="en-US" sz="1800" dirty="0"/>
-          </a:p>
-        </p:txBody>
-      </p:sp>
-      <p:sp>
-        <p:nvSpPr>
-          <p:cNvPr id="33" name="Text 31"/>
-          <p:cNvSpPr txBox="1"/>
-          <p:nvPr/>
-        </p:nvSpPr>
-        <p:spPr>
-          <a:xfrm>
-            <a:off x="7269480" y="5120640"/>
-            <a:ext cx="4023360" cy="457200"/>
-          </a:xfrm>
-          <a:prstGeom prst="rect">
-            <a:avLst/>
-          </a:prstGeom>
-          <a:noFill/>
-          <a:ln/>
-        </p:spPr>
-        <p:txBody>
-          <a:bodyPr wrap="square" lIns="0" tIns="0" rIns="0" bIns="0" rtlCol="0" anchor="t"/>
-          <a:lstStyle/>
-          <a:p>
-            <a:pPr indent="0" marL="0">
-              <a:buNone/>
-            </a:pPr>
-            <a:r>
-              <a:rPr lang="en-US" sz="1400" dirty="0">
-                <a:solidFill>
-                  <a:srgbClr val="6D6555"/>
-                </a:solidFill>
-                <a:latin typeface="Calibri" pitchFamily="34" charset="0"/>
-                <a:ea typeface="Calibri" pitchFamily="34" charset="-122"/>
-                <a:cs typeface="Calibri" pitchFamily="34" charset="-120"/>
-              </a:rPr>
-              <a:t>In-memory: повторный поиск возвращается почти мгновенно</a:t>
-            </a:r>
-            <a:endParaRPr lang="en-US" sz="1400" dirty="0"/>
-          </a:p>
-        </p:txBody>
-      </p:sp>
-      <p:sp>
-        <p:nvSpPr>
-          <p:cNvPr id="34" name="Text 32"/>
+                <a:latin typeface="Calibri" pitchFamily="34" charset="0"/>
+                <a:ea typeface="Calibri" pitchFamily="34" charset="-122"/>
+                <a:cs typeface="Calibri" pitchFamily="34" charset="-120"/>
+              </a:rPr>
+              <a:t>Каждый пункт помечен: «по источникам» или «оценка ИИ». Нет данных — так и написано.</a:t>
+            </a:r>
+            <a:endParaRPr lang="en-US" sz="1300" dirty="0"/>
+          </a:p>
+        </p:txBody>
+      </p:sp>
+      <p:sp>
+        <p:nvSpPr>
+          <p:cNvPr id="59" name="Text 57"/>
           <p:cNvSpPr txBox="1"/>
           <p:nvPr/>
         </p:nvSpPr>
@@ -7983,7 +10252,7 @@
                 <a:ea typeface="Calibri" pitchFamily="34" charset="-122"/>
                 <a:cs typeface="Calibri" pitchFamily="34" charset="-120"/>
               </a:rPr>
-              <a:t>7 / 8</a:t>
+              <a:t>7 / 10</a:t>
             </a:r>
             <a:endParaRPr lang="en-US" sz="1000" dirty="0"/>
           </a:p>
@@ -7991,7 +10260,7 @@
       </p:sp>
       <p:sp>
         <p:nvSpPr>
-          <p:cNvPr id="35" name="Text 33"/>
+          <p:cNvPr id="60" name="Text 58"/>
           <p:cNvSpPr txBox="1"/>
           <p:nvPr/>
         </p:nvSpPr>
@@ -8042,7 +10311,7 @@
     <p:bg>
       <p:bgPr>
         <a:solidFill>
-          <a:srgbClr val="1F4A3D"/>
+          <a:srgbClr val="F7F2E7"/>
         </a:solidFill>
       </p:bgPr>
     </p:bg>
@@ -8068,73 +10337,73 @@
         </p:nvSpPr>
         <p:spPr>
           <a:xfrm>
+            <a:off x="640080" y="320040"/>
+            <a:ext cx="7315200" cy="274320"/>
+          </a:xfrm>
+          <a:prstGeom prst="rect">
+            <a:avLst/>
+          </a:prstGeom>
+          <a:noFill/>
+          <a:ln/>
+        </p:spPr>
+        <p:txBody>
+          <a:bodyPr wrap="square" lIns="0" tIns="0" rIns="0" bIns="0" rtlCol="0" anchor="ctr"/>
+          <a:lstStyle/>
+          <a:p>
+            <a:pPr indent="0" marL="0">
+              <a:buNone/>
+            </a:pPr>
+            <a:r>
+              <a:rPr lang="en-US" sz="1200" b="1" spc="400" kern="0" dirty="0">
+                <a:solidFill>
+                  <a:srgbClr val="A9834A"/>
+                </a:solidFill>
+                <a:latin typeface="Calibri" pitchFamily="34" charset="0"/>
+                <a:ea typeface="Calibri" pitchFamily="34" charset="-122"/>
+                <a:cs typeface="Calibri" pitchFamily="34" charset="-120"/>
+              </a:rPr>
+              <a:t>ДОСТОВЕРНОСТЬ</a:t>
+            </a:r>
+            <a:endParaRPr lang="en-US" sz="1200" dirty="0"/>
+          </a:p>
+        </p:txBody>
+      </p:sp>
+      <p:sp>
+        <p:nvSpPr>
+          <p:cNvPr id="3" name="Text 1"/>
+          <p:cNvSpPr txBox="1"/>
+          <p:nvPr/>
+        </p:nvSpPr>
+        <p:spPr>
+          <a:xfrm>
             <a:off x="640080" y="502920"/>
-            <a:ext cx="5486400" cy="274320"/>
-          </a:xfrm>
-          <a:prstGeom prst="rect">
-            <a:avLst/>
-          </a:prstGeom>
-          <a:noFill/>
-          <a:ln/>
-        </p:spPr>
-        <p:txBody>
-          <a:bodyPr wrap="square" lIns="0" tIns="0" rIns="0" bIns="0" rtlCol="0" anchor="ctr"/>
-          <a:lstStyle/>
-          <a:p>
-            <a:pPr indent="0" marL="0">
-              <a:buNone/>
-            </a:pPr>
-            <a:r>
-              <a:rPr lang="en-US" sz="1200" b="1" spc="400" kern="0" dirty="0">
-                <a:solidFill>
-                  <a:srgbClr val="F0E3C8"/>
-                </a:solidFill>
-                <a:latin typeface="Calibri" pitchFamily="34" charset="0"/>
-                <a:ea typeface="Calibri" pitchFamily="34" charset="-122"/>
-                <a:cs typeface="Calibri" pitchFamily="34" charset="-120"/>
-              </a:rPr>
-              <a:t>РЕЗУЛЬТАТ</a:t>
-            </a:r>
-            <a:endParaRPr lang="en-US" sz="1200" dirty="0"/>
-          </a:p>
-        </p:txBody>
-      </p:sp>
-      <p:sp>
-        <p:nvSpPr>
-          <p:cNvPr id="3" name="Text 1"/>
-          <p:cNvSpPr txBox="1"/>
-          <p:nvPr/>
-        </p:nvSpPr>
-        <p:spPr>
-          <a:xfrm>
-            <a:off x="640080" y="868680"/>
-            <a:ext cx="8229600" cy="822960"/>
-          </a:xfrm>
-          <a:prstGeom prst="rect">
-            <a:avLst/>
-          </a:prstGeom>
-          <a:noFill/>
-          <a:ln/>
-        </p:spPr>
-        <p:txBody>
-          <a:bodyPr wrap="square" lIns="0" tIns="0" rIns="0" bIns="0" rtlCol="0" anchor="ctr"/>
-          <a:lstStyle/>
-          <a:p>
-            <a:pPr indent="0" marL="0">
-              <a:buNone/>
-            </a:pPr>
-            <a:r>
-              <a:rPr lang="en-US" sz="4000" b="1" dirty="0">
-                <a:solidFill>
-                  <a:srgbClr val="F7F2E7"/>
+            <a:ext cx="10908792" cy="822960"/>
+          </a:xfrm>
+          <a:prstGeom prst="rect">
+            <a:avLst/>
+          </a:prstGeom>
+          <a:noFill/>
+          <a:ln/>
+        </p:spPr>
+        <p:txBody>
+          <a:bodyPr wrap="square" lIns="0" tIns="0" rIns="0" bIns="0" rtlCol="0" anchor="t"/>
+          <a:lstStyle/>
+          <a:p>
+            <a:pPr indent="0" marL="0">
+              <a:buNone/>
+            </a:pPr>
+            <a:r>
+              <a:rPr lang="en-US" sz="3800" b="1" dirty="0">
+                <a:solidFill>
+                  <a:srgbClr val="1F4A3D"/>
                 </a:solidFill>
                 <a:latin typeface="Cambria" pitchFamily="34" charset="0"/>
                 <a:ea typeface="Cambria" pitchFamily="34" charset="-122"/>
                 <a:cs typeface="Cambria" pitchFamily="34" charset="-120"/>
               </a:rPr>
-              <a:t>Работает уже сейчас</a:t>
-            </a:r>
-            <a:endParaRPr lang="en-US" sz="4000" dirty="0"/>
+              <a:t>Честная оценка вместо красивой картинки</a:t>
+            </a:r>
+            <a:endParaRPr lang="en-US" sz="3800" dirty="0"/>
           </a:p>
         </p:txBody>
       </p:sp>
@@ -8146,35 +10415,64 @@
         </p:nvSpPr>
         <p:spPr>
           <a:xfrm>
-            <a:off x="640080" y="2011680"/>
-            <a:ext cx="3383280" cy="1737360"/>
+            <a:off x="640080" y="1920240"/>
+            <a:ext cx="3429000" cy="3566160"/>
           </a:xfrm>
           <a:prstGeom prst="roundRect">
             <a:avLst>
-              <a:gd name="adj" fmla="val 5263"/>
+              <a:gd name="adj" fmla="val 2667"/>
             </a:avLst>
           </a:prstGeom>
           <a:solidFill>
-            <a:srgbClr val="163529"/>
+            <a:srgbClr val="FFFDF7"/>
           </a:solidFill>
-          <a:ln w="9525">
+          <a:ln w="12700">
             <a:solidFill>
-              <a:srgbClr val="A9834A"/>
+              <a:srgbClr val="E3DAC6"/>
             </a:solidFill>
             <a:prstDash val="solid"/>
           </a:ln>
-        </p:spPr>
-      </p:sp>
-      <p:sp>
-        <p:nvSpPr>
-          <p:cNvPr id="5" name="Text 3"/>
-          <p:cNvSpPr txBox="1"/>
-          <p:nvPr/>
-        </p:nvSpPr>
-        <p:spPr>
-          <a:xfrm>
-            <a:off x="822960" y="2148840"/>
-            <a:ext cx="3017520" cy="914400"/>
+          <a:effectLst>
+            <a:outerShdw sx="100000" sy="100000" kx="0" ky="0" algn="bl" rotWithShape="0" blurRad="127000" dist="25400" dir="5400000">
+              <a:srgbClr val="2A2620">
+                <a:alpha val="12000"/>
+              </a:srgbClr>
+            </a:outerShdw>
+          </a:effectLst>
+        </p:spPr>
+      </p:sp>
+      <p:sp>
+        <p:nvSpPr>
+          <p:cNvPr id="5" name="Shape 3"/>
+          <p:cNvSpPr/>
+          <p:nvPr/>
+        </p:nvSpPr>
+        <p:spPr>
+          <a:xfrm>
+            <a:off x="960120" y="2240280"/>
+            <a:ext cx="1371600" cy="548640"/>
+          </a:xfrm>
+          <a:prstGeom prst="roundRect">
+            <a:avLst>
+              <a:gd name="adj" fmla="val 50000"/>
+            </a:avLst>
+          </a:prstGeom>
+          <a:solidFill>
+            <a:srgbClr val="0F7B4F"/>
+          </a:solidFill>
+          <a:ln/>
+        </p:spPr>
+      </p:sp>
+      <p:sp>
+        <p:nvSpPr>
+          <p:cNvPr id="6" name="Text 4"/>
+          <p:cNvSpPr txBox="1"/>
+          <p:nvPr/>
+        </p:nvSpPr>
+        <p:spPr>
+          <a:xfrm>
+            <a:off x="960120" y="2240280"/>
+            <a:ext cx="1371600" cy="548640"/>
           </a:xfrm>
           <a:prstGeom prst="rect">
             <a:avLst/>
@@ -8190,96 +10488,203 @@
               <a:buNone/>
             </a:pPr>
             <a:r>
-              <a:rPr lang="en-US" sz="4800" b="1" dirty="0">
-                <a:solidFill>
-                  <a:srgbClr val="F0E3C8"/>
+              <a:rPr lang="en-US" sz="1800" b="1" dirty="0">
+                <a:solidFill>
+                  <a:srgbClr val="FFFFFF"/>
+                </a:solidFill>
+                <a:latin typeface="Calibri" pitchFamily="34" charset="0"/>
+                <a:ea typeface="Calibri" pitchFamily="34" charset="-122"/>
+                <a:cs typeface="Calibri" pitchFamily="34" charset="-120"/>
+              </a:rPr>
+              <a:t>≥ 70%</a:t>
+            </a:r>
+            <a:endParaRPr lang="en-US" sz="1800" dirty="0"/>
+          </a:p>
+        </p:txBody>
+      </p:sp>
+      <p:sp>
+        <p:nvSpPr>
+          <p:cNvPr id="7" name="Text 5"/>
+          <p:cNvSpPr txBox="1"/>
+          <p:nvPr/>
+        </p:nvSpPr>
+        <p:spPr>
+          <a:xfrm>
+            <a:off x="960120" y="3017520"/>
+            <a:ext cx="2788920" cy="457200"/>
+          </a:xfrm>
+          <a:prstGeom prst="rect">
+            <a:avLst/>
+          </a:prstGeom>
+          <a:noFill/>
+          <a:ln/>
+        </p:spPr>
+        <p:txBody>
+          <a:bodyPr wrap="square" lIns="0" tIns="0" rIns="0" bIns="0" rtlCol="0" anchor="ctr"/>
+          <a:lstStyle/>
+          <a:p>
+            <a:pPr indent="0" marL="0">
+              <a:buNone/>
+            </a:pPr>
+            <a:r>
+              <a:rPr lang="en-US" sz="2000" b="1" dirty="0">
+                <a:solidFill>
+                  <a:srgbClr val="1F4A3D"/>
                 </a:solidFill>
                 <a:latin typeface="Cambria" pitchFamily="34" charset="0"/>
                 <a:ea typeface="Cambria" pitchFamily="34" charset="-122"/>
                 <a:cs typeface="Cambria" pitchFamily="34" charset="-120"/>
               </a:rPr>
-              <a:t>28</a:t>
-            </a:r>
-            <a:endParaRPr lang="en-US" sz="4800" dirty="0"/>
-          </a:p>
-        </p:txBody>
-      </p:sp>
-      <p:sp>
-        <p:nvSpPr>
-          <p:cNvPr id="6" name="Text 4"/>
-          <p:cNvSpPr txBox="1"/>
-          <p:nvPr/>
-        </p:nvSpPr>
-        <p:spPr>
-          <a:xfrm>
-            <a:off x="822960" y="3063240"/>
-            <a:ext cx="3017520" cy="457200"/>
-          </a:xfrm>
-          <a:prstGeom prst="rect">
-            <a:avLst/>
-          </a:prstGeom>
-          <a:noFill/>
-          <a:ln/>
-        </p:spPr>
-        <p:txBody>
-          <a:bodyPr wrap="square" lIns="0" tIns="0" rIns="0" bIns="0" rtlCol="0" anchor="ctr"/>
-          <a:lstStyle/>
-          <a:p>
-            <a:pPr algn="ctr" indent="0" marL="0">
-              <a:buNone/>
-            </a:pPr>
-            <a:r>
-              <a:rPr lang="en-US" sz="1500" dirty="0">
-                <a:solidFill>
-                  <a:srgbClr val="F7F2E7"/>
-                </a:solidFill>
-                <a:latin typeface="Calibri" pitchFamily="34" charset="0"/>
-                <a:ea typeface="Calibri" pitchFamily="34" charset="-122"/>
-                <a:cs typeface="Calibri" pitchFamily="34" charset="-120"/>
-              </a:rPr>
-              <a:t>проверенных фото</a:t>
-            </a:r>
-            <a:endParaRPr lang="en-US" sz="1500" dirty="0"/>
-          </a:p>
-        </p:txBody>
-      </p:sp>
-      <p:sp>
-        <p:nvSpPr>
-          <p:cNvPr id="7" name="Shape 5"/>
+              <a:t>Подтверждено</a:t>
+            </a:r>
+            <a:endParaRPr lang="en-US" sz="2000" dirty="0"/>
+          </a:p>
+        </p:txBody>
+      </p:sp>
+      <p:sp>
+        <p:nvSpPr>
+          <p:cNvPr id="8" name="Text 6"/>
+          <p:cNvSpPr txBox="1"/>
+          <p:nvPr/>
+        </p:nvSpPr>
+        <p:spPr>
+          <a:xfrm>
+            <a:off x="960120" y="3566160"/>
+            <a:ext cx="2788920" cy="1188720"/>
+          </a:xfrm>
+          <a:prstGeom prst="rect">
+            <a:avLst/>
+          </a:prstGeom>
+          <a:noFill/>
+          <a:ln/>
+        </p:spPr>
+        <p:txBody>
+          <a:bodyPr wrap="square" lIns="0" tIns="0" rIns="0" bIns="0" rtlCol="0" anchor="t"/>
+          <a:lstStyle/>
+          <a:p>
+            <a:pPr indent="0" marL="0">
+              <a:buNone/>
+            </a:pPr>
+            <a:r>
+              <a:rPr lang="en-US" sz="1400" dirty="0">
+                <a:solidFill>
+                  <a:srgbClr val="6D6555"/>
+                </a:solidFill>
+                <a:latin typeface="Calibri" pitchFamily="34" charset="0"/>
+                <a:ea typeface="Calibri" pitchFamily="34" charset="-122"/>
+                <a:cs typeface="Calibri" pitchFamily="34" charset="-120"/>
+              </a:rPr>
+              <a:t>Есть явные признаки: вывеска, узнаваемая архитектура, совпадение подписи.</a:t>
+            </a:r>
+            <a:endParaRPr lang="en-US" sz="1400" dirty="0"/>
+          </a:p>
+        </p:txBody>
+      </p:sp>
+      <p:sp>
+        <p:nvSpPr>
+          <p:cNvPr id="9" name="Text 7"/>
+          <p:cNvSpPr txBox="1"/>
+          <p:nvPr/>
+        </p:nvSpPr>
+        <p:spPr>
+          <a:xfrm>
+            <a:off x="960120" y="4846320"/>
+            <a:ext cx="2788920" cy="365760"/>
+          </a:xfrm>
+          <a:prstGeom prst="rect">
+            <a:avLst/>
+          </a:prstGeom>
+          <a:noFill/>
+          <a:ln/>
+        </p:spPr>
+        <p:txBody>
+          <a:bodyPr wrap="square" lIns="0" tIns="0" rIns="0" bIns="0" rtlCol="0" anchor="ctr"/>
+          <a:lstStyle/>
+          <a:p>
+            <a:pPr indent="0" marL="0">
+              <a:buNone/>
+            </a:pPr>
+            <a:r>
+              <a:rPr lang="en-US" sz="1300" b="1" dirty="0">
+                <a:solidFill>
+                  <a:srgbClr val="0F7B4F"/>
+                </a:solidFill>
+                <a:latin typeface="Calibri" pitchFamily="34" charset="0"/>
+                <a:ea typeface="Calibri" pitchFamily="34" charset="-122"/>
+                <a:cs typeface="Calibri" pitchFamily="34" charset="-120"/>
+              </a:rPr>
+              <a:t>Показано как надёжное</a:t>
+            </a:r>
+            <a:endParaRPr lang="en-US" sz="1300" dirty="0"/>
+          </a:p>
+        </p:txBody>
+      </p:sp>
+      <p:sp>
+        <p:nvSpPr>
+          <p:cNvPr id="10" name="Shape 8"/>
           <p:cNvSpPr/>
           <p:nvPr/>
         </p:nvSpPr>
         <p:spPr>
           <a:xfrm>
-            <a:off x="4297680" y="2011680"/>
-            <a:ext cx="3383280" cy="1737360"/>
+            <a:off x="4389120" y="1920240"/>
+            <a:ext cx="3429000" cy="3566160"/>
           </a:xfrm>
           <a:prstGeom prst="roundRect">
             <a:avLst>
-              <a:gd name="adj" fmla="val 5263"/>
+              <a:gd name="adj" fmla="val 2667"/>
             </a:avLst>
           </a:prstGeom>
           <a:solidFill>
-            <a:srgbClr val="163529"/>
+            <a:srgbClr val="FFFDF7"/>
           </a:solidFill>
-          <a:ln w="9525">
+          <a:ln w="12700">
             <a:solidFill>
-              <a:srgbClr val="A9834A"/>
+              <a:srgbClr val="E3DAC6"/>
             </a:solidFill>
             <a:prstDash val="solid"/>
           </a:ln>
-        </p:spPr>
-      </p:sp>
-      <p:sp>
-        <p:nvSpPr>
-          <p:cNvPr id="8" name="Text 6"/>
-          <p:cNvSpPr txBox="1"/>
-          <p:nvPr/>
-        </p:nvSpPr>
-        <p:spPr>
-          <a:xfrm>
-            <a:off x="4480560" y="2148840"/>
-            <a:ext cx="3017520" cy="914400"/>
+          <a:effectLst>
+            <a:outerShdw sx="100000" sy="100000" kx="0" ky="0" algn="bl" rotWithShape="0" blurRad="127000" dist="25400" dir="5400000">
+              <a:srgbClr val="2A2620">
+                <a:alpha val="12000"/>
+              </a:srgbClr>
+            </a:outerShdw>
+          </a:effectLst>
+        </p:spPr>
+      </p:sp>
+      <p:sp>
+        <p:nvSpPr>
+          <p:cNvPr id="11" name="Shape 9"/>
+          <p:cNvSpPr/>
+          <p:nvPr/>
+        </p:nvSpPr>
+        <p:spPr>
+          <a:xfrm>
+            <a:off x="4709160" y="2240280"/>
+            <a:ext cx="1371600" cy="548640"/>
+          </a:xfrm>
+          <a:prstGeom prst="roundRect">
+            <a:avLst>
+              <a:gd name="adj" fmla="val 50000"/>
+            </a:avLst>
+          </a:prstGeom>
+          <a:solidFill>
+            <a:srgbClr val="B7791F"/>
+          </a:solidFill>
+          <a:ln/>
+        </p:spPr>
+      </p:sp>
+      <p:sp>
+        <p:nvSpPr>
+          <p:cNvPr id="12" name="Text 10"/>
+          <p:cNvSpPr txBox="1"/>
+          <p:nvPr/>
+        </p:nvSpPr>
+        <p:spPr>
+          <a:xfrm>
+            <a:off x="4709160" y="2240280"/>
+            <a:ext cx="1371600" cy="548640"/>
           </a:xfrm>
           <a:prstGeom prst="rect">
             <a:avLst/>
@@ -8295,96 +10700,203 @@
               <a:buNone/>
             </a:pPr>
             <a:r>
-              <a:rPr lang="en-US" sz="4800" b="1" dirty="0">
-                <a:solidFill>
-                  <a:srgbClr val="F0E3C8"/>
+              <a:rPr lang="en-US" sz="1800" b="1" dirty="0">
+                <a:solidFill>
+                  <a:srgbClr val="FFFFFF"/>
+                </a:solidFill>
+                <a:latin typeface="Calibri" pitchFamily="34" charset="0"/>
+                <a:ea typeface="Calibri" pitchFamily="34" charset="-122"/>
+                <a:cs typeface="Calibri" pitchFamily="34" charset="-120"/>
+              </a:rPr>
+              <a:t>35–60%</a:t>
+            </a:r>
+            <a:endParaRPr lang="en-US" sz="1800" dirty="0"/>
+          </a:p>
+        </p:txBody>
+      </p:sp>
+      <p:sp>
+        <p:nvSpPr>
+          <p:cNvPr id="13" name="Text 11"/>
+          <p:cNvSpPr txBox="1"/>
+          <p:nvPr/>
+        </p:nvSpPr>
+        <p:spPr>
+          <a:xfrm>
+            <a:off x="4709160" y="3017520"/>
+            <a:ext cx="2788920" cy="457200"/>
+          </a:xfrm>
+          <a:prstGeom prst="rect">
+            <a:avLst/>
+          </a:prstGeom>
+          <a:noFill/>
+          <a:ln/>
+        </p:spPr>
+        <p:txBody>
+          <a:bodyPr wrap="square" lIns="0" tIns="0" rIns="0" bIns="0" rtlCol="0" anchor="ctr"/>
+          <a:lstStyle/>
+          <a:p>
+            <a:pPr indent="0" marL="0">
+              <a:buNone/>
+            </a:pPr>
+            <a:r>
+              <a:rPr lang="en-US" sz="2000" b="1" dirty="0">
+                <a:solidFill>
+                  <a:srgbClr val="1F4A3D"/>
                 </a:solidFill>
                 <a:latin typeface="Cambria" pitchFamily="34" charset="0"/>
                 <a:ea typeface="Cambria" pitchFamily="34" charset="-122"/>
                 <a:cs typeface="Cambria" pitchFamily="34" charset="-120"/>
               </a:rPr>
-              <a:t>8</a:t>
-            </a:r>
-            <a:endParaRPr lang="en-US" sz="4800" dirty="0"/>
-          </a:p>
-        </p:txBody>
-      </p:sp>
-      <p:sp>
-        <p:nvSpPr>
-          <p:cNvPr id="9" name="Text 7"/>
-          <p:cNvSpPr txBox="1"/>
-          <p:nvPr/>
-        </p:nvSpPr>
-        <p:spPr>
-          <a:xfrm>
-            <a:off x="4480560" y="3063240"/>
-            <a:ext cx="3017520" cy="457200"/>
-          </a:xfrm>
-          <a:prstGeom prst="rect">
-            <a:avLst/>
-          </a:prstGeom>
-          <a:noFill/>
-          <a:ln/>
-        </p:spPr>
-        <p:txBody>
-          <a:bodyPr wrap="square" lIns="0" tIns="0" rIns="0" bIns="0" rtlCol="0" anchor="ctr"/>
-          <a:lstStyle/>
-          <a:p>
-            <a:pPr algn="ctr" indent="0" marL="0">
-              <a:buNone/>
-            </a:pPr>
-            <a:r>
-              <a:rPr lang="en-US" sz="1500" dirty="0">
-                <a:solidFill>
-                  <a:srgbClr val="F7F2E7"/>
-                </a:solidFill>
-                <a:latin typeface="Calibri" pitchFamily="34" charset="0"/>
-                <a:ea typeface="Calibri" pitchFamily="34" charset="-122"/>
-                <a:cs typeface="Calibri" pitchFamily="34" charset="-120"/>
-              </a:rPr>
-              <a:t>соцсетей вуза</a:t>
-            </a:r>
-            <a:endParaRPr lang="en-US" sz="1500" dirty="0"/>
-          </a:p>
-        </p:txBody>
-      </p:sp>
-      <p:sp>
-        <p:nvSpPr>
-          <p:cNvPr id="10" name="Shape 8"/>
+              <a:t>Сомнительно</a:t>
+            </a:r>
+            <a:endParaRPr lang="en-US" sz="2000" dirty="0"/>
+          </a:p>
+        </p:txBody>
+      </p:sp>
+      <p:sp>
+        <p:nvSpPr>
+          <p:cNvPr id="14" name="Text 12"/>
+          <p:cNvSpPr txBox="1"/>
+          <p:nvPr/>
+        </p:nvSpPr>
+        <p:spPr>
+          <a:xfrm>
+            <a:off x="4709160" y="3566160"/>
+            <a:ext cx="2788920" cy="1188720"/>
+          </a:xfrm>
+          <a:prstGeom prst="rect">
+            <a:avLst/>
+          </a:prstGeom>
+          <a:noFill/>
+          <a:ln/>
+        </p:spPr>
+        <p:txBody>
+          <a:bodyPr wrap="square" lIns="0" tIns="0" rIns="0" bIns="0" rtlCol="0" anchor="t"/>
+          <a:lstStyle/>
+          <a:p>
+            <a:pPr indent="0" marL="0">
+              <a:buNone/>
+            </a:pPr>
+            <a:r>
+              <a:rPr lang="en-US" sz="1400" dirty="0">
+                <a:solidFill>
+                  <a:srgbClr val="6D6555"/>
+                </a:solidFill>
+                <a:latin typeface="Calibri" pitchFamily="34" charset="0"/>
+                <a:ea typeface="Calibri" pitchFamily="34" charset="-122"/>
+                <a:cs typeface="Calibri" pitchFamily="34" charset="-120"/>
+              </a:rPr>
+              <a:t>Принадлежность вузу не удалось подтвердить уверенно.</a:t>
+            </a:r>
+            <a:endParaRPr lang="en-US" sz="1400" dirty="0"/>
+          </a:p>
+        </p:txBody>
+      </p:sp>
+      <p:sp>
+        <p:nvSpPr>
+          <p:cNvPr id="15" name="Text 13"/>
+          <p:cNvSpPr txBox="1"/>
+          <p:nvPr/>
+        </p:nvSpPr>
+        <p:spPr>
+          <a:xfrm>
+            <a:off x="4709160" y="4846320"/>
+            <a:ext cx="2788920" cy="365760"/>
+          </a:xfrm>
+          <a:prstGeom prst="rect">
+            <a:avLst/>
+          </a:prstGeom>
+          <a:noFill/>
+          <a:ln/>
+        </p:spPr>
+        <p:txBody>
+          <a:bodyPr wrap="square" lIns="0" tIns="0" rIns="0" bIns="0" rtlCol="0" anchor="ctr"/>
+          <a:lstStyle/>
+          <a:p>
+            <a:pPr indent="0" marL="0">
+              <a:buNone/>
+            </a:pPr>
+            <a:r>
+              <a:rPr lang="en-US" sz="1300" b="1" dirty="0">
+                <a:solidFill>
+                  <a:srgbClr val="B7791F"/>
+                </a:solidFill>
+                <a:latin typeface="Calibri" pitchFamily="34" charset="0"/>
+                <a:ea typeface="Calibri" pitchFamily="34" charset="-122"/>
+                <a:cs typeface="Calibri" pitchFamily="34" charset="-120"/>
+              </a:rPr>
+              <a:t>Показано с предупреждением</a:t>
+            </a:r>
+            <a:endParaRPr lang="en-US" sz="1300" dirty="0"/>
+          </a:p>
+        </p:txBody>
+      </p:sp>
+      <p:sp>
+        <p:nvSpPr>
+          <p:cNvPr id="16" name="Shape 14"/>
           <p:cNvSpPr/>
           <p:nvPr/>
         </p:nvSpPr>
         <p:spPr>
           <a:xfrm>
-            <a:off x="7955280" y="2011680"/>
-            <a:ext cx="3383280" cy="1737360"/>
+            <a:off x="8138160" y="1920240"/>
+            <a:ext cx="3429000" cy="3566160"/>
           </a:xfrm>
           <a:prstGeom prst="roundRect">
             <a:avLst>
-              <a:gd name="adj" fmla="val 5263"/>
+              <a:gd name="adj" fmla="val 2667"/>
             </a:avLst>
           </a:prstGeom>
           <a:solidFill>
-            <a:srgbClr val="163529"/>
+            <a:srgbClr val="FFFDF7"/>
           </a:solidFill>
-          <a:ln w="9525">
+          <a:ln w="12700">
             <a:solidFill>
-              <a:srgbClr val="A9834A"/>
+              <a:srgbClr val="E3DAC6"/>
             </a:solidFill>
             <a:prstDash val="solid"/>
           </a:ln>
-        </p:spPr>
-      </p:sp>
-      <p:sp>
-        <p:nvSpPr>
-          <p:cNvPr id="11" name="Text 9"/>
-          <p:cNvSpPr txBox="1"/>
-          <p:nvPr/>
-        </p:nvSpPr>
-        <p:spPr>
-          <a:xfrm>
-            <a:off x="8138160" y="2148840"/>
-            <a:ext cx="3017520" cy="914400"/>
+          <a:effectLst>
+            <a:outerShdw sx="100000" sy="100000" kx="0" ky="0" algn="bl" rotWithShape="0" blurRad="127000" dist="25400" dir="5400000">
+              <a:srgbClr val="2A2620">
+                <a:alpha val="12000"/>
+              </a:srgbClr>
+            </a:outerShdw>
+          </a:effectLst>
+        </p:spPr>
+      </p:sp>
+      <p:sp>
+        <p:nvSpPr>
+          <p:cNvPr id="17" name="Shape 15"/>
+          <p:cNvSpPr/>
+          <p:nvPr/>
+        </p:nvSpPr>
+        <p:spPr>
+          <a:xfrm>
+            <a:off x="8458200" y="2240280"/>
+            <a:ext cx="1371600" cy="548640"/>
+          </a:xfrm>
+          <a:prstGeom prst="roundRect">
+            <a:avLst>
+              <a:gd name="adj" fmla="val 50000"/>
+            </a:avLst>
+          </a:prstGeom>
+          <a:solidFill>
+            <a:srgbClr val="78716C"/>
+          </a:solidFill>
+          <a:ln/>
+        </p:spPr>
+      </p:sp>
+      <p:sp>
+        <p:nvSpPr>
+          <p:cNvPr id="18" name="Text 16"/>
+          <p:cNvSpPr txBox="1"/>
+          <p:nvPr/>
+        </p:nvSpPr>
+        <p:spPr>
+          <a:xfrm>
+            <a:off x="8458200" y="2240280"/>
+            <a:ext cx="1371600" cy="548640"/>
           </a:xfrm>
           <a:prstGeom prst="rect">
             <a:avLst/>
@@ -8400,68 +10912,295 @@
               <a:buNone/>
             </a:pPr>
             <a:r>
-              <a:rPr lang="en-US" sz="4800" b="1" dirty="0">
-                <a:solidFill>
-                  <a:srgbClr val="F0E3C8"/>
+              <a:rPr lang="en-US" sz="1800" b="1" dirty="0">
+                <a:solidFill>
+                  <a:srgbClr val="FFFFFF"/>
+                </a:solidFill>
+                <a:latin typeface="Calibri" pitchFamily="34" charset="0"/>
+                <a:ea typeface="Calibri" pitchFamily="34" charset="-122"/>
+                <a:cs typeface="Calibri" pitchFamily="34" charset="-120"/>
+              </a:rPr>
+              <a:t>&lt; 35%</a:t>
+            </a:r>
+            <a:endParaRPr lang="en-US" sz="1800" dirty="0"/>
+          </a:p>
+        </p:txBody>
+      </p:sp>
+      <p:sp>
+        <p:nvSpPr>
+          <p:cNvPr id="19" name="Text 17"/>
+          <p:cNvSpPr txBox="1"/>
+          <p:nvPr/>
+        </p:nvSpPr>
+        <p:spPr>
+          <a:xfrm>
+            <a:off x="8458200" y="3017520"/>
+            <a:ext cx="2788920" cy="457200"/>
+          </a:xfrm>
+          <a:prstGeom prst="rect">
+            <a:avLst/>
+          </a:prstGeom>
+          <a:noFill/>
+          <a:ln/>
+        </p:spPr>
+        <p:txBody>
+          <a:bodyPr wrap="square" lIns="0" tIns="0" rIns="0" bIns="0" rtlCol="0" anchor="ctr"/>
+          <a:lstStyle/>
+          <a:p>
+            <a:pPr indent="0" marL="0">
+              <a:buNone/>
+            </a:pPr>
+            <a:r>
+              <a:rPr lang="en-US" sz="2000" b="1" dirty="0">
+                <a:solidFill>
+                  <a:srgbClr val="1F4A3D"/>
                 </a:solidFill>
                 <a:latin typeface="Cambria" pitchFamily="34" charset="0"/>
                 <a:ea typeface="Cambria" pitchFamily="34" charset="-122"/>
                 <a:cs typeface="Cambria" pitchFamily="34" charset="-120"/>
               </a:rPr>
-              <a:t>~20 с</a:t>
-            </a:r>
-            <a:endParaRPr lang="en-US" sz="4800" dirty="0"/>
-          </a:p>
-        </p:txBody>
-      </p:sp>
-      <p:sp>
-        <p:nvSpPr>
-          <p:cNvPr id="12" name="Text 10"/>
-          <p:cNvSpPr txBox="1"/>
-          <p:nvPr/>
-        </p:nvSpPr>
-        <p:spPr>
-          <a:xfrm>
-            <a:off x="8138160" y="3063240"/>
-            <a:ext cx="3017520" cy="457200"/>
-          </a:xfrm>
-          <a:prstGeom prst="rect">
-            <a:avLst/>
-          </a:prstGeom>
-          <a:noFill/>
-          <a:ln/>
-        </p:spPr>
-        <p:txBody>
-          <a:bodyPr wrap="square" lIns="0" tIns="0" rIns="0" bIns="0" rtlCol="0" anchor="ctr"/>
-          <a:lstStyle/>
-          <a:p>
-            <a:pPr algn="ctr" indent="0" marL="0">
-              <a:buNone/>
-            </a:pPr>
-            <a:r>
-              <a:rPr lang="en-US" sz="1500" dirty="0">
-                <a:solidFill>
-                  <a:srgbClr val="F7F2E7"/>
-                </a:solidFill>
-                <a:latin typeface="Calibri" pitchFamily="34" charset="0"/>
-                <a:ea typeface="Calibri" pitchFamily="34" charset="-122"/>
-                <a:cs typeface="Calibri" pitchFamily="34" charset="-120"/>
-              </a:rPr>
-              <a:t>полный поиск</a:t>
-            </a:r>
-            <a:endParaRPr lang="en-US" sz="1500" dirty="0"/>
-          </a:p>
-        </p:txBody>
-      </p:sp>
-      <p:sp>
-        <p:nvSpPr>
-          <p:cNvPr id="13" name="Text 11"/>
-          <p:cNvSpPr txBox="1"/>
-          <p:nvPr/>
-        </p:nvSpPr>
-        <p:spPr>
-          <a:xfrm>
-            <a:off x="640080" y="3931920"/>
+              <a:t>Нерелевантно</a:t>
+            </a:r>
+            <a:endParaRPr lang="en-US" sz="2000" dirty="0"/>
+          </a:p>
+        </p:txBody>
+      </p:sp>
+      <p:sp>
+        <p:nvSpPr>
+          <p:cNvPr id="20" name="Text 18"/>
+          <p:cNvSpPr txBox="1"/>
+          <p:nvPr/>
+        </p:nvSpPr>
+        <p:spPr>
+          <a:xfrm>
+            <a:off x="8458200" y="3566160"/>
+            <a:ext cx="2788920" cy="1188720"/>
+          </a:xfrm>
+          <a:prstGeom prst="rect">
+            <a:avLst/>
+          </a:prstGeom>
+          <a:noFill/>
+          <a:ln/>
+        </p:spPr>
+        <p:txBody>
+          <a:bodyPr wrap="square" lIns="0" tIns="0" rIns="0" bIns="0" rtlCol="0" anchor="t"/>
+          <a:lstStyle/>
+          <a:p>
+            <a:pPr indent="0" marL="0">
+              <a:buNone/>
+            </a:pPr>
+            <a:r>
+              <a:rPr lang="en-US" sz="1400" dirty="0">
+                <a:solidFill>
+                  <a:srgbClr val="6D6555"/>
+                </a:solidFill>
+                <a:latin typeface="Calibri" pitchFamily="34" charset="0"/>
+                <a:ea typeface="Calibri" pitchFamily="34" charset="-122"/>
+                <a:cs typeface="Calibri" pitchFamily="34" charset="-120"/>
+              </a:rPr>
+              <a:t>Стоковое фото или похожее здание другого места.</a:t>
+            </a:r>
+            <a:endParaRPr lang="en-US" sz="1400" dirty="0"/>
+          </a:p>
+        </p:txBody>
+      </p:sp>
+      <p:sp>
+        <p:nvSpPr>
+          <p:cNvPr id="21" name="Text 19"/>
+          <p:cNvSpPr txBox="1"/>
+          <p:nvPr/>
+        </p:nvSpPr>
+        <p:spPr>
+          <a:xfrm>
+            <a:off x="8458200" y="4846320"/>
+            <a:ext cx="2788920" cy="365760"/>
+          </a:xfrm>
+          <a:prstGeom prst="rect">
+            <a:avLst/>
+          </a:prstGeom>
+          <a:noFill/>
+          <a:ln/>
+        </p:spPr>
+        <p:txBody>
+          <a:bodyPr wrap="square" lIns="0" tIns="0" rIns="0" bIns="0" rtlCol="0" anchor="ctr"/>
+          <a:lstStyle/>
+          <a:p>
+            <a:pPr indent="0" marL="0">
+              <a:buNone/>
+            </a:pPr>
+            <a:r>
+              <a:rPr lang="en-US" sz="1300" b="1" dirty="0">
+                <a:solidFill>
+                  <a:srgbClr val="78716C"/>
+                </a:solidFill>
+                <a:latin typeface="Calibri" pitchFamily="34" charset="0"/>
+                <a:ea typeface="Calibri" pitchFamily="34" charset="-122"/>
+                <a:cs typeface="Calibri" pitchFamily="34" charset="-120"/>
+              </a:rPr>
+              <a:t>Скрыто из профиля</a:t>
+            </a:r>
+            <a:endParaRPr lang="en-US" sz="1300" dirty="0"/>
+          </a:p>
+        </p:txBody>
+      </p:sp>
+      <p:sp>
+        <p:nvSpPr>
+          <p:cNvPr id="22" name="Text 20"/>
+          <p:cNvSpPr txBox="1"/>
+          <p:nvPr/>
+        </p:nvSpPr>
+        <p:spPr>
+          <a:xfrm>
+            <a:off x="640080" y="5760720"/>
+            <a:ext cx="10908792" cy="365760"/>
+          </a:xfrm>
+          <a:prstGeom prst="rect">
+            <a:avLst/>
+          </a:prstGeom>
+          <a:noFill/>
+          <a:ln/>
+        </p:spPr>
+        <p:txBody>
+          <a:bodyPr wrap="square" lIns="0" tIns="0" rIns="0" bIns="0" rtlCol="0" anchor="ctr"/>
+          <a:lstStyle/>
+          <a:p>
+            <a:pPr indent="0" marL="0">
+              <a:buNone/>
+            </a:pPr>
+            <a:r>
+              <a:rPr lang="en-US" sz="1400" i="1" dirty="0">
+                <a:solidFill>
+                  <a:srgbClr val="1F4A3D"/>
+                </a:solidFill>
+                <a:latin typeface="Calibri" pitchFamily="34" charset="0"/>
+                <a:ea typeface="Calibri" pitchFamily="34" charset="-122"/>
+                <a:cs typeface="Calibri" pitchFamily="34" charset="-120"/>
+              </a:rPr>
+              <a:t>Если данных мало, сервис прямо об этом говорит, а не выдумывает описание или фото.</a:t>
+            </a:r>
+            <a:endParaRPr lang="en-US" sz="1400" dirty="0"/>
+          </a:p>
+        </p:txBody>
+      </p:sp>
+      <p:sp>
+        <p:nvSpPr>
+          <p:cNvPr id="23" name="Text 21"/>
+          <p:cNvSpPr txBox="1"/>
+          <p:nvPr/>
+        </p:nvSpPr>
+        <p:spPr>
+          <a:xfrm>
+            <a:off x="10634472" y="6400800"/>
+            <a:ext cx="914400" cy="274320"/>
+          </a:xfrm>
+          <a:prstGeom prst="rect">
+            <a:avLst/>
+          </a:prstGeom>
+          <a:noFill/>
+          <a:ln/>
+        </p:spPr>
+        <p:txBody>
+          <a:bodyPr wrap="square" lIns="0" tIns="0" rIns="0" bIns="0" rtlCol="0" anchor="ctr"/>
+          <a:lstStyle/>
+          <a:p>
+            <a:pPr algn="r" indent="0" marL="0">
+              <a:buNone/>
+            </a:pPr>
+            <a:r>
+              <a:rPr lang="en-US" sz="1000" dirty="0">
+                <a:solidFill>
+                  <a:srgbClr val="6D6555"/>
+                </a:solidFill>
+                <a:latin typeface="Calibri" pitchFamily="34" charset="0"/>
+                <a:ea typeface="Calibri" pitchFamily="34" charset="-122"/>
+                <a:cs typeface="Calibri" pitchFamily="34" charset="-120"/>
+              </a:rPr>
+              <a:t>8 / 10</a:t>
+            </a:r>
+            <a:endParaRPr lang="en-US" sz="1000" dirty="0"/>
+          </a:p>
+        </p:txBody>
+      </p:sp>
+      <p:sp>
+        <p:nvSpPr>
+          <p:cNvPr id="24" name="Text 22"/>
+          <p:cNvSpPr txBox="1"/>
+          <p:nvPr/>
+        </p:nvSpPr>
+        <p:spPr>
+          <a:xfrm>
+            <a:off x="640080" y="6400800"/>
+            <a:ext cx="2743200" cy="274320"/>
+          </a:xfrm>
+          <a:prstGeom prst="rect">
+            <a:avLst/>
+          </a:prstGeom>
+          <a:noFill/>
+          <a:ln/>
+        </p:spPr>
+        <p:txBody>
+          <a:bodyPr wrap="square" lIns="0" tIns="0" rIns="0" bIns="0" rtlCol="0" anchor="ctr"/>
+          <a:lstStyle/>
+          <a:p>
+            <a:pPr indent="0" marL="0">
+              <a:buNone/>
+            </a:pPr>
+            <a:r>
+              <a:rPr lang="en-US" sz="1000" dirty="0">
+                <a:solidFill>
+                  <a:srgbClr val="6D6555"/>
+                </a:solidFill>
+                <a:latin typeface="Calibri" pitchFamily="34" charset="0"/>
+                <a:ea typeface="Calibri" pitchFamily="34" charset="-122"/>
+                <a:cs typeface="Calibri" pitchFamily="34" charset="-120"/>
+              </a:rPr>
+              <a:t>Campus Vision</a:t>
+            </a:r>
+            <a:endParaRPr lang="en-US" sz="1000" dirty="0"/>
+          </a:p>
+        </p:txBody>
+      </p:sp>
+    </p:spTree>
+  </p:cSld>
+  <p:clrMapOvr>
+    <a:masterClrMapping/>
+  </p:clrMapOvr>
+</p:sld>
+</file>
+
+<file path=ppt/slides/slide9.xml><?xml version="1.0" encoding="utf-8"?>
+<p:sld xmlns:a="http://schemas.openxmlformats.org/drawingml/2006/main" xmlns:r="http://schemas.openxmlformats.org/officeDocument/2006/relationships" xmlns:p="http://schemas.openxmlformats.org/presentationml/2006/main">
+  <p:cSld name="Slide 9">
+    <p:bg>
+      <p:bgPr>
+        <a:solidFill>
+          <a:srgbClr val="FFFDF7"/>
+        </a:solidFill>
+      </p:bgPr>
+    </p:bg>
+    <p:spTree>
+      <p:nvGrpSpPr>
+        <p:cNvPr id="1" name=""/>
+        <p:cNvGrpSpPr/>
+        <p:nvPr/>
+      </p:nvGrpSpPr>
+      <p:grpSpPr>
+        <a:xfrm>
+          <a:off x="0" y="0"/>
+          <a:ext cx="0" cy="0"/>
+          <a:chOff x="0" y="0"/>
+          <a:chExt cx="0" cy="0"/>
+        </a:xfrm>
+      </p:grpSpPr>
+      <p:sp>
+        <p:nvSpPr>
+          <p:cNvPr id="2" name="Text 0"/>
+          <p:cNvSpPr txBox="1"/>
+          <p:nvPr/>
+        </p:nvSpPr>
+        <p:spPr>
+          <a:xfrm>
+            <a:off x="640080" y="320040"/>
             <a:ext cx="7315200" cy="274320"/>
           </a:xfrm>
           <a:prstGeom prst="rect">
@@ -8478,15 +11217,15 @@
               <a:buNone/>
             </a:pPr>
             <a:r>
-              <a:rPr lang="en-US" sz="1200" dirty="0">
-                <a:solidFill>
-                  <a:srgbClr val="F0E3C8"/>
-                </a:solidFill>
-                <a:latin typeface="Calibri" pitchFamily="34" charset="0"/>
-                <a:ea typeface="Calibri" pitchFamily="34" charset="-122"/>
-                <a:cs typeface="Calibri" pitchFamily="34" charset="-120"/>
-              </a:rPr>
-              <a:t>Пример: Nazarbayev University</a:t>
+              <a:rPr lang="en-US" sz="1200" b="1" spc="400" kern="0" dirty="0">
+                <a:solidFill>
+                  <a:srgbClr val="A9834A"/>
+                </a:solidFill>
+                <a:latin typeface="Calibri" pitchFamily="34" charset="0"/>
+                <a:ea typeface="Calibri" pitchFamily="34" charset="-122"/>
+                <a:cs typeface="Calibri" pitchFamily="34" charset="-120"/>
+              </a:rPr>
+              <a:t>ТЕХНОЛОГИИ</a:t>
             </a:r>
             <a:endParaRPr lang="en-US" sz="1200" dirty="0"/>
           </a:p>
@@ -8494,14 +11233,14 @@
       </p:sp>
       <p:sp>
         <p:nvSpPr>
-          <p:cNvPr id="14" name="Text 12"/>
-          <p:cNvSpPr txBox="1"/>
-          <p:nvPr/>
-        </p:nvSpPr>
-        <p:spPr>
-          <a:xfrm>
-            <a:off x="640080" y="4480560"/>
-            <a:ext cx="10515600" cy="1737360"/>
+          <p:cNvPr id="3" name="Text 1"/>
+          <p:cNvSpPr txBox="1"/>
+          <p:nvPr/>
+        </p:nvSpPr>
+        <p:spPr>
+          <a:xfrm>
+            <a:off x="640080" y="502920"/>
+            <a:ext cx="10908792" cy="822960"/>
           </a:xfrm>
           <a:prstGeom prst="rect">
             <a:avLst/>
@@ -8517,96 +11256,1079 @@
               <a:buNone/>
             </a:pPr>
             <a:r>
-              <a:rPr lang="en-US" sz="1300" b="1" dirty="0">
-                <a:solidFill>
-                  <a:srgbClr val="F0E3C8"/>
-                </a:solidFill>
-                <a:latin typeface="Calibri" pitchFamily="34" charset="0"/>
-                <a:ea typeface="Calibri" pitchFamily="34" charset="-122"/>
-                <a:cs typeface="Calibri" pitchFamily="34" charset="-120"/>
-              </a:rPr>
-              <a:t>Демо</a:t>
-            </a:r>
-            <a:endParaRPr lang="en-US" sz="1300" dirty="0"/>
-          </a:p>
-          <a:p>
-            <a:pPr indent="0" marL="0">
-              <a:buNone/>
-            </a:pPr>
-            <a:r>
-              <a:rPr lang="en-US" sz="2200" b="1" u="sng" dirty="0">
-                <a:solidFill>
-                  <a:srgbClr val="F7F2E7"/>
+              <a:rPr lang="en-US" sz="3800" b="1" dirty="0">
+                <a:solidFill>
+                  <a:srgbClr val="1F4A3D"/>
                 </a:solidFill>
                 <a:latin typeface="Cambria" pitchFamily="34" charset="0"/>
                 <a:ea typeface="Cambria" pitchFamily="34" charset="-122"/>
                 <a:cs typeface="Cambria" pitchFamily="34" charset="-120"/>
-                <a:hlinkClick r:id="rId1" invalidUrl="" action="" tgtFrame="" tooltip="" history="1" highlightClick="0" endSnd="0">
-                  <a:extLst>
-                    <a:ext uri="{A12FA001-AC4F-418D-AE19-62706E023703}">
-                      <ahyp:hlinkClr xmlns:ahyp="http://schemas.microsoft.com/office/drawing/2018/hyperlinkcolor" val="tx"/>
-                    </a:ext>
-                  </a:extLst>
-                </a:hlinkClick>
-              </a:rPr>
-              <a:t>uni-visual-profile.vercel.app</a:t>
-            </a:r>
-            <a:endParaRPr lang="en-US" sz="1300" dirty="0"/>
-          </a:p>
-          <a:p>
-            <a:pPr indent="0" marL="0">
-              <a:buNone/>
-            </a:pPr>
-            <a:r>
-              <a:rPr lang="en-US" sz="800" dirty="0">
-                <a:solidFill>
-                  <a:srgbClr val="000000"/>
-                </a:solidFill>
-              </a:rPr>
-              <a:t> </a:t>
-            </a:r>
-            <a:endParaRPr lang="en-US" sz="1300" dirty="0"/>
-          </a:p>
-          <a:p>
-            <a:pPr indent="0" marL="0">
-              <a:buNone/>
-            </a:pPr>
-            <a:r>
-              <a:rPr lang="en-US" sz="1300" b="1" dirty="0">
+              </a:rPr>
+              <a:t>Открытые источники и один AI</a:t>
+            </a:r>
+            <a:endParaRPr lang="en-US" sz="3800" dirty="0"/>
+          </a:p>
+        </p:txBody>
+      </p:sp>
+      <p:sp>
+        <p:nvSpPr>
+          <p:cNvPr id="4" name="Shape 2"/>
+          <p:cNvSpPr/>
+          <p:nvPr/>
+        </p:nvSpPr>
+        <p:spPr>
+          <a:xfrm>
+            <a:off x="640080" y="1783080"/>
+            <a:ext cx="5303520" cy="1143000"/>
+          </a:xfrm>
+          <a:prstGeom prst="roundRect">
+            <a:avLst>
+              <a:gd name="adj" fmla="val 8000"/>
+            </a:avLst>
+          </a:prstGeom>
+          <a:solidFill>
+            <a:srgbClr val="F7F2E7"/>
+          </a:solidFill>
+          <a:ln w="12700">
+            <a:solidFill>
+              <a:srgbClr val="E3DAC6"/>
+            </a:solidFill>
+            <a:prstDash val="solid"/>
+          </a:ln>
+        </p:spPr>
+      </p:sp>
+      <p:sp>
+        <p:nvSpPr>
+          <p:cNvPr id="5" name="Shape 3"/>
+          <p:cNvSpPr/>
+          <p:nvPr/>
+        </p:nvSpPr>
+        <p:spPr>
+          <a:xfrm>
+            <a:off x="914400" y="2075688"/>
+            <a:ext cx="548640" cy="548640"/>
+          </a:xfrm>
+          <a:prstGeom prst="ellipse">
+            <a:avLst/>
+          </a:prstGeom>
+          <a:solidFill>
+            <a:srgbClr val="1F4A3D"/>
+          </a:solidFill>
+          <a:ln/>
+        </p:spPr>
+      </p:sp>
+      <p:sp>
+        <p:nvSpPr>
+          <p:cNvPr id="6" name="Text 4"/>
+          <p:cNvSpPr txBox="1"/>
+          <p:nvPr/>
+        </p:nvSpPr>
+        <p:spPr>
+          <a:xfrm>
+            <a:off x="914400" y="2075688"/>
+            <a:ext cx="548640" cy="548640"/>
+          </a:xfrm>
+          <a:prstGeom prst="rect">
+            <a:avLst/>
+          </a:prstGeom>
+          <a:noFill/>
+          <a:ln/>
+        </p:spPr>
+        <p:txBody>
+          <a:bodyPr wrap="square" lIns="0" tIns="0" rIns="0" bIns="0" rtlCol="0" anchor="ctr"/>
+          <a:lstStyle/>
+          <a:p>
+            <a:pPr algn="ctr" indent="0" marL="0">
+              <a:buNone/>
+            </a:pPr>
+            <a:r>
+              <a:rPr lang="en-US" sz="1600" b="1" dirty="0">
                 <a:solidFill>
                   <a:srgbClr val="F0E3C8"/>
-                </a:solidFill>
-                <a:latin typeface="Calibri" pitchFamily="34" charset="0"/>
-                <a:ea typeface="Calibri" pitchFamily="34" charset="-122"/>
-                <a:cs typeface="Calibri" pitchFamily="34" charset="-120"/>
-              </a:rPr>
-              <a:t>Код</a:t>
-            </a:r>
-            <a:endParaRPr lang="en-US" sz="1300" dirty="0"/>
-          </a:p>
-          <a:p>
-            <a:pPr indent="0" marL="0">
-              <a:buNone/>
-            </a:pPr>
-            <a:r>
-              <a:rPr lang="en-US" sz="2200" b="1" u="sng" dirty="0">
-                <a:solidFill>
-                  <a:srgbClr val="F7F2E7"/>
                 </a:solidFill>
                 <a:latin typeface="Cambria" pitchFamily="34" charset="0"/>
                 <a:ea typeface="Cambria" pitchFamily="34" charset="-122"/>
                 <a:cs typeface="Cambria" pitchFamily="34" charset="-120"/>
-                <a:hlinkClick r:id="rId2" invalidUrl="" action="" tgtFrame="" tooltip="" history="1" highlightClick="0" endSnd="0">
-                  <a:extLst>
-                    <a:ext uri="{A12FA001-AC4F-418D-AE19-62706E023703}">
-                      <ahyp:hlinkClr xmlns:ahyp="http://schemas.microsoft.com/office/drawing/2018/hyperlinkcolor" val="tx"/>
-                    </a:ext>
-                  </a:extLst>
-                </a:hlinkClick>
-              </a:rPr>
-              <a:t>github.com/forethercoder-lgtm/uni-visual-profile</a:t>
-            </a:r>
-            <a:endParaRPr lang="en-US" sz="1300" dirty="0"/>
+              </a:rPr>
+              <a:t>1</a:t>
+            </a:r>
+            <a:endParaRPr lang="en-US" sz="1600" dirty="0"/>
+          </a:p>
+        </p:txBody>
+      </p:sp>
+      <p:sp>
+        <p:nvSpPr>
+          <p:cNvPr id="7" name="Text 5"/>
+          <p:cNvSpPr txBox="1"/>
+          <p:nvPr/>
+        </p:nvSpPr>
+        <p:spPr>
+          <a:xfrm>
+            <a:off x="1691640" y="1965960"/>
+            <a:ext cx="4023360" cy="365760"/>
+          </a:xfrm>
+          <a:prstGeom prst="rect">
+            <a:avLst/>
+          </a:prstGeom>
+          <a:noFill/>
+          <a:ln/>
+        </p:spPr>
+        <p:txBody>
+          <a:bodyPr wrap="square" lIns="0" tIns="0" rIns="0" bIns="0" rtlCol="0" anchor="ctr"/>
+          <a:lstStyle/>
+          <a:p>
+            <a:pPr indent="0" marL="0">
+              <a:buNone/>
+            </a:pPr>
+            <a:r>
+              <a:rPr lang="en-US" sz="1800" b="1" dirty="0">
+                <a:solidFill>
+                  <a:srgbClr val="1F4A3D"/>
+                </a:solidFill>
+                <a:latin typeface="Cambria" pitchFamily="34" charset="0"/>
+                <a:ea typeface="Cambria" pitchFamily="34" charset="-122"/>
+                <a:cs typeface="Cambria" pitchFamily="34" charset="-120"/>
+              </a:rPr>
+              <a:t>Frontend</a:t>
+            </a:r>
+            <a:endParaRPr lang="en-US" sz="1800" dirty="0"/>
+          </a:p>
+        </p:txBody>
+      </p:sp>
+      <p:sp>
+        <p:nvSpPr>
+          <p:cNvPr id="8" name="Text 6"/>
+          <p:cNvSpPr txBox="1"/>
+          <p:nvPr/>
+        </p:nvSpPr>
+        <p:spPr>
+          <a:xfrm>
+            <a:off x="1691640" y="2377440"/>
+            <a:ext cx="4023360" cy="457200"/>
+          </a:xfrm>
+          <a:prstGeom prst="rect">
+            <a:avLst/>
+          </a:prstGeom>
+          <a:noFill/>
+          <a:ln/>
+        </p:spPr>
+        <p:txBody>
+          <a:bodyPr wrap="square" lIns="0" tIns="0" rIns="0" bIns="0" rtlCol="0" anchor="t"/>
+          <a:lstStyle/>
+          <a:p>
+            <a:pPr indent="0" marL="0">
+              <a:buNone/>
+            </a:pPr>
+            <a:r>
+              <a:rPr lang="en-US" sz="1400" dirty="0">
+                <a:solidFill>
+                  <a:srgbClr val="6D6555"/>
+                </a:solidFill>
+                <a:latin typeface="Calibri" pitchFamily="34" charset="0"/>
+                <a:ea typeface="Calibri" pitchFamily="34" charset="-122"/>
+                <a:cs typeface="Calibri" pitchFamily="34" charset="-120"/>
+              </a:rPr>
+              <a:t>Next.js 16 · React 19 · Tailwind CSS 4</a:t>
+            </a:r>
+            <a:endParaRPr lang="en-US" sz="1400" dirty="0"/>
+          </a:p>
+        </p:txBody>
+      </p:sp>
+      <p:sp>
+        <p:nvSpPr>
+          <p:cNvPr id="9" name="Shape 7"/>
+          <p:cNvSpPr/>
+          <p:nvPr/>
+        </p:nvSpPr>
+        <p:spPr>
+          <a:xfrm>
+            <a:off x="6217920" y="1783080"/>
+            <a:ext cx="5303520" cy="1143000"/>
+          </a:xfrm>
+          <a:prstGeom prst="roundRect">
+            <a:avLst>
+              <a:gd name="adj" fmla="val 8000"/>
+            </a:avLst>
+          </a:prstGeom>
+          <a:solidFill>
+            <a:srgbClr val="F7F2E7"/>
+          </a:solidFill>
+          <a:ln w="12700">
+            <a:solidFill>
+              <a:srgbClr val="E3DAC6"/>
+            </a:solidFill>
+            <a:prstDash val="solid"/>
+          </a:ln>
+        </p:spPr>
+      </p:sp>
+      <p:sp>
+        <p:nvSpPr>
+          <p:cNvPr id="10" name="Shape 8"/>
+          <p:cNvSpPr/>
+          <p:nvPr/>
+        </p:nvSpPr>
+        <p:spPr>
+          <a:xfrm>
+            <a:off x="6492240" y="2075688"/>
+            <a:ext cx="548640" cy="548640"/>
+          </a:xfrm>
+          <a:prstGeom prst="ellipse">
+            <a:avLst/>
+          </a:prstGeom>
+          <a:solidFill>
+            <a:srgbClr val="1F4A3D"/>
+          </a:solidFill>
+          <a:ln/>
+        </p:spPr>
+      </p:sp>
+      <p:sp>
+        <p:nvSpPr>
+          <p:cNvPr id="11" name="Text 9"/>
+          <p:cNvSpPr txBox="1"/>
+          <p:nvPr/>
+        </p:nvSpPr>
+        <p:spPr>
+          <a:xfrm>
+            <a:off x="6492240" y="2075688"/>
+            <a:ext cx="548640" cy="548640"/>
+          </a:xfrm>
+          <a:prstGeom prst="rect">
+            <a:avLst/>
+          </a:prstGeom>
+          <a:noFill/>
+          <a:ln/>
+        </p:spPr>
+        <p:txBody>
+          <a:bodyPr wrap="square" lIns="0" tIns="0" rIns="0" bIns="0" rtlCol="0" anchor="ctr"/>
+          <a:lstStyle/>
+          <a:p>
+            <a:pPr algn="ctr" indent="0" marL="0">
+              <a:buNone/>
+            </a:pPr>
+            <a:r>
+              <a:rPr lang="en-US" sz="1600" b="1" dirty="0">
+                <a:solidFill>
+                  <a:srgbClr val="F0E3C8"/>
+                </a:solidFill>
+                <a:latin typeface="Cambria" pitchFamily="34" charset="0"/>
+                <a:ea typeface="Cambria" pitchFamily="34" charset="-122"/>
+                <a:cs typeface="Cambria" pitchFamily="34" charset="-120"/>
+              </a:rPr>
+              <a:t>2</a:t>
+            </a:r>
+            <a:endParaRPr lang="en-US" sz="1600" dirty="0"/>
+          </a:p>
+        </p:txBody>
+      </p:sp>
+      <p:sp>
+        <p:nvSpPr>
+          <p:cNvPr id="12" name="Text 10"/>
+          <p:cNvSpPr txBox="1"/>
+          <p:nvPr/>
+        </p:nvSpPr>
+        <p:spPr>
+          <a:xfrm>
+            <a:off x="7269480" y="1965960"/>
+            <a:ext cx="4023360" cy="365760"/>
+          </a:xfrm>
+          <a:prstGeom prst="rect">
+            <a:avLst/>
+          </a:prstGeom>
+          <a:noFill/>
+          <a:ln/>
+        </p:spPr>
+        <p:txBody>
+          <a:bodyPr wrap="square" lIns="0" tIns="0" rIns="0" bIns="0" rtlCol="0" anchor="ctr"/>
+          <a:lstStyle/>
+          <a:p>
+            <a:pPr indent="0" marL="0">
+              <a:buNone/>
+            </a:pPr>
+            <a:r>
+              <a:rPr lang="en-US" sz="1800" b="1" dirty="0">
+                <a:solidFill>
+                  <a:srgbClr val="1F4A3D"/>
+                </a:solidFill>
+                <a:latin typeface="Cambria" pitchFamily="34" charset="0"/>
+                <a:ea typeface="Cambria" pitchFamily="34" charset="-122"/>
+                <a:cs typeface="Cambria" pitchFamily="34" charset="-120"/>
+              </a:rPr>
+              <a:t>Backend</a:t>
+            </a:r>
+            <a:endParaRPr lang="en-US" sz="1800" dirty="0"/>
+          </a:p>
+        </p:txBody>
+      </p:sp>
+      <p:sp>
+        <p:nvSpPr>
+          <p:cNvPr id="13" name="Text 11"/>
+          <p:cNvSpPr txBox="1"/>
+          <p:nvPr/>
+        </p:nvSpPr>
+        <p:spPr>
+          <a:xfrm>
+            <a:off x="7269480" y="2377440"/>
+            <a:ext cx="4023360" cy="457200"/>
+          </a:xfrm>
+          <a:prstGeom prst="rect">
+            <a:avLst/>
+          </a:prstGeom>
+          <a:noFill/>
+          <a:ln/>
+        </p:spPr>
+        <p:txBody>
+          <a:bodyPr wrap="square" lIns="0" tIns="0" rIns="0" bIns="0" rtlCol="0" anchor="t"/>
+          <a:lstStyle/>
+          <a:p>
+            <a:pPr indent="0" marL="0">
+              <a:buNone/>
+            </a:pPr>
+            <a:r>
+              <a:rPr lang="en-US" sz="1400" dirty="0">
+                <a:solidFill>
+                  <a:srgbClr val="6D6555"/>
+                </a:solidFill>
+                <a:latin typeface="Calibri" pitchFamily="34" charset="0"/>
+                <a:ea typeface="Calibri" pitchFamily="34" charset="-122"/>
+                <a:cs typeface="Calibri" pitchFamily="34" charset="-120"/>
+              </a:rPr>
+              <a:t>Next.js Route Handlers, serverless на Vercel</a:t>
+            </a:r>
+            <a:endParaRPr lang="en-US" sz="1400" dirty="0"/>
+          </a:p>
+        </p:txBody>
+      </p:sp>
+      <p:sp>
+        <p:nvSpPr>
+          <p:cNvPr id="14" name="Shape 12"/>
+          <p:cNvSpPr/>
+          <p:nvPr/>
+        </p:nvSpPr>
+        <p:spPr>
+          <a:xfrm>
+            <a:off x="640080" y="3154680"/>
+            <a:ext cx="5303520" cy="1143000"/>
+          </a:xfrm>
+          <a:prstGeom prst="roundRect">
+            <a:avLst>
+              <a:gd name="adj" fmla="val 8000"/>
+            </a:avLst>
+          </a:prstGeom>
+          <a:solidFill>
+            <a:srgbClr val="F7F2E7"/>
+          </a:solidFill>
+          <a:ln w="12700">
+            <a:solidFill>
+              <a:srgbClr val="E3DAC6"/>
+            </a:solidFill>
+            <a:prstDash val="solid"/>
+          </a:ln>
+        </p:spPr>
+      </p:sp>
+      <p:sp>
+        <p:nvSpPr>
+          <p:cNvPr id="15" name="Shape 13"/>
+          <p:cNvSpPr/>
+          <p:nvPr/>
+        </p:nvSpPr>
+        <p:spPr>
+          <a:xfrm>
+            <a:off x="914400" y="3447288"/>
+            <a:ext cx="548640" cy="548640"/>
+          </a:xfrm>
+          <a:prstGeom prst="ellipse">
+            <a:avLst/>
+          </a:prstGeom>
+          <a:solidFill>
+            <a:srgbClr val="1F4A3D"/>
+          </a:solidFill>
+          <a:ln/>
+        </p:spPr>
+      </p:sp>
+      <p:sp>
+        <p:nvSpPr>
+          <p:cNvPr id="16" name="Text 14"/>
+          <p:cNvSpPr txBox="1"/>
+          <p:nvPr/>
+        </p:nvSpPr>
+        <p:spPr>
+          <a:xfrm>
+            <a:off x="914400" y="3447288"/>
+            <a:ext cx="548640" cy="548640"/>
+          </a:xfrm>
+          <a:prstGeom prst="rect">
+            <a:avLst/>
+          </a:prstGeom>
+          <a:noFill/>
+          <a:ln/>
+        </p:spPr>
+        <p:txBody>
+          <a:bodyPr wrap="square" lIns="0" tIns="0" rIns="0" bIns="0" rtlCol="0" anchor="ctr"/>
+          <a:lstStyle/>
+          <a:p>
+            <a:pPr algn="ctr" indent="0" marL="0">
+              <a:buNone/>
+            </a:pPr>
+            <a:r>
+              <a:rPr lang="en-US" sz="1600" b="1" dirty="0">
+                <a:solidFill>
+                  <a:srgbClr val="F0E3C8"/>
+                </a:solidFill>
+                <a:latin typeface="Cambria" pitchFamily="34" charset="0"/>
+                <a:ea typeface="Cambria" pitchFamily="34" charset="-122"/>
+                <a:cs typeface="Cambria" pitchFamily="34" charset="-120"/>
+              </a:rPr>
+              <a:t>3</a:t>
+            </a:r>
+            <a:endParaRPr lang="en-US" sz="1600" dirty="0"/>
+          </a:p>
+        </p:txBody>
+      </p:sp>
+      <p:sp>
+        <p:nvSpPr>
+          <p:cNvPr id="17" name="Text 15"/>
+          <p:cNvSpPr txBox="1"/>
+          <p:nvPr/>
+        </p:nvSpPr>
+        <p:spPr>
+          <a:xfrm>
+            <a:off x="1691640" y="3337560"/>
+            <a:ext cx="4023360" cy="365760"/>
+          </a:xfrm>
+          <a:prstGeom prst="rect">
+            <a:avLst/>
+          </a:prstGeom>
+          <a:noFill/>
+          <a:ln/>
+        </p:spPr>
+        <p:txBody>
+          <a:bodyPr wrap="square" lIns="0" tIns="0" rIns="0" bIns="0" rtlCol="0" anchor="ctr"/>
+          <a:lstStyle/>
+          <a:p>
+            <a:pPr indent="0" marL="0">
+              <a:buNone/>
+            </a:pPr>
+            <a:r>
+              <a:rPr lang="en-US" sz="1800" b="1" dirty="0">
+                <a:solidFill>
+                  <a:srgbClr val="1F4A3D"/>
+                </a:solidFill>
+                <a:latin typeface="Cambria" pitchFamily="34" charset="0"/>
+                <a:ea typeface="Cambria" pitchFamily="34" charset="-122"/>
+                <a:cs typeface="Cambria" pitchFamily="34" charset="-120"/>
+              </a:rPr>
+              <a:t>Источники фото</a:t>
+            </a:r>
+            <a:endParaRPr lang="en-US" sz="1800" dirty="0"/>
+          </a:p>
+        </p:txBody>
+      </p:sp>
+      <p:sp>
+        <p:nvSpPr>
+          <p:cNvPr id="18" name="Text 16"/>
+          <p:cNvSpPr txBox="1"/>
+          <p:nvPr/>
+        </p:nvSpPr>
+        <p:spPr>
+          <a:xfrm>
+            <a:off x="1691640" y="3749040"/>
+            <a:ext cx="4023360" cy="457200"/>
+          </a:xfrm>
+          <a:prstGeom prst="rect">
+            <a:avLst/>
+          </a:prstGeom>
+          <a:noFill/>
+          <a:ln/>
+        </p:spPr>
+        <p:txBody>
+          <a:bodyPr wrap="square" lIns="0" tIns="0" rIns="0" bIns="0" rtlCol="0" anchor="t"/>
+          <a:lstStyle/>
+          <a:p>
+            <a:pPr indent="0" marL="0">
+              <a:buNone/>
+            </a:pPr>
+            <a:r>
+              <a:rPr lang="en-US" sz="1400" dirty="0">
+                <a:solidFill>
+                  <a:srgbClr val="6D6555"/>
+                </a:solidFill>
+                <a:latin typeface="Calibri" pitchFamily="34" charset="0"/>
+                <a:ea typeface="Calibri" pitchFamily="34" charset="-122"/>
+                <a:cs typeface="Calibri" pitchFamily="34" charset="-120"/>
+              </a:rPr>
+              <a:t>Wikimedia Commons · Openverse · сайт вуза</a:t>
+            </a:r>
+            <a:endParaRPr lang="en-US" sz="1400" dirty="0"/>
+          </a:p>
+        </p:txBody>
+      </p:sp>
+      <p:sp>
+        <p:nvSpPr>
+          <p:cNvPr id="19" name="Shape 17"/>
+          <p:cNvSpPr/>
+          <p:nvPr/>
+        </p:nvSpPr>
+        <p:spPr>
+          <a:xfrm>
+            <a:off x="6217920" y="3154680"/>
+            <a:ext cx="5303520" cy="1143000"/>
+          </a:xfrm>
+          <a:prstGeom prst="roundRect">
+            <a:avLst>
+              <a:gd name="adj" fmla="val 8000"/>
+            </a:avLst>
+          </a:prstGeom>
+          <a:solidFill>
+            <a:srgbClr val="F7F2E7"/>
+          </a:solidFill>
+          <a:ln w="12700">
+            <a:solidFill>
+              <a:srgbClr val="E3DAC6"/>
+            </a:solidFill>
+            <a:prstDash val="solid"/>
+          </a:ln>
+        </p:spPr>
+      </p:sp>
+      <p:sp>
+        <p:nvSpPr>
+          <p:cNvPr id="20" name="Shape 18"/>
+          <p:cNvSpPr/>
+          <p:nvPr/>
+        </p:nvSpPr>
+        <p:spPr>
+          <a:xfrm>
+            <a:off x="6492240" y="3447288"/>
+            <a:ext cx="548640" cy="548640"/>
+          </a:xfrm>
+          <a:prstGeom prst="ellipse">
+            <a:avLst/>
+          </a:prstGeom>
+          <a:solidFill>
+            <a:srgbClr val="1F4A3D"/>
+          </a:solidFill>
+          <a:ln/>
+        </p:spPr>
+      </p:sp>
+      <p:sp>
+        <p:nvSpPr>
+          <p:cNvPr id="21" name="Text 19"/>
+          <p:cNvSpPr txBox="1"/>
+          <p:nvPr/>
+        </p:nvSpPr>
+        <p:spPr>
+          <a:xfrm>
+            <a:off x="6492240" y="3447288"/>
+            <a:ext cx="548640" cy="548640"/>
+          </a:xfrm>
+          <a:prstGeom prst="rect">
+            <a:avLst/>
+          </a:prstGeom>
+          <a:noFill/>
+          <a:ln/>
+        </p:spPr>
+        <p:txBody>
+          <a:bodyPr wrap="square" lIns="0" tIns="0" rIns="0" bIns="0" rtlCol="0" anchor="ctr"/>
+          <a:lstStyle/>
+          <a:p>
+            <a:pPr algn="ctr" indent="0" marL="0">
+              <a:buNone/>
+            </a:pPr>
+            <a:r>
+              <a:rPr lang="en-US" sz="1600" b="1" dirty="0">
+                <a:solidFill>
+                  <a:srgbClr val="F0E3C8"/>
+                </a:solidFill>
+                <a:latin typeface="Cambria" pitchFamily="34" charset="0"/>
+                <a:ea typeface="Cambria" pitchFamily="34" charset="-122"/>
+                <a:cs typeface="Cambria" pitchFamily="34" charset="-120"/>
+              </a:rPr>
+              <a:t>4</a:t>
+            </a:r>
+            <a:endParaRPr lang="en-US" sz="1600" dirty="0"/>
+          </a:p>
+        </p:txBody>
+      </p:sp>
+      <p:sp>
+        <p:nvSpPr>
+          <p:cNvPr id="22" name="Text 20"/>
+          <p:cNvSpPr txBox="1"/>
+          <p:nvPr/>
+        </p:nvSpPr>
+        <p:spPr>
+          <a:xfrm>
+            <a:off x="7269480" y="3337560"/>
+            <a:ext cx="4023360" cy="365760"/>
+          </a:xfrm>
+          <a:prstGeom prst="rect">
+            <a:avLst/>
+          </a:prstGeom>
+          <a:noFill/>
+          <a:ln/>
+        </p:spPr>
+        <p:txBody>
+          <a:bodyPr wrap="square" lIns="0" tIns="0" rIns="0" bIns="0" rtlCol="0" anchor="ctr"/>
+          <a:lstStyle/>
+          <a:p>
+            <a:pPr indent="0" marL="0">
+              <a:buNone/>
+            </a:pPr>
+            <a:r>
+              <a:rPr lang="en-US" sz="1800" b="1" dirty="0">
+                <a:solidFill>
+                  <a:srgbClr val="1F4A3D"/>
+                </a:solidFill>
+                <a:latin typeface="Cambria" pitchFamily="34" charset="0"/>
+                <a:ea typeface="Cambria" pitchFamily="34" charset="-122"/>
+                <a:cs typeface="Cambria" pitchFamily="34" charset="-120"/>
+              </a:rPr>
+              <a:t>Данные о вузе</a:t>
+            </a:r>
+            <a:endParaRPr lang="en-US" sz="1800" dirty="0"/>
+          </a:p>
+        </p:txBody>
+      </p:sp>
+      <p:sp>
+        <p:nvSpPr>
+          <p:cNvPr id="23" name="Text 21"/>
+          <p:cNvSpPr txBox="1"/>
+          <p:nvPr/>
+        </p:nvSpPr>
+        <p:spPr>
+          <a:xfrm>
+            <a:off x="7269480" y="3749040"/>
+            <a:ext cx="4023360" cy="457200"/>
+          </a:xfrm>
+          <a:prstGeom prst="rect">
+            <a:avLst/>
+          </a:prstGeom>
+          <a:noFill/>
+          <a:ln/>
+        </p:spPr>
+        <p:txBody>
+          <a:bodyPr wrap="square" lIns="0" tIns="0" rIns="0" bIns="0" rtlCol="0" anchor="t"/>
+          <a:lstStyle/>
+          <a:p>
+            <a:pPr indent="0" marL="0">
+              <a:buNone/>
+            </a:pPr>
+            <a:r>
+              <a:rPr lang="en-US" sz="1400" dirty="0">
+                <a:solidFill>
+                  <a:srgbClr val="6D6555"/>
+                </a:solidFill>
+                <a:latin typeface="Calibri" pitchFamily="34" charset="0"/>
+                <a:ea typeface="Calibri" pitchFamily="34" charset="-122"/>
+                <a:cs typeface="Calibri" pitchFamily="34" charset="-120"/>
+              </a:rPr>
+              <a:t>Wikidata · Wikipedia · официальные соцсети</a:t>
+            </a:r>
+            <a:endParaRPr lang="en-US" sz="1400" dirty="0"/>
+          </a:p>
+        </p:txBody>
+      </p:sp>
+      <p:sp>
+        <p:nvSpPr>
+          <p:cNvPr id="24" name="Shape 22"/>
+          <p:cNvSpPr/>
+          <p:nvPr/>
+        </p:nvSpPr>
+        <p:spPr>
+          <a:xfrm>
+            <a:off x="640080" y="4526280"/>
+            <a:ext cx="5303520" cy="1143000"/>
+          </a:xfrm>
+          <a:prstGeom prst="roundRect">
+            <a:avLst>
+              <a:gd name="adj" fmla="val 8000"/>
+            </a:avLst>
+          </a:prstGeom>
+          <a:solidFill>
+            <a:srgbClr val="F7F2E7"/>
+          </a:solidFill>
+          <a:ln w="12700">
+            <a:solidFill>
+              <a:srgbClr val="E3DAC6"/>
+            </a:solidFill>
+            <a:prstDash val="solid"/>
+          </a:ln>
+        </p:spPr>
+      </p:sp>
+      <p:sp>
+        <p:nvSpPr>
+          <p:cNvPr id="25" name="Shape 23"/>
+          <p:cNvSpPr/>
+          <p:nvPr/>
+        </p:nvSpPr>
+        <p:spPr>
+          <a:xfrm>
+            <a:off x="914400" y="4818888"/>
+            <a:ext cx="548640" cy="548640"/>
+          </a:xfrm>
+          <a:prstGeom prst="ellipse">
+            <a:avLst/>
+          </a:prstGeom>
+          <a:solidFill>
+            <a:srgbClr val="1F4A3D"/>
+          </a:solidFill>
+          <a:ln/>
+        </p:spPr>
+      </p:sp>
+      <p:sp>
+        <p:nvSpPr>
+          <p:cNvPr id="26" name="Text 24"/>
+          <p:cNvSpPr txBox="1"/>
+          <p:nvPr/>
+        </p:nvSpPr>
+        <p:spPr>
+          <a:xfrm>
+            <a:off x="914400" y="4818888"/>
+            <a:ext cx="548640" cy="548640"/>
+          </a:xfrm>
+          <a:prstGeom prst="rect">
+            <a:avLst/>
+          </a:prstGeom>
+          <a:noFill/>
+          <a:ln/>
+        </p:spPr>
+        <p:txBody>
+          <a:bodyPr wrap="square" lIns="0" tIns="0" rIns="0" bIns="0" rtlCol="0" anchor="ctr"/>
+          <a:lstStyle/>
+          <a:p>
+            <a:pPr algn="ctr" indent="0" marL="0">
+              <a:buNone/>
+            </a:pPr>
+            <a:r>
+              <a:rPr lang="en-US" sz="1600" b="1" dirty="0">
+                <a:solidFill>
+                  <a:srgbClr val="F0E3C8"/>
+                </a:solidFill>
+                <a:latin typeface="Cambria" pitchFamily="34" charset="0"/>
+                <a:ea typeface="Cambria" pitchFamily="34" charset="-122"/>
+                <a:cs typeface="Cambria" pitchFamily="34" charset="-120"/>
+              </a:rPr>
+              <a:t>5</a:t>
+            </a:r>
+            <a:endParaRPr lang="en-US" sz="1600" dirty="0"/>
+          </a:p>
+        </p:txBody>
+      </p:sp>
+      <p:sp>
+        <p:nvSpPr>
+          <p:cNvPr id="27" name="Text 25"/>
+          <p:cNvSpPr txBox="1"/>
+          <p:nvPr/>
+        </p:nvSpPr>
+        <p:spPr>
+          <a:xfrm>
+            <a:off x="1691640" y="4709160"/>
+            <a:ext cx="4023360" cy="365760"/>
+          </a:xfrm>
+          <a:prstGeom prst="rect">
+            <a:avLst/>
+          </a:prstGeom>
+          <a:noFill/>
+          <a:ln/>
+        </p:spPr>
+        <p:txBody>
+          <a:bodyPr wrap="square" lIns="0" tIns="0" rIns="0" bIns="0" rtlCol="0" anchor="ctr"/>
+          <a:lstStyle/>
+          <a:p>
+            <a:pPr indent="0" marL="0">
+              <a:buNone/>
+            </a:pPr>
+            <a:r>
+              <a:rPr lang="en-US" sz="1800" b="1" dirty="0">
+                <a:solidFill>
+                  <a:srgbClr val="1F4A3D"/>
+                </a:solidFill>
+                <a:latin typeface="Cambria" pitchFamily="34" charset="0"/>
+                <a:ea typeface="Cambria" pitchFamily="34" charset="-122"/>
+                <a:cs typeface="Cambria" pitchFamily="34" charset="-120"/>
+              </a:rPr>
+              <a:t>Проверка</a:t>
+            </a:r>
+            <a:endParaRPr lang="en-US" sz="1800" dirty="0"/>
+          </a:p>
+        </p:txBody>
+      </p:sp>
+      <p:sp>
+        <p:nvSpPr>
+          <p:cNvPr id="28" name="Text 26"/>
+          <p:cNvSpPr txBox="1"/>
+          <p:nvPr/>
+        </p:nvSpPr>
+        <p:spPr>
+          <a:xfrm>
+            <a:off x="1691640" y="5120640"/>
+            <a:ext cx="4023360" cy="457200"/>
+          </a:xfrm>
+          <a:prstGeom prst="rect">
+            <a:avLst/>
+          </a:prstGeom>
+          <a:noFill/>
+          <a:ln/>
+        </p:spPr>
+        <p:txBody>
+          <a:bodyPr wrap="square" lIns="0" tIns="0" rIns="0" bIns="0" rtlCol="0" anchor="t"/>
+          <a:lstStyle/>
+          <a:p>
+            <a:pPr indent="0" marL="0">
+              <a:buNone/>
+            </a:pPr>
+            <a:r>
+              <a:rPr lang="en-US" sz="1400" dirty="0">
+                <a:solidFill>
+                  <a:srgbClr val="6D6555"/>
+                </a:solidFill>
+                <a:latin typeface="Calibri" pitchFamily="34" charset="0"/>
+                <a:ea typeface="Calibri" pitchFamily="34" charset="-122"/>
+                <a:cs typeface="Calibri" pitchFamily="34" charset="-120"/>
+              </a:rPr>
+              <a:t>Google Gemini Vision + perceptual hash (sharp)</a:t>
+            </a:r>
+            <a:endParaRPr lang="en-US" sz="1400" dirty="0"/>
+          </a:p>
+        </p:txBody>
+      </p:sp>
+      <p:sp>
+        <p:nvSpPr>
+          <p:cNvPr id="29" name="Shape 27"/>
+          <p:cNvSpPr/>
+          <p:nvPr/>
+        </p:nvSpPr>
+        <p:spPr>
+          <a:xfrm>
+            <a:off x="6217920" y="4526280"/>
+            <a:ext cx="5303520" cy="1143000"/>
+          </a:xfrm>
+          <a:prstGeom prst="roundRect">
+            <a:avLst>
+              <a:gd name="adj" fmla="val 8000"/>
+            </a:avLst>
+          </a:prstGeom>
+          <a:solidFill>
+            <a:srgbClr val="F7F2E7"/>
+          </a:solidFill>
+          <a:ln w="12700">
+            <a:solidFill>
+              <a:srgbClr val="E3DAC6"/>
+            </a:solidFill>
+            <a:prstDash val="solid"/>
+          </a:ln>
+        </p:spPr>
+      </p:sp>
+      <p:sp>
+        <p:nvSpPr>
+          <p:cNvPr id="30" name="Shape 28"/>
+          <p:cNvSpPr/>
+          <p:nvPr/>
+        </p:nvSpPr>
+        <p:spPr>
+          <a:xfrm>
+            <a:off x="6492240" y="4818888"/>
+            <a:ext cx="548640" cy="548640"/>
+          </a:xfrm>
+          <a:prstGeom prst="ellipse">
+            <a:avLst/>
+          </a:prstGeom>
+          <a:solidFill>
+            <a:srgbClr val="1F4A3D"/>
+          </a:solidFill>
+          <a:ln/>
+        </p:spPr>
+      </p:sp>
+      <p:sp>
+        <p:nvSpPr>
+          <p:cNvPr id="31" name="Text 29"/>
+          <p:cNvSpPr txBox="1"/>
+          <p:nvPr/>
+        </p:nvSpPr>
+        <p:spPr>
+          <a:xfrm>
+            <a:off x="6492240" y="4818888"/>
+            <a:ext cx="548640" cy="548640"/>
+          </a:xfrm>
+          <a:prstGeom prst="rect">
+            <a:avLst/>
+          </a:prstGeom>
+          <a:noFill/>
+          <a:ln/>
+        </p:spPr>
+        <p:txBody>
+          <a:bodyPr wrap="square" lIns="0" tIns="0" rIns="0" bIns="0" rtlCol="0" anchor="ctr"/>
+          <a:lstStyle/>
+          <a:p>
+            <a:pPr algn="ctr" indent="0" marL="0">
+              <a:buNone/>
+            </a:pPr>
+            <a:r>
+              <a:rPr lang="en-US" sz="1600" b="1" dirty="0">
+                <a:solidFill>
+                  <a:srgbClr val="F0E3C8"/>
+                </a:solidFill>
+                <a:latin typeface="Cambria" pitchFamily="34" charset="0"/>
+                <a:ea typeface="Cambria" pitchFamily="34" charset="-122"/>
+                <a:cs typeface="Cambria" pitchFamily="34" charset="-120"/>
+              </a:rPr>
+              <a:t>6</a:t>
+            </a:r>
+            <a:endParaRPr lang="en-US" sz="1600" dirty="0"/>
+          </a:p>
+        </p:txBody>
+      </p:sp>
+      <p:sp>
+        <p:nvSpPr>
+          <p:cNvPr id="32" name="Text 30"/>
+          <p:cNvSpPr txBox="1"/>
+          <p:nvPr/>
+        </p:nvSpPr>
+        <p:spPr>
+          <a:xfrm>
+            <a:off x="7269480" y="4709160"/>
+            <a:ext cx="4023360" cy="365760"/>
+          </a:xfrm>
+          <a:prstGeom prst="rect">
+            <a:avLst/>
+          </a:prstGeom>
+          <a:noFill/>
+          <a:ln/>
+        </p:spPr>
+        <p:txBody>
+          <a:bodyPr wrap="square" lIns="0" tIns="0" rIns="0" bIns="0" rtlCol="0" anchor="ctr"/>
+          <a:lstStyle/>
+          <a:p>
+            <a:pPr indent="0" marL="0">
+              <a:buNone/>
+            </a:pPr>
+            <a:r>
+              <a:rPr lang="en-US" sz="1800" b="1" dirty="0">
+                <a:solidFill>
+                  <a:srgbClr val="1F4A3D"/>
+                </a:solidFill>
+                <a:latin typeface="Cambria" pitchFamily="34" charset="0"/>
+                <a:ea typeface="Cambria" pitchFamily="34" charset="-122"/>
+                <a:cs typeface="Cambria" pitchFamily="34" charset="-120"/>
+              </a:rPr>
+              <a:t>Кэш</a:t>
+            </a:r>
+            <a:endParaRPr lang="en-US" sz="1800" dirty="0"/>
+          </a:p>
+        </p:txBody>
+      </p:sp>
+      <p:sp>
+        <p:nvSpPr>
+          <p:cNvPr id="33" name="Text 31"/>
+          <p:cNvSpPr txBox="1"/>
+          <p:nvPr/>
+        </p:nvSpPr>
+        <p:spPr>
+          <a:xfrm>
+            <a:off x="7269480" y="5120640"/>
+            <a:ext cx="4023360" cy="457200"/>
+          </a:xfrm>
+          <a:prstGeom prst="rect">
+            <a:avLst/>
+          </a:prstGeom>
+          <a:noFill/>
+          <a:ln/>
+        </p:spPr>
+        <p:txBody>
+          <a:bodyPr wrap="square" lIns="0" tIns="0" rIns="0" bIns="0" rtlCol="0" anchor="t"/>
+          <a:lstStyle/>
+          <a:p>
+            <a:pPr indent="0" marL="0">
+              <a:buNone/>
+            </a:pPr>
+            <a:r>
+              <a:rPr lang="en-US" sz="1400" dirty="0">
+                <a:solidFill>
+                  <a:srgbClr val="6D6555"/>
+                </a:solidFill>
+                <a:latin typeface="Calibri" pitchFamily="34" charset="0"/>
+                <a:ea typeface="Calibri" pitchFamily="34" charset="-122"/>
+                <a:cs typeface="Calibri" pitchFamily="34" charset="-120"/>
+              </a:rPr>
+              <a:t>In-memory: повторный поиск возвращается почти мгновенно</a:t>
+            </a:r>
+            <a:endParaRPr lang="en-US" sz="1400" dirty="0"/>
+          </a:p>
+        </p:txBody>
+      </p:sp>
+      <p:sp>
+        <p:nvSpPr>
+          <p:cNvPr id="34" name="Text 32"/>
+          <p:cNvSpPr txBox="1"/>
+          <p:nvPr/>
+        </p:nvSpPr>
+        <p:spPr>
+          <a:xfrm>
+            <a:off x="10634472" y="6400800"/>
+            <a:ext cx="914400" cy="274320"/>
+          </a:xfrm>
+          <a:prstGeom prst="rect">
+            <a:avLst/>
+          </a:prstGeom>
+          <a:noFill/>
+          <a:ln/>
+        </p:spPr>
+        <p:txBody>
+          <a:bodyPr wrap="square" lIns="0" tIns="0" rIns="0" bIns="0" rtlCol="0" anchor="ctr"/>
+          <a:lstStyle/>
+          <a:p>
+            <a:pPr algn="r" indent="0" marL="0">
+              <a:buNone/>
+            </a:pPr>
+            <a:r>
+              <a:rPr lang="en-US" sz="1000" dirty="0">
+                <a:solidFill>
+                  <a:srgbClr val="6D6555"/>
+                </a:solidFill>
+                <a:latin typeface="Calibri" pitchFamily="34" charset="0"/>
+                <a:ea typeface="Calibri" pitchFamily="34" charset="-122"/>
+                <a:cs typeface="Calibri" pitchFamily="34" charset="-120"/>
+              </a:rPr>
+              <a:t>9 / 10</a:t>
+            </a:r>
+            <a:endParaRPr lang="en-US" sz="1000" dirty="0"/>
+          </a:p>
+        </p:txBody>
+      </p:sp>
+      <p:sp>
+        <p:nvSpPr>
+          <p:cNvPr id="35" name="Text 33"/>
+          <p:cNvSpPr txBox="1"/>
+          <p:nvPr/>
+        </p:nvSpPr>
+        <p:spPr>
+          <a:xfrm>
+            <a:off x="640080" y="6400800"/>
+            <a:ext cx="2743200" cy="274320"/>
+          </a:xfrm>
+          <a:prstGeom prst="rect">
+            <a:avLst/>
+          </a:prstGeom>
+          <a:noFill/>
+          <a:ln/>
+        </p:spPr>
+        <p:txBody>
+          <a:bodyPr wrap="square" lIns="0" tIns="0" rIns="0" bIns="0" rtlCol="0" anchor="ctr"/>
+          <a:lstStyle/>
+          <a:p>
+            <a:pPr indent="0" marL="0">
+              <a:buNone/>
+            </a:pPr>
+            <a:r>
+              <a:rPr lang="en-US" sz="1000" dirty="0">
+                <a:solidFill>
+                  <a:srgbClr val="6D6555"/>
+                </a:solidFill>
+                <a:latin typeface="Calibri" pitchFamily="34" charset="0"/>
+                <a:ea typeface="Calibri" pitchFamily="34" charset="-122"/>
+                <a:cs typeface="Calibri" pitchFamily="34" charset="-120"/>
+              </a:rPr>
+              <a:t>Campus Vision</a:t>
+            </a:r>
+            <a:endParaRPr lang="en-US" sz="1000" dirty="0"/>
           </a:p>
         </p:txBody>
       </p:sp>
